--- a/dokumen/PPT-Laporan.pptx
+++ b/dokumen/PPT-Laporan.pptx
@@ -10,6 +10,8 @@
     <p:sldId id="258" r:id="rId4"/>
     <p:sldId id="259" r:id="rId5"/>
     <p:sldId id="260" r:id="rId6"/>
+    <p:sldId id="261" r:id="rId7"/>
+    <p:sldId id="262" r:id="rId8"/>
   </p:sldIdLst>
   <p:sldSz cx="9144000" cy="5143500" type="screen16x9"/>
   <p:notesSz cx="6858000" cy="9144000"/>
@@ -3194,7 +3196,7 @@
             </a:pPr>
             <a:r>
               <a:rPr/>
-              <a:t>R Markdown</a:t>
+              <a:t>Latar belakang</a:t>
             </a:r>
           </a:p>
         </p:txBody>
@@ -3219,34 +3221,7 @@
             </a:pPr>
             <a:r>
               <a:rPr/>
-              <a:t>This is an R Markdown presentation. Markdown is a simple formatting syntax for authoring HTML, PDF, and MS Word documents. For more details on using R Markdown see </a:t>
-            </a:r>
-            <a:r>
-              <a:rPr>
-                <a:hlinkClick r:id="rId2"/>
-              </a:rPr>
-              <a:t>http://rmarkdown.rstudio.com</a:t>
-            </a:r>
-            <a:r>
-              <a:rPr/>
-              <a:t>.</a:t>
-            </a:r>
-          </a:p>
-          <a:p>
-            <a:pPr lvl="0" indent="0" marL="0">
-              <a:buNone/>
-            </a:pPr>
-            <a:r>
-              <a:rPr/>
-              <a:t>When you click the </a:t>
-            </a:r>
-            <a:r>
-              <a:rPr b="1"/>
-              <a:t>Knit</a:t>
-            </a:r>
-            <a:r>
-              <a:rPr/>
-              <a:t> button a document will be generated that includes both content as well as the output of any embedded R code chunks within the document.</a:t>
+              <a:t>Pembangunan wilayah yang komprehensif tidak hanya diukur dari pertumbuhan infrastruktur fisik, tetapi juga dari peningkatkan taraf hidup dan kesejahteraan masyarakatnya. Salah satu indikator utama yang masih menjadi tantangan dalam pembangunan di berbagai wilayah di Indonesia adalah tingkat kemiskinan (Kuncoro 2010). Kemiskinan merupakan fenomena multidimensional yang dipengaruhi oleh berbagai faktor sosial dan ekonomi. Dalam pendekatan makroekonomi, kualitas sumber daya manusia dan ketersediaan lapangan pekerjaan dianggap sebagai dua pilar krusial yang dapat mengentaskan masyarakat dari garis kemiskinan.</a:t>
             </a:r>
           </a:p>
         </p:txBody>
@@ -3293,7 +3268,7 @@
             </a:pPr>
             <a:r>
               <a:rPr/>
-              <a:t>Slide with Bullets</a:t>
+              <a:t>Latar belakang</a:t>
             </a:r>
           </a:p>
         </p:txBody>
@@ -3313,24 +3288,12 @@
           <a:bodyPr/>
           <a:lstStyle/>
           <a:p>
-            <a:pPr lvl="0"/>
+            <a:pPr lvl="0" indent="0" marL="0">
+              <a:buNone/>
+            </a:pPr>
             <a:r>
               <a:rPr/>
-              <a:t>Bullet 1</a:t>
-            </a:r>
-          </a:p>
-          <a:p>
-            <a:pPr lvl="0"/>
-            <a:r>
-              <a:rPr/>
-              <a:t>Bullet 2</a:t>
-            </a:r>
-          </a:p>
-          <a:p>
-            <a:pPr lvl="0"/>
-            <a:r>
-              <a:rPr/>
-              <a:t>Bullet 3</a:t>
+              <a:t>Teori human capital atau modal manusia menegaskan bahwa pendidikan formal merupakan investasi jangka panjang yang berbanding lurus dengan peningkatan produktivitas dan kapabilitas ekonomi seseorang (Todaro dan Smith 2015). Hal ini direpresentasikan oleh indikator rata-rata lama sekolah. Logika statistiknya, semakin tinggi durasi pendidikan yang diselesaikan oleh penduduk di suatu wilayah, semakin besar peluang mereka untuk diserap oleh pasar kerja yang layak, sehingga tingkat kemiskinan dapat ditekan. Sebaliknya, ketidakmampuan pasar kerja dalam menyerap angkatan kerja akan memicu tingginya angka pengangguran terbuka. Tingkat pengangguran yang tinggi secara langsung memutus aliran pendapatan individu, yang pada akhirnya bermuara pada peningkatan persentase kemiskinan wilayah (Sukirno, 2011).</a:t>
             </a:r>
           </a:p>
         </p:txBody>
@@ -3377,6 +3340,162 @@
             </a:pPr>
             <a:r>
               <a:rPr/>
+              <a:t>Latar belakang</a:t>
+            </a:r>
+          </a:p>
+        </p:txBody>
+      </p:sp>
+      <p:sp>
+        <p:nvSpPr>
+          <p:cNvPr id="3" name="Content Placeholder 2"/>
+          <p:cNvSpPr>
+            <a:spLocks noGrp="1"/>
+          </p:cNvSpPr>
+          <p:nvPr>
+            <p:ph idx="1"/>
+          </p:nvPr>
+        </p:nvSpPr>
+        <p:spPr/>
+        <p:txBody>
+          <a:bodyPr/>
+          <a:lstStyle/>
+          <a:p>
+            <a:pPr lvl="0" indent="0" marL="0">
+              <a:buNone/>
+            </a:pPr>
+            <a:r>
+              <a:rPr/>
+              <a:t>Dalam pengolahan data riil terkait indikator-indikator tersebut, analis sering dihadapkan pada masalah kualitas data, seperti adanya data yang hilang (missing value) atau nilai anomali yang ekstrem (outlier). Oleh karena itu, proyek ini disusun untuk melakukan analisis statistika secara komprehensif menggunakan bahasa pemrograman R. Evaluasi difokuskan pada penerapan statistika deskriptif, penanganan ketidaksempurnaan data, hingga pembuktian statistik mengenai korelasi antara rata-rata lama sekolah dan tingkat pengangguran terhadap persentase kemiskinan di berbagai wilayah.</a:t>
+            </a:r>
+          </a:p>
+        </p:txBody>
+      </p:sp>
+    </p:spTree>
+  </p:cSld>
+</p:sld>
+</file>
+
+<file path=ppt/slides/slide5.xml><?xml version="1.0" encoding="utf-8"?>
+<p:sld xmlns:a="http://schemas.openxmlformats.org/drawingml/2006/main" xmlns:r="http://schemas.openxmlformats.org/officeDocument/2006/relationships" xmlns:p="http://schemas.openxmlformats.org/presentationml/2006/main">
+  <p:cSld>
+    <p:spTree>
+      <p:nvGrpSpPr>
+        <p:cNvPr id="1" name=""/>
+        <p:cNvGrpSpPr/>
+        <p:nvPr/>
+      </p:nvGrpSpPr>
+      <p:grpSpPr>
+        <a:xfrm>
+          <a:off x="0" y="0"/>
+          <a:ext cx="0" cy="0"/>
+          <a:chOff x="0" y="0"/>
+          <a:chExt cx="0" cy="0"/>
+        </a:xfrm>
+      </p:grpSpPr>
+      <p:sp>
+        <p:nvSpPr>
+          <p:cNvPr id="2" name="Title 1"/>
+          <p:cNvSpPr>
+            <a:spLocks noGrp="1"/>
+          </p:cNvSpPr>
+          <p:nvPr>
+            <p:ph type="title"/>
+          </p:nvPr>
+        </p:nvSpPr>
+        <p:spPr/>
+        <p:txBody>
+          <a:bodyPr/>
+          <a:lstStyle/>
+          <a:p>
+            <a:pPr lvl="0" indent="0" marL="0">
+              <a:buNone/>
+            </a:pPr>
+            <a:r>
+              <a:rPr/>
+              <a:t>Slide with Bullets</a:t>
+            </a:r>
+          </a:p>
+        </p:txBody>
+      </p:sp>
+      <p:sp>
+        <p:nvSpPr>
+          <p:cNvPr id="3" name="Content Placeholder 2"/>
+          <p:cNvSpPr>
+            <a:spLocks noGrp="1"/>
+          </p:cNvSpPr>
+          <p:nvPr>
+            <p:ph idx="1"/>
+          </p:nvPr>
+        </p:nvSpPr>
+        <p:spPr/>
+        <p:txBody>
+          <a:bodyPr/>
+          <a:lstStyle/>
+          <a:p>
+            <a:pPr lvl="0"/>
+            <a:r>
+              <a:rPr/>
+              <a:t>Bullet 1</a:t>
+            </a:r>
+          </a:p>
+          <a:p>
+            <a:pPr lvl="0"/>
+            <a:r>
+              <a:rPr/>
+              <a:t>Bullet 2</a:t>
+            </a:r>
+          </a:p>
+          <a:p>
+            <a:pPr lvl="0"/>
+            <a:r>
+              <a:rPr/>
+              <a:t>Bullet 3</a:t>
+            </a:r>
+          </a:p>
+        </p:txBody>
+      </p:sp>
+    </p:spTree>
+  </p:cSld>
+</p:sld>
+</file>
+
+<file path=ppt/slides/slide6.xml><?xml version="1.0" encoding="utf-8"?>
+<p:sld xmlns:a="http://schemas.openxmlformats.org/drawingml/2006/main" xmlns:r="http://schemas.openxmlformats.org/officeDocument/2006/relationships" xmlns:p="http://schemas.openxmlformats.org/presentationml/2006/main">
+  <p:cSld>
+    <p:spTree>
+      <p:nvGrpSpPr>
+        <p:cNvPr id="1" name=""/>
+        <p:cNvGrpSpPr/>
+        <p:nvPr/>
+      </p:nvGrpSpPr>
+      <p:grpSpPr>
+        <a:xfrm>
+          <a:off x="0" y="0"/>
+          <a:ext cx="0" cy="0"/>
+          <a:chOff x="0" y="0"/>
+          <a:chExt cx="0" cy="0"/>
+        </a:xfrm>
+      </p:grpSpPr>
+      <p:sp>
+        <p:nvSpPr>
+          <p:cNvPr id="2" name="Title 1"/>
+          <p:cNvSpPr>
+            <a:spLocks noGrp="1"/>
+          </p:cNvSpPr>
+          <p:nvPr>
+            <p:ph type="title"/>
+          </p:nvPr>
+        </p:nvSpPr>
+        <p:spPr/>
+        <p:txBody>
+          <a:bodyPr/>
+          <a:lstStyle/>
+          <a:p>
+            <a:pPr lvl="0" indent="0" marL="0">
+              <a:buNone/>
+            </a:pPr>
+            <a:r>
+              <a:rPr/>
               <a:t>Slide with R Output</a:t>
             </a:r>
           </a:p>
@@ -3440,7 +3559,7 @@
 </p:sld>
 </file>
 
-<file path=ppt/slides/slide5.xml><?xml version="1.0" encoding="utf-8"?>
+<file path=ppt/slides/slide7.xml><?xml version="1.0" encoding="utf-8"?>
 <p:sld xmlns:a="http://schemas.openxmlformats.org/drawingml/2006/main" xmlns:r="http://schemas.openxmlformats.org/officeDocument/2006/relationships" xmlns:p="http://schemas.openxmlformats.org/presentationml/2006/main">
   <p:cSld>
     <p:spTree>

--- a/dokumen/PPT-Laporan.pptx
+++ b/dokumen/PPT-Laporan.pptx
@@ -12,6 +12,7 @@
     <p:sldId id="260" r:id="rId6"/>
     <p:sldId id="261" r:id="rId7"/>
     <p:sldId id="262" r:id="rId8"/>
+    <p:sldId id="263" r:id="rId9"/>
   </p:sldIdLst>
   <p:sldSz cx="9144000" cy="5143500" type="screen16x9"/>
   <p:notesSz cx="6858000" cy="9144000"/>
@@ -3412,7 +3413,7 @@
             </a:pPr>
             <a:r>
               <a:rPr/>
-              <a:t>Slide with Bullets</a:t>
+              <a:t>Tujuan</a:t>
             </a:r>
           </a:p>
         </p:txBody>
@@ -3432,24 +3433,102 @@
           <a:bodyPr/>
           <a:lstStyle/>
           <a:p>
-            <a:pPr lvl="0"/>
+            <a:pPr lvl="0" indent="0" marL="0">
+              <a:buNone/>
+            </a:pPr>
             <a:r>
               <a:rPr/>
-              <a:t>Bullet 1</a:t>
-            </a:r>
-          </a:p>
-          <a:p>
-            <a:pPr lvl="0"/>
+              <a:t>Tujuan dari analisis data pembangunan wilayah ini adalah sebagai berikut:</a:t>
+            </a:r>
+          </a:p>
+          <a:p>
+            <a:pPr lvl="0" indent="-342900" marL="342900">
+              <a:buAutoNum type="arabicPeriod"/>
+            </a:pPr>
             <a:r>
               <a:rPr/>
-              <a:t>Bullet 2</a:t>
-            </a:r>
-          </a:p>
-          <a:p>
-            <a:pPr lvl="0"/>
+              <a:t>Memahami struktur dan karakteristik dataset.</a:t>
+            </a:r>
+          </a:p>
+          <a:p>
+            <a:pPr lvl="0" indent="-342900" marL="342900">
+              <a:buAutoNum type="arabicPeriod"/>
+            </a:pPr>
             <a:r>
               <a:rPr/>
-              <a:t>Bullet 3</a:t>
+              <a:t>Melakukan eksplorasi data menggunakan R.</a:t>
+            </a:r>
+          </a:p>
+          <a:p>
+            <a:pPr lvl="0" indent="-342900" marL="342900">
+              <a:buAutoNum type="arabicPeriod"/>
+            </a:pPr>
+            <a:r>
+              <a:rPr/>
+              <a:t>Mengidentifikasi missing value dan outlier.</a:t>
+            </a:r>
+          </a:p>
+          <a:p>
+            <a:pPr lvl="0" indent="-342900" marL="342900">
+              <a:buAutoNum type="arabicPeriod"/>
+            </a:pPr>
+            <a:r>
+              <a:rPr/>
+              <a:t>Melakukan statistika deskriptif.</a:t>
+            </a:r>
+          </a:p>
+          <a:p>
+            <a:pPr lvl="0" indent="-342900" marL="342900">
+              <a:buAutoNum type="arabicPeriod"/>
+            </a:pPr>
+            <a:r>
+              <a:rPr/>
+              <a:t>Membuat visualisasi data yang informatif.</a:t>
+            </a:r>
+          </a:p>
+          <a:p>
+            <a:pPr lvl="0" indent="-342900" marL="342900">
+              <a:buAutoNum type="arabicPeriod"/>
+            </a:pPr>
+            <a:r>
+              <a:rPr/>
+              <a:t>Menggunakan konsep probabilitas dan distribusi data.</a:t>
+            </a:r>
+          </a:p>
+          <a:p>
+            <a:pPr lvl="0" indent="-342900" marL="342900">
+              <a:buAutoNum type="arabicPeriod"/>
+            </a:pPr>
+            <a:r>
+              <a:rPr/>
+              <a:t>Melakukan analisis hubungan antar variabel.</a:t>
+            </a:r>
+          </a:p>
+          <a:p>
+            <a:pPr lvl="0" indent="-342900" marL="342900">
+              <a:buAutoNum type="arabicPeriod"/>
+            </a:pPr>
+            <a:r>
+              <a:rPr/>
+              <a:t>Menarik kesimpulan berbasis data.</a:t>
+            </a:r>
+          </a:p>
+          <a:p>
+            <a:pPr lvl="0" indent="-342900" marL="342900">
+              <a:buAutoNum type="arabicPeriod"/>
+            </a:pPr>
+            <a:r>
+              <a:rPr/>
+              <a:t>Menyusun laporan ilmiah sederhana.</a:t>
+            </a:r>
+          </a:p>
+          <a:p>
+            <a:pPr lvl="0" indent="-342900" marL="342900">
+              <a:buAutoNum type="arabicPeriod"/>
+            </a:pPr>
+            <a:r>
+              <a:rPr/>
+              <a:t>Mengkomunikasikan hasil analisis secara sistematis.</a:t>
             </a:r>
           </a:p>
         </p:txBody>
@@ -3496,7 +3575,7 @@
             </a:pPr>
             <a:r>
               <a:rPr/>
-              <a:t>Slide with R Output</a:t>
+              <a:t>Deskripsi Dataset</a:t>
             </a:r>
           </a:p>
         </p:txBody>
@@ -3516,40 +3595,49 @@
           <a:bodyPr/>
           <a:lstStyle/>
           <a:p>
-            <a:pPr lvl="0" indent="0">
+            <a:pPr lvl="0" indent="0" marL="0">
               <a:buNone/>
             </a:pPr>
             <a:r>
-              <a:rPr>
-                <a:solidFill>
-                  <a:srgbClr val="06287E"/>
-                </a:solidFill>
-                <a:latin typeface="Courier"/>
-              </a:rPr>
-              <a:t>summary</a:t>
+              <a:rPr/>
+              <a:t>Dataset yang digunakan dalam analisis ini adalah </a:t>
             </a:r>
             <a:r>
               <a:rPr>
                 <a:latin typeface="Courier"/>
               </a:rPr>
-              <a:t>(cars)</a:t>
-            </a:r>
-          </a:p>
-          <a:p>
-            <a:pPr lvl="0" indent="0">
-              <a:buNone/>
+              <a:t>pembangunan_wilayah_missing_outlier.csv</a:t>
+            </a:r>
+            <a:r>
+              <a:rPr/>
+              <a:t>. Untuk menjawab tujuan pengamatan, analisis difokuskan pada dua variabel utama pengukur kualitas sumber daya manusia dan tenaga kerja, beserta variabel identitas wilayahnya. Berikut adalah rincian variabel yang digunakan:</a:t>
+            </a:r>
+          </a:p>
+          <a:p>
+            <a:pPr lvl="0" indent="-342900" marL="342900">
+              <a:buAutoNum type="arabicPeriod"/>
             </a:pPr>
             <a:r>
-              <a:rPr>
-                <a:latin typeface="Courier"/>
-              </a:rPr>
-              <a:t>##      speed           dist       
-##  Min.   : 4.0   Min.   :  2.00  
-##  1st Qu.:12.0   1st Qu.: 26.00  
-##  Median :15.0   Median : 36.00  
-##  Mean   :15.4   Mean   : 42.98  
-##  3rd Qu.:19.0   3rd Qu.: 56.00  
-##  Max.   :25.0   Max.   :120.00</a:t>
+              <a:rPr/>
+              <a:t>wilayah (Character): Nama kabupaten/kota yang menjadi objek pengamatan.</a:t>
+            </a:r>
+          </a:p>
+          <a:p>
+            <a:pPr lvl="0" indent="-342900" marL="342900">
+              <a:buAutoNum type="arabicPeriod"/>
+            </a:pPr>
+            <a:r>
+              <a:rPr/>
+              <a:t>provinsi (Character): Nama provinsi tempat wilayah berada.</a:t>
+            </a:r>
+          </a:p>
+          <a:p>
+            <a:pPr lvl="0" indent="-342900" marL="342900">
+              <a:buAutoNum type="arabicPeriod"/>
+            </a:pPr>
+            <a:r>
+              <a:rPr/>
+              <a:t>tahun (Integer): Tahun pengamatan data pembangunan wilayah.</a:t>
             </a:r>
           </a:p>
         </p:txBody>
@@ -3596,41 +3684,180 @@
             </a:pPr>
             <a:r>
               <a:rPr/>
-              <a:t>Slide with Plot</a:t>
-            </a:r>
-          </a:p>
-        </p:txBody>
-      </p:sp>
-      <p:pic>
-        <p:nvPicPr>
-          <p:cNvPr descr="PPT-Laporan_files/figure-pptx/pressure-1.png" id="0" name="Picture 1"/>
-          <p:cNvPicPr>
-            <a:picLocks noGrp="1" noChangeAspect="1"/>
-          </p:cNvPicPr>
-          <p:nvPr/>
-        </p:nvPicPr>
-        <p:blipFill>
-          <a:blip r:embed="rId2"/>
-          <a:stretch>
-            <a:fillRect/>
-          </a:stretch>
-        </p:blipFill>
-        <p:spPr bwMode="auto">
-          <a:xfrm>
-            <a:off x="2451100" y="1193800"/>
-            <a:ext cx="4241800" cy="3390900"/>
-          </a:xfrm>
-          <a:prstGeom prst="rect">
-            <a:avLst/>
-          </a:prstGeom>
-          <a:noFill/>
-          <a:ln w="9525">
-            <a:noFill/>
-            <a:headEnd/>
-            <a:tailEnd/>
-          </a:ln>
-        </p:spPr>
-      </p:pic>
+              <a:t>Deskripsi Dataset</a:t>
+            </a:r>
+          </a:p>
+        </p:txBody>
+      </p:sp>
+      <p:sp>
+        <p:nvSpPr>
+          <p:cNvPr id="3" name="Content Placeholder 2"/>
+          <p:cNvSpPr>
+            <a:spLocks noGrp="1"/>
+          </p:cNvSpPr>
+          <p:nvPr>
+            <p:ph idx="1"/>
+          </p:nvPr>
+        </p:nvSpPr>
+        <p:spPr/>
+        <p:txBody>
+          <a:bodyPr/>
+          <a:lstStyle/>
+          <a:p>
+            <a:pPr lvl="0" indent="-342900" marL="342900">
+              <a:buAutoNum startAt="4" type="arabicPeriod"/>
+            </a:pPr>
+            <a:r>
+              <a:rPr/>
+              <a:t>pdrb_perkapita (Numeric): Produk Domestik Regional Bruto (PDRB) per kapita yang menggambarkan tingkat aktivitas ekonomi dan pendapatan rata-rata masyarakat suatu wilayah.</a:t>
+            </a:r>
+          </a:p>
+          <a:p>
+            <a:pPr lvl="0" indent="-342900" marL="342900">
+              <a:buAutoNum startAt="4" type="arabicPeriod"/>
+            </a:pPr>
+            <a:r>
+              <a:rPr/>
+              <a:t>kemiskinan (Numeric): Persentase penduduk miskin pada suatu wilayah.</a:t>
+            </a:r>
+          </a:p>
+          <a:p>
+            <a:pPr lvl="0" indent="-342900" marL="342900">
+              <a:buAutoNum startAt="4" type="arabicPeriod"/>
+            </a:pPr>
+            <a:r>
+              <a:rPr/>
+              <a:t>pengangguran (Numeric): Persentase tingkat pengangguran pada suatu wilayah.</a:t>
+            </a:r>
+          </a:p>
+          <a:p>
+            <a:pPr lvl="0" indent="-342900" marL="342900">
+              <a:buAutoNum startAt="4" type="arabicPeriod"/>
+            </a:pPr>
+            <a:r>
+              <a:rPr/>
+              <a:t>ipm (Numeric): Indeks Pembangunan Manusia yang menggambarkan kualitas hidup masyarakat berdasarkan pendidikan, kesehatan, dan standar hidup.</a:t>
+            </a:r>
+          </a:p>
+        </p:txBody>
+      </p:sp>
+    </p:spTree>
+  </p:cSld>
+</p:sld>
+</file>
+
+<file path=ppt/slides/slide8.xml><?xml version="1.0" encoding="utf-8"?>
+<p:sld xmlns:a="http://schemas.openxmlformats.org/drawingml/2006/main" xmlns:r="http://schemas.openxmlformats.org/officeDocument/2006/relationships" xmlns:p="http://schemas.openxmlformats.org/presentationml/2006/main">
+  <p:cSld>
+    <p:spTree>
+      <p:nvGrpSpPr>
+        <p:cNvPr id="1" name=""/>
+        <p:cNvGrpSpPr/>
+        <p:nvPr/>
+      </p:nvGrpSpPr>
+      <p:grpSpPr>
+        <a:xfrm>
+          <a:off x="0" y="0"/>
+          <a:ext cx="0" cy="0"/>
+          <a:chOff x="0" y="0"/>
+          <a:chExt cx="0" cy="0"/>
+        </a:xfrm>
+      </p:grpSpPr>
+      <p:sp>
+        <p:nvSpPr>
+          <p:cNvPr id="2" name="Title 1"/>
+          <p:cNvSpPr>
+            <a:spLocks noGrp="1"/>
+          </p:cNvSpPr>
+          <p:nvPr>
+            <p:ph type="title"/>
+          </p:nvPr>
+        </p:nvSpPr>
+        <p:spPr/>
+        <p:txBody>
+          <a:bodyPr/>
+          <a:lstStyle/>
+          <a:p>
+            <a:pPr lvl="0" indent="0" marL="0">
+              <a:buNone/>
+            </a:pPr>
+            <a:r>
+              <a:rPr/>
+              <a:t>Deskripsi Dataset</a:t>
+            </a:r>
+          </a:p>
+        </p:txBody>
+      </p:sp>
+      <p:sp>
+        <p:nvSpPr>
+          <p:cNvPr id="3" name="Content Placeholder 2"/>
+          <p:cNvSpPr>
+            <a:spLocks noGrp="1"/>
+          </p:cNvSpPr>
+          <p:nvPr>
+            <p:ph idx="1"/>
+          </p:nvPr>
+        </p:nvSpPr>
+        <p:spPr/>
+        <p:txBody>
+          <a:bodyPr/>
+          <a:lstStyle/>
+          <a:p>
+            <a:pPr lvl="0" indent="-342900" marL="342900">
+              <a:buAutoNum startAt="8" type="arabicPeriod"/>
+            </a:pPr>
+            <a:r>
+              <a:rPr/>
+              <a:t>harapan_hidup (Numeric): Rata-rata perkiraan umur yang dapat dicapai penduduk pada suatu wilayah.</a:t>
+            </a:r>
+          </a:p>
+          <a:p>
+            <a:pPr lvl="0" indent="-342900" marL="342900">
+              <a:buAutoNum startAt="8" type="arabicPeriod"/>
+            </a:pPr>
+            <a:r>
+              <a:rPr/>
+              <a:t>rata_lama_sekolah (Numeric): Rata-rata jumlah tahun pendidikan formal yang telah ditempuh penduduk.</a:t>
+            </a:r>
+          </a:p>
+          <a:p>
+            <a:pPr lvl="0" indent="-342900" marL="342900">
+              <a:buAutoNum startAt="8" type="arabicPeriod"/>
+            </a:pPr>
+            <a:r>
+              <a:rPr/>
+              <a:t>akses_internet (Numeric):Persentase masyarakat yang memiliki atau menggunakan akses internet.</a:t>
+            </a:r>
+          </a:p>
+          <a:p>
+            <a:pPr lvl="0" indent="-342900" marL="342900">
+              <a:buAutoNum startAt="8" type="arabicPeriod"/>
+            </a:pPr>
+            <a:r>
+              <a:rPr/>
+              <a:t>jalan_baik (Numeric):Persentase kondisi jalan yang berada dalam kategori baik.</a:t>
+            </a:r>
+          </a:p>
+          <a:p>
+            <a:pPr lvl="0" indent="-342900" marL="342900">
+              <a:buAutoNum startAt="8" type="arabicPeriod"/>
+            </a:pPr>
+            <a:r>
+              <a:rPr/>
+              <a:t>air_bersih (Numeric):Persentase masyarakat yang memiliki akses terhadap air bersih.</a:t>
+            </a:r>
+          </a:p>
+          <a:p>
+            <a:pPr lvl="0" indent="-342900" marL="342900">
+              <a:buAutoNum startAt="8" type="arabicPeriod"/>
+            </a:pPr>
+            <a:r>
+              <a:rPr/>
+              <a:t>catatan_data (Character):Keterangan kondisi data, misalnya data normal, mengandung missing value, atau outlier.</a:t>
+            </a:r>
+          </a:p>
+        </p:txBody>
+      </p:sp>
     </p:spTree>
   </p:cSld>
 </p:sld>

--- a/dokumen/PPT-Laporan.pptx
+++ b/dokumen/PPT-Laporan.pptx
@@ -12,6 +12,7 @@
     <p:sldId id="260" r:id="rId6"/>
     <p:sldId id="261" r:id="rId7"/>
     <p:sldId id="262" r:id="rId8"/>
+    <p:sldId id="263" r:id="rId9"/>
   </p:sldIdLst>
   <p:sldSz cx="9144000" cy="5143500" type="screen16x9"/>
   <p:notesSz cx="6858000" cy="9144000"/>
@@ -3126,34 +3127,6 @@
           </a:p>
         </p:txBody>
       </p:sp>
-      <p:sp>
-        <p:nvSpPr>
-          <p:cNvPr id="3" name="Subtitle 2"/>
-          <p:cNvSpPr>
-            <a:spLocks noGrp="1"/>
-          </p:cNvSpPr>
-          <p:nvPr>
-            <p:ph idx="1" type="subTitle"/>
-          </p:nvPr>
-        </p:nvSpPr>
-        <p:spPr>
-          <a:xfrm>
-            <a:off x="1371600" y="2914650"/>
-            <a:ext cx="6400800" cy="1314450"/>
-          </a:xfrm>
-        </p:spPr>
-        <p:txBody>
-          <a:bodyPr/>
-          <a:lstStyle/>
-          <a:p>
-            <a:pPr lvl="0" indent="0" marL="0">
-              <a:buNone/>
-            </a:pPr>
-            <a:br/>
-            <a:br/>
-          </a:p>
-        </p:txBody>
-      </p:sp>
     </p:spTree>
   </p:cSld>
 </p:sld>
@@ -3496,7 +3469,7 @@
             </a:pPr>
             <a:r>
               <a:rPr/>
-              <a:t>Slide with R Output</a:t>
+              <a:t>Missing Values</a:t>
             </a:r>
           </a:p>
         </p:txBody>
@@ -3532,7 +3505,7 @@
               <a:rPr>
                 <a:latin typeface="Courier"/>
               </a:rPr>
-              <a:t>(cars)</a:t>
+              <a:t>(data)</a:t>
             </a:r>
           </a:p>
           <a:p>
@@ -3543,13 +3516,38 @@
               <a:rPr>
                 <a:latin typeface="Courier"/>
               </a:rPr>
-              <a:t>##      speed           dist       
-##  Min.   : 4.0   Min.   :  2.00  
-##  1st Qu.:12.0   1st Qu.: 26.00  
-##  Median :15.0   Median : 36.00  
-##  Mean   :15.4   Mean   : 42.98  
-##  3rd Qu.:19.0   3rd Qu.: 56.00  
-##  Max.   :25.0   Max.   :120.00</a:t>
+              <a:t>##       wilayah          provinsi        tahun      pdrb_perkapita     
+##  Length   :2500   Length   :2500   Min.   :2020   Min.   :1.503e+07  
+##  N.unique :2500   N.unique :  10   1st Qu.:2021   1st Qu.:6.962e+07  
+##  N.blank  :   0   N.blank  :   0   Median :2022   Median :1.373e+08  
+##  Min.nchar:  16   Min.nchar:   5   Mean   :2022   Mean   :1.357e+08  
+##  Max.nchar:  19   Max.nchar:  16   3rd Qu.:2023   3rd Qu.:1.939e+08  
+##                                    Max.   :2024   Max.   :1.775e+09  
+##                                                   NAs    :25         
+##    kemiskinan     pengangguran         ipm        harapan_hidup  
+##  Min.   : 2.01   Min.   : 1.010   Min.   :55.01   Min.   :60.01  
+##  1st Qu.: 7.86   1st Qu.: 4.350   1st Qu.:62.52   1st Qu.:64.66  
+##  Median :13.72   Median : 8.230   Median :69.89   Median :69.30  
+##  Mean   :13.72   Mean   : 8.046   Mean   :69.90   Mean   :69.13  
+##  3rd Qu.:19.39   3rd Qu.:11.520   3rd Qu.:77.16   3rd Qu.:73.58  
+##  Max.   :67.53   Max.   :47.040   Max.   :84.99   Max.   :77.99  
+##  NAs    :24      NAs    :25       NAs    :25                     
+##  rata_lama_sekolah akses_internet    jalan_baik      air_bersih   
+##  Min.   : 5.020    Min.   : 0.01   Min.   :30.01   Min.   :40.03  
+##  1st Qu.: 7.327    1st Qu.:38.91   1st Qu.:47.40   1st Qu.:54.32  
+##  Median : 9.520    Median :58.09   Median :65.02   Median :69.68  
+##  Mean   : 9.581    Mean   :58.79   Mean   :65.26   Mean   :69.76  
+##  3rd Qu.:11.912    3rd Qu.:78.67   3rd Qu.:83.24   3rd Qu.:85.18  
+##  Max.   :14.000    Max.   :97.99   Max.   :99.95   Max.   :99.99  
+##                    NAs    :25      NAs    :25                     
+##     catatan_data 
+##  Length   :2500  
+##  N.unique :   3  
+##  N.blank  :   0  
+##  Min.nchar:   6  
+##  Max.nchar:  13  
+##                  
+## </a:t>
             </a:r>
           </a:p>
         </p:txBody>
@@ -3596,6 +3594,106 @@
             </a:pPr>
             <a:r>
               <a:rPr/>
+              <a:t>Slide with R Output</a:t>
+            </a:r>
+          </a:p>
+        </p:txBody>
+      </p:sp>
+      <p:sp>
+        <p:nvSpPr>
+          <p:cNvPr id="3" name="Content Placeholder 2"/>
+          <p:cNvSpPr>
+            <a:spLocks noGrp="1"/>
+          </p:cNvSpPr>
+          <p:nvPr>
+            <p:ph idx="1"/>
+          </p:nvPr>
+        </p:nvSpPr>
+        <p:spPr/>
+        <p:txBody>
+          <a:bodyPr/>
+          <a:lstStyle/>
+          <a:p>
+            <a:pPr lvl="0" indent="0">
+              <a:buNone/>
+            </a:pPr>
+            <a:r>
+              <a:rPr>
+                <a:solidFill>
+                  <a:srgbClr val="06287E"/>
+                </a:solidFill>
+                <a:latin typeface="Courier"/>
+              </a:rPr>
+              <a:t>summary</a:t>
+            </a:r>
+            <a:r>
+              <a:rPr>
+                <a:latin typeface="Courier"/>
+              </a:rPr>
+              <a:t>(cars)</a:t>
+            </a:r>
+          </a:p>
+          <a:p>
+            <a:pPr lvl="0" indent="0">
+              <a:buNone/>
+            </a:pPr>
+            <a:r>
+              <a:rPr>
+                <a:latin typeface="Courier"/>
+              </a:rPr>
+              <a:t>##      speed           dist       
+##  Min.   : 4.0   Min.   :  2.00  
+##  1st Qu.:12.0   1st Qu.: 26.00  
+##  Median :15.0   Median : 36.00  
+##  Mean   :15.4   Mean   : 42.98  
+##  3rd Qu.:19.0   3rd Qu.: 56.00  
+##  Max.   :25.0   Max.   :120.00</a:t>
+            </a:r>
+          </a:p>
+        </p:txBody>
+      </p:sp>
+    </p:spTree>
+  </p:cSld>
+</p:sld>
+</file>
+
+<file path=ppt/slides/slide8.xml><?xml version="1.0" encoding="utf-8"?>
+<p:sld xmlns:a="http://schemas.openxmlformats.org/drawingml/2006/main" xmlns:r="http://schemas.openxmlformats.org/officeDocument/2006/relationships" xmlns:p="http://schemas.openxmlformats.org/presentationml/2006/main">
+  <p:cSld>
+    <p:spTree>
+      <p:nvGrpSpPr>
+        <p:cNvPr id="1" name=""/>
+        <p:cNvGrpSpPr/>
+        <p:nvPr/>
+      </p:nvGrpSpPr>
+      <p:grpSpPr>
+        <a:xfrm>
+          <a:off x="0" y="0"/>
+          <a:ext cx="0" cy="0"/>
+          <a:chOff x="0" y="0"/>
+          <a:chExt cx="0" cy="0"/>
+        </a:xfrm>
+      </p:grpSpPr>
+      <p:sp>
+        <p:nvSpPr>
+          <p:cNvPr id="2" name="Title 1"/>
+          <p:cNvSpPr>
+            <a:spLocks noGrp="1"/>
+          </p:cNvSpPr>
+          <p:nvPr>
+            <p:ph type="title"/>
+          </p:nvPr>
+        </p:nvSpPr>
+        <p:spPr/>
+        <p:txBody>
+          <a:bodyPr/>
+          <a:lstStyle/>
+          <a:p>
+            <a:pPr lvl="0" indent="0" marL="0">
+              <a:buNone/>
+            </a:pPr>
+            <a:r>
+              <a:rPr/>
               <a:t>Slide with Plot</a:t>
             </a:r>
           </a:p>
@@ -3603,7 +3701,7 @@
       </p:sp>
       <p:pic>
         <p:nvPicPr>
-          <p:cNvPr descr="PPT-Laporan_files/figure-pptx/pressure-1.png" id="0" name="Picture 1"/>
+          <p:cNvPr descr="PPT-Laporan_files/PPT-Laporan_files/figure-pptx/pressure-1.png" id="0" name="Picture 1"/>
           <p:cNvPicPr>
             <a:picLocks noGrp="1" noChangeAspect="1"/>
           </p:cNvPicPr>

--- a/dokumen/PPT-Laporan.pptx
+++ b/dokumen/PPT-Laporan.pptx
@@ -12,7 +12,6 @@
     <p:sldId id="260" r:id="rId6"/>
     <p:sldId id="261" r:id="rId7"/>
     <p:sldId id="262" r:id="rId8"/>
-    <p:sldId id="263" r:id="rId9"/>
   </p:sldIdLst>
   <p:sldSz cx="9144000" cy="5143500" type="screen16x9"/>
   <p:notesSz cx="6858000" cy="9144000"/>
@@ -3122,7 +3121,7 @@
             </a:pPr>
             <a:r>
               <a:rPr/>
-              <a:t>Laporan</a:t>
+              <a:t>Analisis Pengaruh Kemiskinan dan Rata Lama Sekolah Terhadap Pembanguna Wilayah di Indonesia</a:t>
             </a:r>
           </a:p>
         </p:txBody>
@@ -3385,7 +3384,7 @@
             </a:pPr>
             <a:r>
               <a:rPr/>
-              <a:t>Slide with Bullets</a:t>
+              <a:t>Tujuan</a:t>
             </a:r>
           </a:p>
         </p:txBody>
@@ -3405,24 +3404,12 @@
           <a:bodyPr/>
           <a:lstStyle/>
           <a:p>
-            <a:pPr lvl="0"/>
+            <a:pPr lvl="0" indent="0" marL="0">
+              <a:buNone/>
+            </a:pPr>
             <a:r>
               <a:rPr/>
-              <a:t>Bullet 1</a:t>
-            </a:r>
-          </a:p>
-          <a:p>
-            <a:pPr lvl="0"/>
-            <a:r>
-              <a:rPr/>
-              <a:t>Bullet 2</a:t>
-            </a:r>
-          </a:p>
-          <a:p>
-            <a:pPr lvl="0"/>
-            <a:r>
-              <a:rPr/>
-              <a:t>Bullet 3</a:t>
+              <a:t>Tujuan dari analisis data pembangunan wilayah ini adalah sebagai berikut: 1. Memahami struktur dan karakteristik dataset. 2. Melakukan eksplorasi data menggunakan R. 3. Mengidentifikasi missing value dan outlier. 4. Melakukan statistika deskriptif. 5. Membuat visualisasi data yang informatif. 6. Menggunakan konsep probabilitas dan distribusi data. 7. Melakukan analisis hubungan antar variabel. 8. Menarik kesimpulan berbasis data. 9. Menyusun laporan ilmiah sederhana. 10. Mengkomunikasikan hasil analisis secara sistematis.</a:t>
             </a:r>
           </a:p>
         </p:txBody>
@@ -3469,7 +3456,7 @@
             </a:pPr>
             <a:r>
               <a:rPr/>
-              <a:t>Missing Values</a:t>
+              <a:t>Deskripsi Dataset</a:t>
             </a:r>
           </a:p>
         </p:txBody>
@@ -3489,65 +3476,49 @@
           <a:bodyPr/>
           <a:lstStyle/>
           <a:p>
-            <a:pPr lvl="0" indent="0">
+            <a:pPr lvl="0" indent="0" marL="0">
               <a:buNone/>
             </a:pPr>
             <a:r>
-              <a:rPr>
-                <a:solidFill>
-                  <a:srgbClr val="06287E"/>
-                </a:solidFill>
-                <a:latin typeface="Courier"/>
-              </a:rPr>
-              <a:t>summary</a:t>
+              <a:rPr/>
+              <a:t>Dataset yang digunakan dalam analisis ini adalah </a:t>
             </a:r>
             <a:r>
               <a:rPr>
                 <a:latin typeface="Courier"/>
               </a:rPr>
-              <a:t>(data)</a:t>
-            </a:r>
-          </a:p>
-          <a:p>
-            <a:pPr lvl="0" indent="0">
-              <a:buNone/>
+              <a:t>pembangunan_wilayah_missing_outlier.csv</a:t>
+            </a:r>
+            <a:r>
+              <a:rPr/>
+              <a:t>. Untuk menjawab tujuan pengamatan, analisis difokuskan pada dua variabel utama pengukur kualitas sumber daya manusia dan tenaga kerja, beserta variabel identitas wilayahnya. Berikut adalah rincian variabel yang digunakan:</a:t>
+            </a:r>
+          </a:p>
+          <a:p>
+            <a:pPr lvl="0" indent="-342900" marL="342900">
+              <a:buAutoNum type="arabicPeriod"/>
             </a:pPr>
             <a:r>
-              <a:rPr>
-                <a:latin typeface="Courier"/>
-              </a:rPr>
-              <a:t>##       wilayah          provinsi        tahun      pdrb_perkapita     
-##  Length   :2500   Length   :2500   Min.   :2020   Min.   :1.503e+07  
-##  N.unique :2500   N.unique :  10   1st Qu.:2021   1st Qu.:6.962e+07  
-##  N.blank  :   0   N.blank  :   0   Median :2022   Median :1.373e+08  
-##  Min.nchar:  16   Min.nchar:   5   Mean   :2022   Mean   :1.357e+08  
-##  Max.nchar:  19   Max.nchar:  16   3rd Qu.:2023   3rd Qu.:1.939e+08  
-##                                    Max.   :2024   Max.   :1.775e+09  
-##                                                   NAs    :25         
-##    kemiskinan     pengangguran         ipm        harapan_hidup  
-##  Min.   : 2.01   Min.   : 1.010   Min.   :55.01   Min.   :60.01  
-##  1st Qu.: 7.86   1st Qu.: 4.350   1st Qu.:62.52   1st Qu.:64.66  
-##  Median :13.72   Median : 8.230   Median :69.89   Median :69.30  
-##  Mean   :13.72   Mean   : 8.046   Mean   :69.90   Mean   :69.13  
-##  3rd Qu.:19.39   3rd Qu.:11.520   3rd Qu.:77.16   3rd Qu.:73.58  
-##  Max.   :67.53   Max.   :47.040   Max.   :84.99   Max.   :77.99  
-##  NAs    :24      NAs    :25       NAs    :25                     
-##  rata_lama_sekolah akses_internet    jalan_baik      air_bersih   
-##  Min.   : 5.020    Min.   : 0.01   Min.   :30.01   Min.   :40.03  
-##  1st Qu.: 7.327    1st Qu.:38.91   1st Qu.:47.40   1st Qu.:54.32  
-##  Median : 9.520    Median :58.09   Median :65.02   Median :69.68  
-##  Mean   : 9.581    Mean   :58.79   Mean   :65.26   Mean   :69.76  
-##  3rd Qu.:11.912    3rd Qu.:78.67   3rd Qu.:83.24   3rd Qu.:85.18  
-##  Max.   :14.000    Max.   :97.99   Max.   :99.95   Max.   :99.99  
-##                    NAs    :25      NAs    :25                     
-##     catatan_data 
-##  Length   :2500  
-##  N.unique :   3  
-##  N.blank  :   0  
-##  Min.nchar:   6  
-##  Max.nchar:  13  
-##                  
-## </a:t>
+              <a:rPr/>
+              <a:t>wilayah (Character): Nama kabupaten/kota yang menjadi objek pengamatan.</a:t>
+            </a:r>
+          </a:p>
+          <a:p>
+            <a:pPr lvl="0" indent="-342900" marL="342900">
+              <a:buAutoNum type="arabicPeriod"/>
+            </a:pPr>
+            <a:r>
+              <a:rPr/>
+              <a:t>provinsi (Character): Nama provinsi tempat wilayah berada.</a:t>
+            </a:r>
+          </a:p>
+          <a:p>
+            <a:pPr lvl="0" indent="-342900" marL="342900">
+              <a:buAutoNum type="arabicPeriod"/>
+            </a:pPr>
+            <a:r>
+              <a:rPr/>
+              <a:t>tahun (Integer): Tahun pengamatan data pembangunan wilayah.</a:t>
             </a:r>
           </a:p>
         </p:txBody>
@@ -3594,7 +3565,7 @@
             </a:pPr>
             <a:r>
               <a:rPr/>
-              <a:t>Slide with R Output</a:t>
+              <a:t>Deskripsi Dataset</a:t>
             </a:r>
           </a:p>
         </p:txBody>
@@ -3614,121 +3585,97 @@
           <a:bodyPr/>
           <a:lstStyle/>
           <a:p>
-            <a:pPr lvl="0" indent="0">
-              <a:buNone/>
+            <a:pPr lvl="0" indent="-342900" marL="342900">
+              <a:buAutoNum startAt="4" type="arabicPeriod"/>
             </a:pPr>
             <a:r>
-              <a:rPr>
-                <a:solidFill>
-                  <a:srgbClr val="06287E"/>
-                </a:solidFill>
-                <a:latin typeface="Courier"/>
-              </a:rPr>
-              <a:t>summary</a:t>
-            </a:r>
-            <a:r>
-              <a:rPr>
-                <a:latin typeface="Courier"/>
-              </a:rPr>
-              <a:t>(cars)</a:t>
-            </a:r>
-          </a:p>
-          <a:p>
-            <a:pPr lvl="0" indent="0">
-              <a:buNone/>
+              <a:rPr/>
+              <a:t>pdrb_perkapita (Numeric): Produk Domestik Regional Bruto (PDRB) per kapita yang menggambarkan tingkat aktivitas ekonomi dan pendapatan rata-rata masyarakat suatu wilayah.</a:t>
+            </a:r>
+          </a:p>
+          <a:p>
+            <a:pPr lvl="0" indent="-342900" marL="342900">
+              <a:buAutoNum startAt="4" type="arabicPeriod"/>
             </a:pPr>
             <a:r>
-              <a:rPr>
-                <a:latin typeface="Courier"/>
-              </a:rPr>
-              <a:t>##      speed           dist       
-##  Min.   : 4.0   Min.   :  2.00  
-##  1st Qu.:12.0   1st Qu.: 26.00  
-##  Median :15.0   Median : 36.00  
-##  Mean   :15.4   Mean   : 42.98  
-##  3rd Qu.:19.0   3rd Qu.: 56.00  
-##  Max.   :25.0   Max.   :120.00</a:t>
-            </a:r>
-          </a:p>
-        </p:txBody>
-      </p:sp>
-    </p:spTree>
-  </p:cSld>
-</p:sld>
-</file>
-
-<file path=ppt/slides/slide8.xml><?xml version="1.0" encoding="utf-8"?>
-<p:sld xmlns:a="http://schemas.openxmlformats.org/drawingml/2006/main" xmlns:r="http://schemas.openxmlformats.org/officeDocument/2006/relationships" xmlns:p="http://schemas.openxmlformats.org/presentationml/2006/main">
-  <p:cSld>
-    <p:spTree>
-      <p:nvGrpSpPr>
-        <p:cNvPr id="1" name=""/>
-        <p:cNvGrpSpPr/>
-        <p:nvPr/>
-      </p:nvGrpSpPr>
-      <p:grpSpPr>
-        <a:xfrm>
-          <a:off x="0" y="0"/>
-          <a:ext cx="0" cy="0"/>
-          <a:chOff x="0" y="0"/>
-          <a:chExt cx="0" cy="0"/>
-        </a:xfrm>
-      </p:grpSpPr>
-      <p:sp>
-        <p:nvSpPr>
-          <p:cNvPr id="2" name="Title 1"/>
-          <p:cNvSpPr>
-            <a:spLocks noGrp="1"/>
-          </p:cNvSpPr>
-          <p:nvPr>
-            <p:ph type="title"/>
-          </p:nvPr>
-        </p:nvSpPr>
-        <p:spPr/>
-        <p:txBody>
-          <a:bodyPr/>
-          <a:lstStyle/>
-          <a:p>
-            <a:pPr lvl="0" indent="0" marL="0">
-              <a:buNone/>
+              <a:rPr/>
+              <a:t>kemiskinan (Numeric): Persentase penduduk miskin pada suatu wilayah.</a:t>
+            </a:r>
+          </a:p>
+          <a:p>
+            <a:pPr lvl="0" indent="-342900" marL="342900">
+              <a:buAutoNum startAt="4" type="arabicPeriod"/>
             </a:pPr>
             <a:r>
               <a:rPr/>
-              <a:t>Slide with Plot</a:t>
-            </a:r>
-          </a:p>
-        </p:txBody>
-      </p:sp>
-      <p:pic>
-        <p:nvPicPr>
-          <p:cNvPr descr="PPT-Laporan_files/PPT-Laporan_files/figure-pptx/pressure-1.png" id="0" name="Picture 1"/>
-          <p:cNvPicPr>
-            <a:picLocks noGrp="1" noChangeAspect="1"/>
-          </p:cNvPicPr>
-          <p:nvPr/>
-        </p:nvPicPr>
-        <p:blipFill>
-          <a:blip r:embed="rId2"/>
-          <a:stretch>
-            <a:fillRect/>
-          </a:stretch>
-        </p:blipFill>
-        <p:spPr bwMode="auto">
-          <a:xfrm>
-            <a:off x="2451100" y="1193800"/>
-            <a:ext cx="4241800" cy="3390900"/>
-          </a:xfrm>
-          <a:prstGeom prst="rect">
-            <a:avLst/>
-          </a:prstGeom>
-          <a:noFill/>
-          <a:ln w="9525">
-            <a:noFill/>
-            <a:headEnd/>
-            <a:tailEnd/>
-          </a:ln>
-        </p:spPr>
-      </p:pic>
+              <a:t>pengangguran (Numeric): Persentase tingkat pengangguran pada suatu wilayah.</a:t>
+            </a:r>
+          </a:p>
+          <a:p>
+            <a:pPr lvl="0" indent="-342900" marL="342900">
+              <a:buAutoNum startAt="4" type="arabicPeriod"/>
+            </a:pPr>
+            <a:r>
+              <a:rPr/>
+              <a:t>ipm (Numeric): Indeks Pembangunan Manusia yang menggambarkan kualitas hidup masyarakat berdasarkan pendidikan, kesehatan, dan standar hidup.</a:t>
+            </a:r>
+          </a:p>
+          <a:p>
+            <a:pPr lvl="0" indent="-342900" marL="342900">
+              <a:buAutoNum startAt="4" type="arabicPeriod"/>
+            </a:pPr>
+            <a:r>
+              <a:rPr/>
+              <a:t>harapan_hidup (Numeric): Rata-rata perkiraan umur yang dapat dicapai penduduk pada suatu wilayah.</a:t>
+            </a:r>
+          </a:p>
+          <a:p>
+            <a:pPr lvl="0" indent="-342900" marL="342900">
+              <a:buAutoNum startAt="4" type="arabicPeriod"/>
+            </a:pPr>
+            <a:r>
+              <a:rPr/>
+              <a:t>rata_lama_sekolah (Numeric): Rata-rata jumlah tahun pendidikan formal yang telah ditempuh penduduk.</a:t>
+            </a:r>
+          </a:p>
+          <a:p>
+            <a:pPr lvl="0" indent="-342900" marL="342900">
+              <a:buAutoNum startAt="4" type="arabicPeriod"/>
+            </a:pPr>
+            <a:r>
+              <a:rPr/>
+              <a:t>akses_internet (Numeric):Persentase masyarakat yang memiliki atau menggunakan akses internet.</a:t>
+            </a:r>
+          </a:p>
+          <a:p>
+            <a:pPr lvl="0" indent="-342900" marL="342900">
+              <a:buAutoNum startAt="4" type="arabicPeriod"/>
+            </a:pPr>
+            <a:r>
+              <a:rPr/>
+              <a:t>jalan_baik (Numeric):Persentase kondisi jalan yang berada dalam kategori baik.</a:t>
+            </a:r>
+          </a:p>
+          <a:p>
+            <a:pPr lvl="0" indent="-342900" marL="342900">
+              <a:buAutoNum startAt="4" type="arabicPeriod"/>
+            </a:pPr>
+            <a:r>
+              <a:rPr/>
+              <a:t>air_bersih (Numeric):Persentase masyarakat yang memiliki akses terhadap air bersih.</a:t>
+            </a:r>
+          </a:p>
+          <a:p>
+            <a:pPr lvl="0" indent="-342900" marL="342900">
+              <a:buAutoNum startAt="4" type="arabicPeriod"/>
+            </a:pPr>
+            <a:r>
+              <a:rPr/>
+              <a:t>catatan_data (Character):Keterangan kondisi data, misalnya data normal, mengandung missing value, atau outlier.</a:t>
+            </a:r>
+          </a:p>
+        </p:txBody>
+      </p:sp>
     </p:spTree>
   </p:cSld>
 </p:sld>

--- a/dokumen/PPT-Laporan.pptx
+++ b/dokumen/PPT-Laporan.pptx
@@ -10,9 +10,6 @@
     <p:sldId id="258" r:id="rId4"/>
     <p:sldId id="259" r:id="rId5"/>
     <p:sldId id="260" r:id="rId6"/>
-    <p:sldId id="261" r:id="rId7"/>
-    <p:sldId id="262" r:id="rId8"/>
-    <p:sldId id="263" r:id="rId9"/>
   </p:sldIdLst>
   <p:sldSz cx="9144000" cy="5143500" type="screen16x9"/>
   <p:notesSz cx="6858000" cy="9144000"/>
@@ -3122,7 +3119,7 @@
             </a:pPr>
             <a:r>
               <a:rPr/>
-              <a:t>Laporan</a:t>
+              <a:t>Analisis Pengaruh Kemiskinan dan Rata Lama Sekolah Terhadap Pembanguna Wilayah di Indonesia</a:t>
             </a:r>
           </a:p>
         </p:txBody>
@@ -3222,7 +3219,7 @@
             </a:pPr>
             <a:r>
               <a:rPr/>
-              <a:t>Pembangunan wilayah yang komprehensif tidak hanya diukur dari pertumbuhan infrastruktur fisik, tetapi juga dari peningkatkan taraf hidup dan kesejahteraan masyarakatnya. Salah satu indikator utama yang masih menjadi tantangan dalam pembangunan di berbagai wilayah di Indonesia adalah tingkat kemiskinan (Kuncoro 2010). Kemiskinan merupakan fenomena multidimensional yang dipengaruhi oleh berbagai faktor sosial dan ekonomi. Dalam pendekatan makroekonomi, kualitas sumber daya manusia dan ketersediaan lapangan pekerjaan dianggap sebagai dua pilar krusial yang dapat mengentaskan masyarakat dari garis kemiskinan.</a:t>
+              <a:t>Pembangunan wilayah tidak hanya ditentukan oleh pertumbuhan infrastruktur, tetapi juga oleh peningkatan kesejahteraan masyarakat yang salah satunya tercermin dari tingkat kemiskinan. Kemiskinan merupakan masalah multidimensional yang dipengaruhi oleh berbagai faktor sosial dan ekonomi, di antaranya kualitas sumber daya manusia dan kondisi pasar kerja. Teori modal manusia menyatakan bahwa pendidikan, yang direpresentasikan melalui rata-rata lama sekolah, dapat meningkatkan produktivitas dan peluang kerja sehingga berpotensi menurunkan tingkat kemiskinan. Sebaliknya, tingginya tingkat pengangguran terbuka dapat mengurangi pendapatan masyarakat dan meningkatkan risiko kemiskinan. Dalam analisis data terkait indikator-indikator tersebut, sering ditemukan permasalahan seperti missing value dan outlier yang dapat memengaruhi hasil analisis. Oleh karena itu, proyek ini bertujuan melakukan analisis statistika menggunakan bahasa pemrograman R untuk mendeskripsikan data, menangani ketidaksempurnaan data, serta menguji hubungan antara rata-rata lama sekolah dan tingkat pengangguran terhadap persentase kemiskinan di berbagai wilayah.</a:t>
             </a:r>
           </a:p>
         </p:txBody>
@@ -3269,7 +3266,7 @@
             </a:pPr>
             <a:r>
               <a:rPr/>
-              <a:t>Latar belakang</a:t>
+              <a:t>Tujuan</a:t>
             </a:r>
           </a:p>
         </p:txBody>
@@ -3294,7 +3291,7 @@
             </a:pPr>
             <a:r>
               <a:rPr/>
-              <a:t>Teori human capital atau modal manusia menegaskan bahwa pendidikan formal merupakan investasi jangka panjang yang berbanding lurus dengan peningkatan produktivitas dan kapabilitas ekonomi seseorang (Todaro dan Smith 2015). Hal ini direpresentasikan oleh indikator rata-rata lama sekolah. Logika statistiknya, semakin tinggi durasi pendidikan yang diselesaikan oleh penduduk di suatu wilayah, semakin besar peluang mereka untuk diserap oleh pasar kerja yang layak, sehingga tingkat kemiskinan dapat ditekan. Sebaliknya, ketidakmampuan pasar kerja dalam menyerap angkatan kerja akan memicu tingginya angka pengangguran terbuka. Tingkat pengangguran yang tinggi secara langsung memutus aliran pendapatan individu, yang pada akhirnya bermuara pada peningkatan persentase kemiskinan wilayah (Sukirno, 2011).</a:t>
+              <a:t>Tujuan dari analisis data pembangunan wilayah ini adalah sebagai berikut: 1. Memahami struktur dan karakteristik dataset. 2. Melakukan eksplorasi data menggunakan R. 3. Mengidentifikasi missing value dan outlier. 4. Melakukan statistika deskriptif. 5. Membuat visualisasi data yang informatif. 6. Menggunakan konsep probabilitas dan distribusi data. 7. Melakukan analisis hubungan antar variabel. 8. Menarik kesimpulan berbasis data. 9. Menyusun laporan ilmiah sederhana. 10. Mengkomunikasikan hasil analisis secara sistematis.</a:t>
             </a:r>
           </a:p>
         </p:txBody>
@@ -3341,7 +3338,7 @@
             </a:pPr>
             <a:r>
               <a:rPr/>
-              <a:t>Latar belakang</a:t>
+              <a:t>Deskripsi Dataset</a:t>
             </a:r>
           </a:p>
         </p:txBody>
@@ -3366,7 +3363,44 @@
             </a:pPr>
             <a:r>
               <a:rPr/>
-              <a:t>Dalam pengolahan data riil terkait indikator-indikator tersebut, analis sering dihadapkan pada masalah kualitas data, seperti adanya data yang hilang (missing value) atau nilai anomali yang ekstrem (outlier). Oleh karena itu, proyek ini disusun untuk melakukan analisis statistika secara komprehensif menggunakan bahasa pemrograman R. Evaluasi difokuskan pada penerapan statistika deskriptif, penanganan ketidaksempurnaan data, hingga pembuktian statistik mengenai korelasi antara rata-rata lama sekolah dan tingkat pengangguran terhadap persentase kemiskinan di berbagai wilayah.</a:t>
+              <a:t>Dataset yang digunakan dalam analisis ini adalah </a:t>
+            </a:r>
+            <a:r>
+              <a:rPr>
+                <a:latin typeface="Courier"/>
+              </a:rPr>
+              <a:t>pembangunan_wilayah_missing_outlier.csv</a:t>
+            </a:r>
+            <a:r>
+              <a:rPr/>
+              <a:t>. Untuk menjawab tujuan pengamatan, analisis difokuskan pada dua variabel utama pengukur kualitas sumber daya manusia dan tenaga kerja, beserta variabel identitas wilayahnya. Berikut adalah rincian variabel yang digunakan:</a:t>
+            </a:r>
+          </a:p>
+          <a:p>
+            <a:pPr lvl="0" indent="-342900" marL="342900">
+              <a:buAutoNum type="arabicPeriod"/>
+            </a:pPr>
+            <a:r>
+              <a:rPr/>
+              <a:t>wilayah (Character): Nama kabupaten/kota yang menjadi objek pengamatan.</a:t>
+            </a:r>
+          </a:p>
+          <a:p>
+            <a:pPr lvl="0" indent="-342900" marL="342900">
+              <a:buAutoNum type="arabicPeriod"/>
+            </a:pPr>
+            <a:r>
+              <a:rPr/>
+              <a:t>provinsi (Character): Nama provinsi tempat wilayah berada.</a:t>
+            </a:r>
+          </a:p>
+          <a:p>
+            <a:pPr lvl="0" indent="-342900" marL="342900">
+              <a:buAutoNum type="arabicPeriod"/>
+            </a:pPr>
+            <a:r>
+              <a:rPr/>
+              <a:t>tahun (Integer): Tahun pengamatan data pembangunan wilayah.</a:t>
             </a:r>
           </a:p>
         </p:txBody>
@@ -3413,277 +3447,6 @@
             </a:pPr>
             <a:r>
               <a:rPr/>
-              <a:t>Tujuan</a:t>
-            </a:r>
-          </a:p>
-        </p:txBody>
-      </p:sp>
-      <p:sp>
-        <p:nvSpPr>
-          <p:cNvPr id="3" name="Content Placeholder 2"/>
-          <p:cNvSpPr>
-            <a:spLocks noGrp="1"/>
-          </p:cNvSpPr>
-          <p:nvPr>
-            <p:ph idx="1"/>
-          </p:nvPr>
-        </p:nvSpPr>
-        <p:spPr/>
-        <p:txBody>
-          <a:bodyPr/>
-          <a:lstStyle/>
-          <a:p>
-            <a:pPr lvl="0" indent="0" marL="0">
-              <a:buNone/>
-            </a:pPr>
-            <a:r>
-              <a:rPr/>
-              <a:t>Tujuan dari analisis data pembangunan wilayah ini adalah sebagai berikut:</a:t>
-            </a:r>
-          </a:p>
-          <a:p>
-            <a:pPr lvl="0" indent="-342900" marL="342900">
-              <a:buAutoNum type="arabicPeriod"/>
-            </a:pPr>
-            <a:r>
-              <a:rPr/>
-              <a:t>Memahami struktur dan karakteristik dataset.</a:t>
-            </a:r>
-          </a:p>
-          <a:p>
-            <a:pPr lvl="0" indent="-342900" marL="342900">
-              <a:buAutoNum type="arabicPeriod"/>
-            </a:pPr>
-            <a:r>
-              <a:rPr/>
-              <a:t>Melakukan eksplorasi data menggunakan R.</a:t>
-            </a:r>
-          </a:p>
-          <a:p>
-            <a:pPr lvl="0" indent="-342900" marL="342900">
-              <a:buAutoNum type="arabicPeriod"/>
-            </a:pPr>
-            <a:r>
-              <a:rPr/>
-              <a:t>Mengidentifikasi missing value dan outlier.</a:t>
-            </a:r>
-          </a:p>
-          <a:p>
-            <a:pPr lvl="0" indent="-342900" marL="342900">
-              <a:buAutoNum type="arabicPeriod"/>
-            </a:pPr>
-            <a:r>
-              <a:rPr/>
-              <a:t>Melakukan statistika deskriptif.</a:t>
-            </a:r>
-          </a:p>
-          <a:p>
-            <a:pPr lvl="0" indent="-342900" marL="342900">
-              <a:buAutoNum type="arabicPeriod"/>
-            </a:pPr>
-            <a:r>
-              <a:rPr/>
-              <a:t>Membuat visualisasi data yang informatif.</a:t>
-            </a:r>
-          </a:p>
-          <a:p>
-            <a:pPr lvl="0" indent="-342900" marL="342900">
-              <a:buAutoNum type="arabicPeriod"/>
-            </a:pPr>
-            <a:r>
-              <a:rPr/>
-              <a:t>Menggunakan konsep probabilitas dan distribusi data.</a:t>
-            </a:r>
-          </a:p>
-          <a:p>
-            <a:pPr lvl="0" indent="-342900" marL="342900">
-              <a:buAutoNum type="arabicPeriod"/>
-            </a:pPr>
-            <a:r>
-              <a:rPr/>
-              <a:t>Melakukan analisis hubungan antar variabel.</a:t>
-            </a:r>
-          </a:p>
-          <a:p>
-            <a:pPr lvl="0" indent="-342900" marL="342900">
-              <a:buAutoNum type="arabicPeriod"/>
-            </a:pPr>
-            <a:r>
-              <a:rPr/>
-              <a:t>Menarik kesimpulan berbasis data.</a:t>
-            </a:r>
-          </a:p>
-          <a:p>
-            <a:pPr lvl="0" indent="-342900" marL="342900">
-              <a:buAutoNum type="arabicPeriod"/>
-            </a:pPr>
-            <a:r>
-              <a:rPr/>
-              <a:t>Menyusun laporan ilmiah sederhana.</a:t>
-            </a:r>
-          </a:p>
-          <a:p>
-            <a:pPr lvl="0" indent="-342900" marL="342900">
-              <a:buAutoNum type="arabicPeriod"/>
-            </a:pPr>
-            <a:r>
-              <a:rPr/>
-              <a:t>Mengkomunikasikan hasil analisis secara sistematis.</a:t>
-            </a:r>
-          </a:p>
-        </p:txBody>
-      </p:sp>
-    </p:spTree>
-  </p:cSld>
-</p:sld>
-</file>
-
-<file path=ppt/slides/slide6.xml><?xml version="1.0" encoding="utf-8"?>
-<p:sld xmlns:a="http://schemas.openxmlformats.org/drawingml/2006/main" xmlns:r="http://schemas.openxmlformats.org/officeDocument/2006/relationships" xmlns:p="http://schemas.openxmlformats.org/presentationml/2006/main">
-  <p:cSld>
-    <p:spTree>
-      <p:nvGrpSpPr>
-        <p:cNvPr id="1" name=""/>
-        <p:cNvGrpSpPr/>
-        <p:nvPr/>
-      </p:nvGrpSpPr>
-      <p:grpSpPr>
-        <a:xfrm>
-          <a:off x="0" y="0"/>
-          <a:ext cx="0" cy="0"/>
-          <a:chOff x="0" y="0"/>
-          <a:chExt cx="0" cy="0"/>
-        </a:xfrm>
-      </p:grpSpPr>
-      <p:sp>
-        <p:nvSpPr>
-          <p:cNvPr id="2" name="Title 1"/>
-          <p:cNvSpPr>
-            <a:spLocks noGrp="1"/>
-          </p:cNvSpPr>
-          <p:nvPr>
-            <p:ph type="title"/>
-          </p:nvPr>
-        </p:nvSpPr>
-        <p:spPr/>
-        <p:txBody>
-          <a:bodyPr/>
-          <a:lstStyle/>
-          <a:p>
-            <a:pPr lvl="0" indent="0" marL="0">
-              <a:buNone/>
-            </a:pPr>
-            <a:r>
-              <a:rPr/>
-              <a:t>Deskripsi Dataset</a:t>
-            </a:r>
-          </a:p>
-        </p:txBody>
-      </p:sp>
-      <p:sp>
-        <p:nvSpPr>
-          <p:cNvPr id="3" name="Content Placeholder 2"/>
-          <p:cNvSpPr>
-            <a:spLocks noGrp="1"/>
-          </p:cNvSpPr>
-          <p:nvPr>
-            <p:ph idx="1"/>
-          </p:nvPr>
-        </p:nvSpPr>
-        <p:spPr/>
-        <p:txBody>
-          <a:bodyPr/>
-          <a:lstStyle/>
-          <a:p>
-            <a:pPr lvl="0" indent="0" marL="0">
-              <a:buNone/>
-            </a:pPr>
-            <a:r>
-              <a:rPr/>
-              <a:t>Dataset yang digunakan dalam analisis ini adalah </a:t>
-            </a:r>
-            <a:r>
-              <a:rPr>
-                <a:latin typeface="Courier"/>
-              </a:rPr>
-              <a:t>pembangunan_wilayah_missing_outlier.csv</a:t>
-            </a:r>
-            <a:r>
-              <a:rPr/>
-              <a:t>. Untuk menjawab tujuan pengamatan, analisis difokuskan pada dua variabel utama pengukur kualitas sumber daya manusia dan tenaga kerja, beserta variabel identitas wilayahnya. Berikut adalah rincian variabel yang digunakan:</a:t>
-            </a:r>
-          </a:p>
-          <a:p>
-            <a:pPr lvl="0" indent="-342900" marL="342900">
-              <a:buAutoNum type="arabicPeriod"/>
-            </a:pPr>
-            <a:r>
-              <a:rPr/>
-              <a:t>wilayah (Character): Nama kabupaten/kota yang menjadi objek pengamatan.</a:t>
-            </a:r>
-          </a:p>
-          <a:p>
-            <a:pPr lvl="0" indent="-342900" marL="342900">
-              <a:buAutoNum type="arabicPeriod"/>
-            </a:pPr>
-            <a:r>
-              <a:rPr/>
-              <a:t>provinsi (Character): Nama provinsi tempat wilayah berada.</a:t>
-            </a:r>
-          </a:p>
-          <a:p>
-            <a:pPr lvl="0" indent="-342900" marL="342900">
-              <a:buAutoNum type="arabicPeriod"/>
-            </a:pPr>
-            <a:r>
-              <a:rPr/>
-              <a:t>tahun (Integer): Tahun pengamatan data pembangunan wilayah.</a:t>
-            </a:r>
-          </a:p>
-        </p:txBody>
-      </p:sp>
-    </p:spTree>
-  </p:cSld>
-</p:sld>
-</file>
-
-<file path=ppt/slides/slide7.xml><?xml version="1.0" encoding="utf-8"?>
-<p:sld xmlns:a="http://schemas.openxmlformats.org/drawingml/2006/main" xmlns:r="http://schemas.openxmlformats.org/officeDocument/2006/relationships" xmlns:p="http://schemas.openxmlformats.org/presentationml/2006/main">
-  <p:cSld>
-    <p:spTree>
-      <p:nvGrpSpPr>
-        <p:cNvPr id="1" name=""/>
-        <p:cNvGrpSpPr/>
-        <p:nvPr/>
-      </p:nvGrpSpPr>
-      <p:grpSpPr>
-        <a:xfrm>
-          <a:off x="0" y="0"/>
-          <a:ext cx="0" cy="0"/>
-          <a:chOff x="0" y="0"/>
-          <a:chExt cx="0" cy="0"/>
-        </a:xfrm>
-      </p:grpSpPr>
-      <p:sp>
-        <p:nvSpPr>
-          <p:cNvPr id="2" name="Title 1"/>
-          <p:cNvSpPr>
-            <a:spLocks noGrp="1"/>
-          </p:cNvSpPr>
-          <p:nvPr>
-            <p:ph type="title"/>
-          </p:nvPr>
-        </p:nvSpPr>
-        <p:spPr/>
-        <p:txBody>
-          <a:bodyPr/>
-          <a:lstStyle/>
-          <a:p>
-            <a:pPr lvl="0" indent="0" marL="0">
-              <a:buNone/>
-            </a:pPr>
-            <a:r>
-              <a:rPr/>
               <a:t>Deskripsi Dataset</a:t>
             </a:r>
           </a:p>
@@ -3739,72 +3502,9 @@
               <a:t>ipm (Numeric): Indeks Pembangunan Manusia yang menggambarkan kualitas hidup masyarakat berdasarkan pendidikan, kesehatan, dan standar hidup.</a:t>
             </a:r>
           </a:p>
-        </p:txBody>
-      </p:sp>
-    </p:spTree>
-  </p:cSld>
-</p:sld>
-</file>
-
-<file path=ppt/slides/slide8.xml><?xml version="1.0" encoding="utf-8"?>
-<p:sld xmlns:a="http://schemas.openxmlformats.org/drawingml/2006/main" xmlns:r="http://schemas.openxmlformats.org/officeDocument/2006/relationships" xmlns:p="http://schemas.openxmlformats.org/presentationml/2006/main">
-  <p:cSld>
-    <p:spTree>
-      <p:nvGrpSpPr>
-        <p:cNvPr id="1" name=""/>
-        <p:cNvGrpSpPr/>
-        <p:nvPr/>
-      </p:nvGrpSpPr>
-      <p:grpSpPr>
-        <a:xfrm>
-          <a:off x="0" y="0"/>
-          <a:ext cx="0" cy="0"/>
-          <a:chOff x="0" y="0"/>
-          <a:chExt cx="0" cy="0"/>
-        </a:xfrm>
-      </p:grpSpPr>
-      <p:sp>
-        <p:nvSpPr>
-          <p:cNvPr id="2" name="Title 1"/>
-          <p:cNvSpPr>
-            <a:spLocks noGrp="1"/>
-          </p:cNvSpPr>
-          <p:nvPr>
-            <p:ph type="title"/>
-          </p:nvPr>
-        </p:nvSpPr>
-        <p:spPr/>
-        <p:txBody>
-          <a:bodyPr/>
-          <a:lstStyle/>
-          <a:p>
-            <a:pPr lvl="0" indent="0" marL="0">
-              <a:buNone/>
-            </a:pPr>
-            <a:r>
-              <a:rPr/>
-              <a:t>Deskripsi Dataset</a:t>
-            </a:r>
-          </a:p>
-        </p:txBody>
-      </p:sp>
-      <p:sp>
-        <p:nvSpPr>
-          <p:cNvPr id="3" name="Content Placeholder 2"/>
-          <p:cNvSpPr>
-            <a:spLocks noGrp="1"/>
-          </p:cNvSpPr>
-          <p:nvPr>
-            <p:ph idx="1"/>
-          </p:nvPr>
-        </p:nvSpPr>
-        <p:spPr/>
-        <p:txBody>
-          <a:bodyPr/>
-          <a:lstStyle/>
           <a:p>
             <a:pPr lvl="0" indent="-342900" marL="342900">
-              <a:buAutoNum startAt="8" type="arabicPeriod"/>
+              <a:buAutoNum startAt="4" type="arabicPeriod"/>
             </a:pPr>
             <a:r>
               <a:rPr/>
@@ -3813,7 +3513,7 @@
           </a:p>
           <a:p>
             <a:pPr lvl="0" indent="-342900" marL="342900">
-              <a:buAutoNum startAt="8" type="arabicPeriod"/>
+              <a:buAutoNum startAt="4" type="arabicPeriod"/>
             </a:pPr>
             <a:r>
               <a:rPr/>
@@ -3822,7 +3522,7 @@
           </a:p>
           <a:p>
             <a:pPr lvl="0" indent="-342900" marL="342900">
-              <a:buAutoNum startAt="8" type="arabicPeriod"/>
+              <a:buAutoNum startAt="4" type="arabicPeriod"/>
             </a:pPr>
             <a:r>
               <a:rPr/>
@@ -3831,7 +3531,7 @@
           </a:p>
           <a:p>
             <a:pPr lvl="0" indent="-342900" marL="342900">
-              <a:buAutoNum startAt="8" type="arabicPeriod"/>
+              <a:buAutoNum startAt="4" type="arabicPeriod"/>
             </a:pPr>
             <a:r>
               <a:rPr/>
@@ -3840,7 +3540,7 @@
           </a:p>
           <a:p>
             <a:pPr lvl="0" indent="-342900" marL="342900">
-              <a:buAutoNum startAt="8" type="arabicPeriod"/>
+              <a:buAutoNum startAt="4" type="arabicPeriod"/>
             </a:pPr>
             <a:r>
               <a:rPr/>
@@ -3849,7 +3549,7 @@
           </a:p>
           <a:p>
             <a:pPr lvl="0" indent="-342900" marL="342900">
-              <a:buAutoNum startAt="8" type="arabicPeriod"/>
+              <a:buAutoNum startAt="4" type="arabicPeriod"/>
             </a:pPr>
             <a:r>
               <a:rPr/>

--- a/dokumen/PPT-Laporan.pptx
+++ b/dokumen/PPT-Laporan.pptx
@@ -10,6 +10,11 @@
     <p:sldId id="258" r:id="rId4"/>
     <p:sldId id="259" r:id="rId5"/>
     <p:sldId id="260" r:id="rId6"/>
+    <p:sldId id="261" r:id="rId7"/>
+    <p:sldId id="262" r:id="rId8"/>
+    <p:sldId id="263" r:id="rId9"/>
+    <p:sldId id="264" r:id="rId10"/>
+    <p:sldId id="265" r:id="rId11"/>
   </p:sldIdLst>
   <p:sldSz cx="9144000" cy="5143500" type="screen16x9"/>
   <p:notesSz cx="6858000" cy="9144000"/>
@@ -3157,6 +3162,83 @@
 </p:sld>
 </file>
 
+<file path=ppt/slides/slide10.xml><?xml version="1.0" encoding="utf-8"?>
+<p:sld xmlns:a="http://schemas.openxmlformats.org/drawingml/2006/main" xmlns:r="http://schemas.openxmlformats.org/officeDocument/2006/relationships" xmlns:p="http://schemas.openxmlformats.org/presentationml/2006/main">
+  <p:cSld>
+    <p:spTree>
+      <p:nvGrpSpPr>
+        <p:cNvPr id="1" name=""/>
+        <p:cNvGrpSpPr/>
+        <p:nvPr/>
+      </p:nvGrpSpPr>
+      <p:grpSpPr>
+        <a:xfrm>
+          <a:off x="0" y="0"/>
+          <a:ext cx="0" cy="0"/>
+          <a:chOff x="0" y="0"/>
+          <a:chExt cx="0" cy="0"/>
+        </a:xfrm>
+      </p:grpSpPr>
+      <p:sp>
+        <p:nvSpPr>
+          <p:cNvPr id="2" name="Title 1"/>
+          <p:cNvSpPr>
+            <a:spLocks noGrp="1"/>
+          </p:cNvSpPr>
+          <p:nvPr>
+            <p:ph type="title"/>
+          </p:nvPr>
+        </p:nvSpPr>
+        <p:spPr/>
+        <p:txBody>
+          <a:bodyPr/>
+          <a:lstStyle/>
+          <a:p>
+            <a:pPr lvl="0" indent="0" marL="0">
+              <a:buNone/>
+            </a:pPr>
+            <a:r>
+              <a:rPr/>
+              <a:t>Visualisasi</a:t>
+            </a:r>
+          </a:p>
+        </p:txBody>
+      </p:sp>
+      <p:pic>
+        <p:nvPicPr>
+          <p:cNvPr descr="images/visualisasi4.png" id="0" name="Picture 1"/>
+          <p:cNvPicPr>
+            <a:picLocks noGrp="1" noChangeAspect="1"/>
+          </p:cNvPicPr>
+          <p:nvPr/>
+        </p:nvPicPr>
+        <p:blipFill>
+          <a:blip r:embed="rId2"/>
+          <a:stretch>
+            <a:fillRect/>
+          </a:stretch>
+        </p:blipFill>
+        <p:spPr bwMode="auto">
+          <a:xfrm>
+            <a:off x="2286000" y="1193800"/>
+            <a:ext cx="4559300" cy="3390900"/>
+          </a:xfrm>
+          <a:prstGeom prst="rect">
+            <a:avLst/>
+          </a:prstGeom>
+          <a:noFill/>
+          <a:ln w="9525">
+            <a:noFill/>
+            <a:headEnd/>
+            <a:tailEnd/>
+          </a:ln>
+        </p:spPr>
+      </p:pic>
+    </p:spTree>
+  </p:cSld>
+</p:sld>
+</file>
+
 <file path=ppt/slides/slide2.xml><?xml version="1.0" encoding="utf-8"?>
 <p:sld xmlns:a="http://schemas.openxmlformats.org/drawingml/2006/main" xmlns:r="http://schemas.openxmlformats.org/officeDocument/2006/relationships" xmlns:p="http://schemas.openxmlformats.org/presentationml/2006/main">
   <p:cSld>
@@ -3219,7 +3301,7 @@
             </a:pPr>
             <a:r>
               <a:rPr/>
-              <a:t>Pembangunan wilayah tidak hanya ditentukan oleh pertumbuhan infrastruktur, tetapi juga oleh peningkatan kesejahteraan masyarakat yang salah satunya tercermin dari tingkat kemiskinan. Kemiskinan merupakan masalah multidimensional yang dipengaruhi oleh berbagai faktor sosial dan ekonomi, di antaranya kualitas sumber daya manusia dan kondisi pasar kerja. Teori modal manusia menyatakan bahwa pendidikan, yang direpresentasikan melalui rata-rata lama sekolah, dapat meningkatkan produktivitas dan peluang kerja sehingga berpotensi menurunkan tingkat kemiskinan. Sebaliknya, tingginya tingkat pengangguran terbuka dapat mengurangi pendapatan masyarakat dan meningkatkan risiko kemiskinan. Dalam analisis data terkait indikator-indikator tersebut, sering ditemukan permasalahan seperti missing value dan outlier yang dapat memengaruhi hasil analisis. Oleh karena itu, proyek ini bertujuan melakukan analisis statistika menggunakan bahasa pemrograman R untuk mendeskripsikan data, menangani ketidaksempurnaan data, serta menguji hubungan antara rata-rata lama sekolah dan tingkat pengangguran terhadap persentase kemiskinan di berbagai wilayah.</a:t>
+              <a:t>Kemiskinan merupakan salah satu indikator penting dalam menilai tingkat kesejahteraan masyarakat suatu wilayah. Faktor seperti rata-rata lama sekolah diduga memiliki hubungan dengan persentase kemiskinan. Oleh karena itu, penelitian ini bertujuan menganalisis hubungan kedua faktor tersebut terhadap tingkat kemiskinan menggunakan bahasa pemrograman R.</a:t>
             </a:r>
           </a:p>
         </p:txBody>
@@ -3291,7 +3373,7 @@
             </a:pPr>
             <a:r>
               <a:rPr/>
-              <a:t>Tujuan dari analisis data pembangunan wilayah ini adalah sebagai berikut: 1. Memahami struktur dan karakteristik dataset. 2. Melakukan eksplorasi data menggunakan R. 3. Mengidentifikasi missing value dan outlier. 4. Melakukan statistika deskriptif. 5. Membuat visualisasi data yang informatif. 6. Menggunakan konsep probabilitas dan distribusi data. 7. Melakukan analisis hubungan antar variabel. 8. Menarik kesimpulan berbasis data. 9. Menyusun laporan ilmiah sederhana. 10. Mengkomunikasikan hasil analisis secara sistematis.</a:t>
+              <a:t>Analisis ini bertujuan memahami karakteristik data pembangunan wilayah melalui eksplorasi, statistika deskriptif, visualisasi data, identifikasi missing value dan outlier, serta analisis hubungan antar variabel untuk menghasilkan kesimpulan yang dapat dikomunikasikan secara sistematis dalam bentuk laporan ilmiah.</a:t>
             </a:r>
           </a:p>
         </p:txBody>
@@ -3366,41 +3448,20 @@
               <a:t>Dataset yang digunakan dalam analisis ini adalah </a:t>
             </a:r>
             <a:r>
-              <a:rPr>
-                <a:latin typeface="Courier"/>
-              </a:rPr>
+              <a:rPr i="1"/>
               <a:t>pembangunan_wilayah_missing_outlier.csv</a:t>
             </a:r>
             <a:r>
               <a:rPr/>
-              <a:t>. Untuk menjawab tujuan pengamatan, analisis difokuskan pada dua variabel utama pengukur kualitas sumber daya manusia dan tenaga kerja, beserta variabel identitas wilayahnya. Berikut adalah rincian variabel yang digunakan:</a:t>
-            </a:r>
-          </a:p>
-          <a:p>
-            <a:pPr lvl="0" indent="-342900" marL="342900">
-              <a:buAutoNum type="arabicPeriod"/>
-            </a:pPr>
+              <a:t>, yang berisi informasi pembangunan wilayah pada tingkat kabupaten/kota di Indonesia. Variabel yang dianalisis mencakup identitas wilayah (wilayah, provinsi, dan tahun) serta berbagai indikator sosial-ekonomi, seperti PDRB per kapita, kemiskinan, pengangguran, IPM, harapan hidup, rata-rata lama sekolah, akses internet, kondisi jalan, dan akses air bersih. Selain itu, dataset juga memuat informasi kualitas data melalui variabel </a:t>
+            </a:r>
+            <a:r>
+              <a:rPr i="1"/>
+              <a:t>catatan_data</a:t>
+            </a:r>
             <a:r>
               <a:rPr/>
-              <a:t>wilayah (Character): Nama kabupaten/kota yang menjadi objek pengamatan.</a:t>
-            </a:r>
-          </a:p>
-          <a:p>
-            <a:pPr lvl="0" indent="-342900" marL="342900">
-              <a:buAutoNum type="arabicPeriod"/>
-            </a:pPr>
-            <a:r>
-              <a:rPr/>
-              <a:t>provinsi (Character): Nama provinsi tempat wilayah berada.</a:t>
-            </a:r>
-          </a:p>
-          <a:p>
-            <a:pPr lvl="0" indent="-342900" marL="342900">
-              <a:buAutoNum type="arabicPeriod"/>
-            </a:pPr>
-            <a:r>
-              <a:rPr/>
-              <a:t>tahun (Integer): Tahun pengamatan data pembangunan wilayah.</a:t>
+              <a:t> yang menunjukkan keberadaan missing value atau outlier.</a:t>
             </a:r>
           </a:p>
         </p:txBody>
@@ -3447,117 +3508,319 @@
             </a:pPr>
             <a:r>
               <a:rPr/>
-              <a:t>Deskripsi Dataset</a:t>
-            </a:r>
-          </a:p>
-        </p:txBody>
-      </p:sp>
-      <p:sp>
-        <p:nvSpPr>
-          <p:cNvPr id="3" name="Content Placeholder 2"/>
-          <p:cNvSpPr>
-            <a:spLocks noGrp="1"/>
-          </p:cNvSpPr>
-          <p:nvPr>
-            <p:ph idx="1"/>
-          </p:nvPr>
-        </p:nvSpPr>
-        <p:spPr/>
-        <p:txBody>
-          <a:bodyPr/>
-          <a:lstStyle/>
-          <a:p>
-            <a:pPr lvl="0" indent="-342900" marL="342900">
-              <a:buAutoNum startAt="4" type="arabicPeriod"/>
+              <a:t>Tools</a:t>
+            </a:r>
+          </a:p>
+        </p:txBody>
+      </p:sp>
+    </p:spTree>
+  </p:cSld>
+</p:sld>
+</file>
+
+<file path=ppt/slides/slide6.xml><?xml version="1.0" encoding="utf-8"?>
+<p:sld xmlns:a="http://schemas.openxmlformats.org/drawingml/2006/main" xmlns:r="http://schemas.openxmlformats.org/officeDocument/2006/relationships" xmlns:p="http://schemas.openxmlformats.org/presentationml/2006/main">
+  <p:cSld>
+    <p:spTree>
+      <p:nvGrpSpPr>
+        <p:cNvPr id="1" name=""/>
+        <p:cNvGrpSpPr/>
+        <p:nvPr/>
+      </p:nvGrpSpPr>
+      <p:grpSpPr>
+        <a:xfrm>
+          <a:off x="0" y="0"/>
+          <a:ext cx="0" cy="0"/>
+          <a:chOff x="0" y="0"/>
+          <a:chExt cx="0" cy="0"/>
+        </a:xfrm>
+      </p:grpSpPr>
+      <p:sp>
+        <p:nvSpPr>
+          <p:cNvPr id="2" name="Title 1"/>
+          <p:cNvSpPr>
+            <a:spLocks noGrp="1"/>
+          </p:cNvSpPr>
+          <p:nvPr>
+            <p:ph type="title"/>
+          </p:nvPr>
+        </p:nvSpPr>
+        <p:spPr/>
+        <p:txBody>
+          <a:bodyPr/>
+          <a:lstStyle/>
+          <a:p>
+            <a:pPr lvl="0" indent="0" marL="0">
+              <a:buNone/>
             </a:pPr>
             <a:r>
               <a:rPr/>
-              <a:t>pdrb_perkapita (Numeric): Produk Domestik Regional Bruto (PDRB) per kapita yang menggambarkan tingkat aktivitas ekonomi dan pendapatan rata-rata masyarakat suatu wilayah.</a:t>
-            </a:r>
-          </a:p>
-          <a:p>
-            <a:pPr lvl="0" indent="-342900" marL="342900">
-              <a:buAutoNum startAt="4" type="arabicPeriod"/>
+              <a:t>Visualisasi</a:t>
+            </a:r>
+          </a:p>
+        </p:txBody>
+      </p:sp>
+      <p:pic>
+        <p:nvPicPr>
+          <p:cNvPr descr="images/BarPlotJumlahLaporanProvinsi.png" id="0" name="Picture 1"/>
+          <p:cNvPicPr>
+            <a:picLocks noGrp="1" noChangeAspect="1"/>
+          </p:cNvPicPr>
+          <p:nvPr/>
+        </p:nvPicPr>
+        <p:blipFill>
+          <a:blip r:embed="rId2"/>
+          <a:stretch>
+            <a:fillRect/>
+          </a:stretch>
+        </p:blipFill>
+        <p:spPr bwMode="auto">
+          <a:xfrm>
+            <a:off x="635000" y="1193800"/>
+            <a:ext cx="7874000" cy="3390900"/>
+          </a:xfrm>
+          <a:prstGeom prst="rect">
+            <a:avLst/>
+          </a:prstGeom>
+          <a:noFill/>
+          <a:ln w="9525">
+            <a:noFill/>
+            <a:headEnd/>
+            <a:tailEnd/>
+          </a:ln>
+        </p:spPr>
+      </p:pic>
+    </p:spTree>
+  </p:cSld>
+</p:sld>
+</file>
+
+<file path=ppt/slides/slide7.xml><?xml version="1.0" encoding="utf-8"?>
+<p:sld xmlns:a="http://schemas.openxmlformats.org/drawingml/2006/main" xmlns:r="http://schemas.openxmlformats.org/officeDocument/2006/relationships" xmlns:p="http://schemas.openxmlformats.org/presentationml/2006/main">
+  <p:cSld>
+    <p:spTree>
+      <p:nvGrpSpPr>
+        <p:cNvPr id="1" name=""/>
+        <p:cNvGrpSpPr/>
+        <p:nvPr/>
+      </p:nvGrpSpPr>
+      <p:grpSpPr>
+        <a:xfrm>
+          <a:off x="0" y="0"/>
+          <a:ext cx="0" cy="0"/>
+          <a:chOff x="0" y="0"/>
+          <a:chExt cx="0" cy="0"/>
+        </a:xfrm>
+      </p:grpSpPr>
+      <p:sp>
+        <p:nvSpPr>
+          <p:cNvPr id="2" name="Title 1"/>
+          <p:cNvSpPr>
+            <a:spLocks noGrp="1"/>
+          </p:cNvSpPr>
+          <p:nvPr>
+            <p:ph type="title"/>
+          </p:nvPr>
+        </p:nvSpPr>
+        <p:spPr/>
+        <p:txBody>
+          <a:bodyPr/>
+          <a:lstStyle/>
+          <a:p>
+            <a:pPr lvl="0" indent="0" marL="0">
+              <a:buNone/>
             </a:pPr>
             <a:r>
               <a:rPr/>
-              <a:t>kemiskinan (Numeric): Persentase penduduk miskin pada suatu wilayah.</a:t>
-            </a:r>
-          </a:p>
-          <a:p>
-            <a:pPr lvl="0" indent="-342900" marL="342900">
-              <a:buAutoNum startAt="4" type="arabicPeriod"/>
+              <a:t>Visualisasi</a:t>
+            </a:r>
+          </a:p>
+        </p:txBody>
+      </p:sp>
+      <p:pic>
+        <p:nvPicPr>
+          <p:cNvPr descr="images/BarPlotJumlahLaporanTahun.png" id="0" name="Picture 1"/>
+          <p:cNvPicPr>
+            <a:picLocks noGrp="1" noChangeAspect="1"/>
+          </p:cNvPicPr>
+          <p:nvPr/>
+        </p:nvPicPr>
+        <p:blipFill>
+          <a:blip r:embed="rId2"/>
+          <a:stretch>
+            <a:fillRect/>
+          </a:stretch>
+        </p:blipFill>
+        <p:spPr bwMode="auto">
+          <a:xfrm>
+            <a:off x="1778000" y="1193800"/>
+            <a:ext cx="5588000" cy="3390900"/>
+          </a:xfrm>
+          <a:prstGeom prst="rect">
+            <a:avLst/>
+          </a:prstGeom>
+          <a:noFill/>
+          <a:ln w="9525">
+            <a:noFill/>
+            <a:headEnd/>
+            <a:tailEnd/>
+          </a:ln>
+        </p:spPr>
+      </p:pic>
+    </p:spTree>
+  </p:cSld>
+</p:sld>
+</file>
+
+<file path=ppt/slides/slide8.xml><?xml version="1.0" encoding="utf-8"?>
+<p:sld xmlns:a="http://schemas.openxmlformats.org/drawingml/2006/main" xmlns:r="http://schemas.openxmlformats.org/officeDocument/2006/relationships" xmlns:p="http://schemas.openxmlformats.org/presentationml/2006/main">
+  <p:cSld>
+    <p:spTree>
+      <p:nvGrpSpPr>
+        <p:cNvPr id="1" name=""/>
+        <p:cNvGrpSpPr/>
+        <p:nvPr/>
+      </p:nvGrpSpPr>
+      <p:grpSpPr>
+        <a:xfrm>
+          <a:off x="0" y="0"/>
+          <a:ext cx="0" cy="0"/>
+          <a:chOff x="0" y="0"/>
+          <a:chExt cx="0" cy="0"/>
+        </a:xfrm>
+      </p:grpSpPr>
+      <p:sp>
+        <p:nvSpPr>
+          <p:cNvPr id="2" name="Title 1"/>
+          <p:cNvSpPr>
+            <a:spLocks noGrp="1"/>
+          </p:cNvSpPr>
+          <p:nvPr>
+            <p:ph type="title"/>
+          </p:nvPr>
+        </p:nvSpPr>
+        <p:spPr/>
+        <p:txBody>
+          <a:bodyPr/>
+          <a:lstStyle/>
+          <a:p>
+            <a:pPr lvl="0" indent="0" marL="0">
+              <a:buNone/>
             </a:pPr>
             <a:r>
               <a:rPr/>
-              <a:t>pengangguran (Numeric): Persentase tingkat pengangguran pada suatu wilayah.</a:t>
-            </a:r>
-          </a:p>
-          <a:p>
-            <a:pPr lvl="0" indent="-342900" marL="342900">
-              <a:buAutoNum startAt="4" type="arabicPeriod"/>
+              <a:t>Visualisasi</a:t>
+            </a:r>
+          </a:p>
+        </p:txBody>
+      </p:sp>
+      <p:pic>
+        <p:nvPicPr>
+          <p:cNvPr descr="images/visualisasi2.png" id="0" name="Picture 1"/>
+          <p:cNvPicPr>
+            <a:picLocks noGrp="1" noChangeAspect="1"/>
+          </p:cNvPicPr>
+          <p:nvPr/>
+        </p:nvPicPr>
+        <p:blipFill>
+          <a:blip r:embed="rId2"/>
+          <a:stretch>
+            <a:fillRect/>
+          </a:stretch>
+        </p:blipFill>
+        <p:spPr bwMode="auto">
+          <a:xfrm>
+            <a:off x="2286000" y="1193800"/>
+            <a:ext cx="4559300" cy="3390900"/>
+          </a:xfrm>
+          <a:prstGeom prst="rect">
+            <a:avLst/>
+          </a:prstGeom>
+          <a:noFill/>
+          <a:ln w="9525">
+            <a:noFill/>
+            <a:headEnd/>
+            <a:tailEnd/>
+          </a:ln>
+        </p:spPr>
+      </p:pic>
+    </p:spTree>
+  </p:cSld>
+</p:sld>
+</file>
+
+<file path=ppt/slides/slide9.xml><?xml version="1.0" encoding="utf-8"?>
+<p:sld xmlns:a="http://schemas.openxmlformats.org/drawingml/2006/main" xmlns:r="http://schemas.openxmlformats.org/officeDocument/2006/relationships" xmlns:p="http://schemas.openxmlformats.org/presentationml/2006/main">
+  <p:cSld>
+    <p:spTree>
+      <p:nvGrpSpPr>
+        <p:cNvPr id="1" name=""/>
+        <p:cNvGrpSpPr/>
+        <p:nvPr/>
+      </p:nvGrpSpPr>
+      <p:grpSpPr>
+        <a:xfrm>
+          <a:off x="0" y="0"/>
+          <a:ext cx="0" cy="0"/>
+          <a:chOff x="0" y="0"/>
+          <a:chExt cx="0" cy="0"/>
+        </a:xfrm>
+      </p:grpSpPr>
+      <p:sp>
+        <p:nvSpPr>
+          <p:cNvPr id="2" name="Title 1"/>
+          <p:cNvSpPr>
+            <a:spLocks noGrp="1"/>
+          </p:cNvSpPr>
+          <p:nvPr>
+            <p:ph type="title"/>
+          </p:nvPr>
+        </p:nvSpPr>
+        <p:spPr/>
+        <p:txBody>
+          <a:bodyPr/>
+          <a:lstStyle/>
+          <a:p>
+            <a:pPr lvl="0" indent="0" marL="0">
+              <a:buNone/>
             </a:pPr>
             <a:r>
               <a:rPr/>
-              <a:t>ipm (Numeric): Indeks Pembangunan Manusia yang menggambarkan kualitas hidup masyarakat berdasarkan pendidikan, kesehatan, dan standar hidup.</a:t>
-            </a:r>
-          </a:p>
-          <a:p>
-            <a:pPr lvl="0" indent="-342900" marL="342900">
-              <a:buAutoNum startAt="4" type="arabicPeriod"/>
-            </a:pPr>
-            <a:r>
-              <a:rPr/>
-              <a:t>harapan_hidup (Numeric): Rata-rata perkiraan umur yang dapat dicapai penduduk pada suatu wilayah.</a:t>
-            </a:r>
-          </a:p>
-          <a:p>
-            <a:pPr lvl="0" indent="-342900" marL="342900">
-              <a:buAutoNum startAt="4" type="arabicPeriod"/>
-            </a:pPr>
-            <a:r>
-              <a:rPr/>
-              <a:t>rata_lama_sekolah (Numeric): Rata-rata jumlah tahun pendidikan formal yang telah ditempuh penduduk.</a:t>
-            </a:r>
-          </a:p>
-          <a:p>
-            <a:pPr lvl="0" indent="-342900" marL="342900">
-              <a:buAutoNum startAt="4" type="arabicPeriod"/>
-            </a:pPr>
-            <a:r>
-              <a:rPr/>
-              <a:t>akses_internet (Numeric):Persentase masyarakat yang memiliki atau menggunakan akses internet.</a:t>
-            </a:r>
-          </a:p>
-          <a:p>
-            <a:pPr lvl="0" indent="-342900" marL="342900">
-              <a:buAutoNum startAt="4" type="arabicPeriod"/>
-            </a:pPr>
-            <a:r>
-              <a:rPr/>
-              <a:t>jalan_baik (Numeric):Persentase kondisi jalan yang berada dalam kategori baik.</a:t>
-            </a:r>
-          </a:p>
-          <a:p>
-            <a:pPr lvl="0" indent="-342900" marL="342900">
-              <a:buAutoNum startAt="4" type="arabicPeriod"/>
-            </a:pPr>
-            <a:r>
-              <a:rPr/>
-              <a:t>air_bersih (Numeric):Persentase masyarakat yang memiliki akses terhadap air bersih.</a:t>
-            </a:r>
-          </a:p>
-          <a:p>
-            <a:pPr lvl="0" indent="-342900" marL="342900">
-              <a:buAutoNum startAt="4" type="arabicPeriod"/>
-            </a:pPr>
-            <a:r>
-              <a:rPr/>
-              <a:t>catatan_data (Character):Keterangan kondisi data, misalnya data normal, mengandung missing value, atau outlier.</a:t>
-            </a:r>
-          </a:p>
-        </p:txBody>
-      </p:sp>
+              <a:t>Visualisasi</a:t>
+            </a:r>
+          </a:p>
+        </p:txBody>
+      </p:sp>
+      <p:pic>
+        <p:nvPicPr>
+          <p:cNvPr descr="images/visualisasi3.png" id="0" name="Picture 1"/>
+          <p:cNvPicPr>
+            <a:picLocks noGrp="1" noChangeAspect="1"/>
+          </p:cNvPicPr>
+          <p:nvPr/>
+        </p:nvPicPr>
+        <p:blipFill>
+          <a:blip r:embed="rId2"/>
+          <a:stretch>
+            <a:fillRect/>
+          </a:stretch>
+        </p:blipFill>
+        <p:spPr bwMode="auto">
+          <a:xfrm>
+            <a:off x="2286000" y="1193800"/>
+            <a:ext cx="4559300" cy="3390900"/>
+          </a:xfrm>
+          <a:prstGeom prst="rect">
+            <a:avLst/>
+          </a:prstGeom>
+          <a:noFill/>
+          <a:ln w="9525">
+            <a:noFill/>
+            <a:headEnd/>
+            <a:tailEnd/>
+          </a:ln>
+        </p:spPr>
+      </p:pic>
     </p:spTree>
   </p:cSld>
 </p:sld>

--- a/dokumen/PPT-Laporan.pptx
+++ b/dokumen/PPT-Laporan.pptx
@@ -15,6 +15,18 @@
     <p:sldId id="263" r:id="rId9"/>
     <p:sldId id="264" r:id="rId10"/>
     <p:sldId id="265" r:id="rId11"/>
+    <p:sldId id="266" r:id="rId12"/>
+    <p:sldId id="267" r:id="rId13"/>
+    <p:sldId id="268" r:id="rId14"/>
+    <p:sldId id="269" r:id="rId15"/>
+    <p:sldId id="270" r:id="rId16"/>
+    <p:sldId id="271" r:id="rId17"/>
+    <p:sldId id="272" r:id="rId18"/>
+    <p:sldId id="273" r:id="rId19"/>
+    <p:sldId id="274" r:id="rId20"/>
+    <p:sldId id="275" r:id="rId21"/>
+    <p:sldId id="276" r:id="rId22"/>
+    <p:sldId id="277" r:id="rId23"/>
   </p:sldIdLst>
   <p:sldSz cx="9144000" cy="5143500" type="screen16x9"/>
   <p:notesSz cx="6858000" cy="9144000"/>
@@ -3206,362 +3218,6 @@
       </p:sp>
       <p:pic>
         <p:nvPicPr>
-          <p:cNvPr descr="images/visualisasi4.png" id="0" name="Picture 1"/>
-          <p:cNvPicPr>
-            <a:picLocks noGrp="1" noChangeAspect="1"/>
-          </p:cNvPicPr>
-          <p:nvPr/>
-        </p:nvPicPr>
-        <p:blipFill>
-          <a:blip r:embed="rId2"/>
-          <a:stretch>
-            <a:fillRect/>
-          </a:stretch>
-        </p:blipFill>
-        <p:spPr bwMode="auto">
-          <a:xfrm>
-            <a:off x="2286000" y="1193800"/>
-            <a:ext cx="4559300" cy="3390900"/>
-          </a:xfrm>
-          <a:prstGeom prst="rect">
-            <a:avLst/>
-          </a:prstGeom>
-          <a:noFill/>
-          <a:ln w="9525">
-            <a:noFill/>
-            <a:headEnd/>
-            <a:tailEnd/>
-          </a:ln>
-        </p:spPr>
-      </p:pic>
-    </p:spTree>
-  </p:cSld>
-</p:sld>
-</file>
-
-<file path=ppt/slides/slide2.xml><?xml version="1.0" encoding="utf-8"?>
-<p:sld xmlns:a="http://schemas.openxmlformats.org/drawingml/2006/main" xmlns:r="http://schemas.openxmlformats.org/officeDocument/2006/relationships" xmlns:p="http://schemas.openxmlformats.org/presentationml/2006/main">
-  <p:cSld>
-    <p:spTree>
-      <p:nvGrpSpPr>
-        <p:cNvPr id="1" name=""/>
-        <p:cNvGrpSpPr/>
-        <p:nvPr/>
-      </p:nvGrpSpPr>
-      <p:grpSpPr>
-        <a:xfrm>
-          <a:off x="0" y="0"/>
-          <a:ext cx="0" cy="0"/>
-          <a:chOff x="0" y="0"/>
-          <a:chExt cx="0" cy="0"/>
-        </a:xfrm>
-      </p:grpSpPr>
-      <p:sp>
-        <p:nvSpPr>
-          <p:cNvPr id="2" name="Title 1"/>
-          <p:cNvSpPr>
-            <a:spLocks noGrp="1"/>
-          </p:cNvSpPr>
-          <p:nvPr>
-            <p:ph type="title"/>
-          </p:nvPr>
-        </p:nvSpPr>
-        <p:spPr/>
-        <p:txBody>
-          <a:bodyPr/>
-          <a:lstStyle/>
-          <a:p>
-            <a:pPr lvl="0" indent="0" marL="0">
-              <a:buNone/>
-            </a:pPr>
-            <a:r>
-              <a:rPr/>
-              <a:t>Latar belakang</a:t>
-            </a:r>
-          </a:p>
-        </p:txBody>
-      </p:sp>
-      <p:sp>
-        <p:nvSpPr>
-          <p:cNvPr id="3" name="Content Placeholder 2"/>
-          <p:cNvSpPr>
-            <a:spLocks noGrp="1"/>
-          </p:cNvSpPr>
-          <p:nvPr>
-            <p:ph idx="1"/>
-          </p:nvPr>
-        </p:nvSpPr>
-        <p:spPr/>
-        <p:txBody>
-          <a:bodyPr/>
-          <a:lstStyle/>
-          <a:p>
-            <a:pPr lvl="0" indent="0" marL="0">
-              <a:buNone/>
-            </a:pPr>
-            <a:r>
-              <a:rPr/>
-              <a:t>Kemiskinan merupakan salah satu indikator penting dalam menilai tingkat kesejahteraan masyarakat suatu wilayah. Faktor seperti rata-rata lama sekolah diduga memiliki hubungan dengan persentase kemiskinan. Oleh karena itu, penelitian ini bertujuan menganalisis hubungan kedua faktor tersebut terhadap tingkat kemiskinan menggunakan bahasa pemrograman R.</a:t>
-            </a:r>
-          </a:p>
-        </p:txBody>
-      </p:sp>
-    </p:spTree>
-  </p:cSld>
-</p:sld>
-</file>
-
-<file path=ppt/slides/slide3.xml><?xml version="1.0" encoding="utf-8"?>
-<p:sld xmlns:a="http://schemas.openxmlformats.org/drawingml/2006/main" xmlns:r="http://schemas.openxmlformats.org/officeDocument/2006/relationships" xmlns:p="http://schemas.openxmlformats.org/presentationml/2006/main">
-  <p:cSld>
-    <p:spTree>
-      <p:nvGrpSpPr>
-        <p:cNvPr id="1" name=""/>
-        <p:cNvGrpSpPr/>
-        <p:nvPr/>
-      </p:nvGrpSpPr>
-      <p:grpSpPr>
-        <a:xfrm>
-          <a:off x="0" y="0"/>
-          <a:ext cx="0" cy="0"/>
-          <a:chOff x="0" y="0"/>
-          <a:chExt cx="0" cy="0"/>
-        </a:xfrm>
-      </p:grpSpPr>
-      <p:sp>
-        <p:nvSpPr>
-          <p:cNvPr id="2" name="Title 1"/>
-          <p:cNvSpPr>
-            <a:spLocks noGrp="1"/>
-          </p:cNvSpPr>
-          <p:nvPr>
-            <p:ph type="title"/>
-          </p:nvPr>
-        </p:nvSpPr>
-        <p:spPr/>
-        <p:txBody>
-          <a:bodyPr/>
-          <a:lstStyle/>
-          <a:p>
-            <a:pPr lvl="0" indent="0" marL="0">
-              <a:buNone/>
-            </a:pPr>
-            <a:r>
-              <a:rPr/>
-              <a:t>Tujuan</a:t>
-            </a:r>
-          </a:p>
-        </p:txBody>
-      </p:sp>
-      <p:sp>
-        <p:nvSpPr>
-          <p:cNvPr id="3" name="Content Placeholder 2"/>
-          <p:cNvSpPr>
-            <a:spLocks noGrp="1"/>
-          </p:cNvSpPr>
-          <p:nvPr>
-            <p:ph idx="1"/>
-          </p:nvPr>
-        </p:nvSpPr>
-        <p:spPr/>
-        <p:txBody>
-          <a:bodyPr/>
-          <a:lstStyle/>
-          <a:p>
-            <a:pPr lvl="0" indent="0" marL="0">
-              <a:buNone/>
-            </a:pPr>
-            <a:r>
-              <a:rPr/>
-              <a:t>Analisis ini bertujuan memahami karakteristik data pembangunan wilayah melalui eksplorasi, statistika deskriptif, visualisasi data, identifikasi missing value dan outlier, serta analisis hubungan antar variabel untuk menghasilkan kesimpulan yang dapat dikomunikasikan secara sistematis dalam bentuk laporan ilmiah.</a:t>
-            </a:r>
-          </a:p>
-        </p:txBody>
-      </p:sp>
-    </p:spTree>
-  </p:cSld>
-</p:sld>
-</file>
-
-<file path=ppt/slides/slide4.xml><?xml version="1.0" encoding="utf-8"?>
-<p:sld xmlns:a="http://schemas.openxmlformats.org/drawingml/2006/main" xmlns:r="http://schemas.openxmlformats.org/officeDocument/2006/relationships" xmlns:p="http://schemas.openxmlformats.org/presentationml/2006/main">
-  <p:cSld>
-    <p:spTree>
-      <p:nvGrpSpPr>
-        <p:cNvPr id="1" name=""/>
-        <p:cNvGrpSpPr/>
-        <p:nvPr/>
-      </p:nvGrpSpPr>
-      <p:grpSpPr>
-        <a:xfrm>
-          <a:off x="0" y="0"/>
-          <a:ext cx="0" cy="0"/>
-          <a:chOff x="0" y="0"/>
-          <a:chExt cx="0" cy="0"/>
-        </a:xfrm>
-      </p:grpSpPr>
-      <p:sp>
-        <p:nvSpPr>
-          <p:cNvPr id="2" name="Title 1"/>
-          <p:cNvSpPr>
-            <a:spLocks noGrp="1"/>
-          </p:cNvSpPr>
-          <p:nvPr>
-            <p:ph type="title"/>
-          </p:nvPr>
-        </p:nvSpPr>
-        <p:spPr/>
-        <p:txBody>
-          <a:bodyPr/>
-          <a:lstStyle/>
-          <a:p>
-            <a:pPr lvl="0" indent="0" marL="0">
-              <a:buNone/>
-            </a:pPr>
-            <a:r>
-              <a:rPr/>
-              <a:t>Deskripsi Dataset</a:t>
-            </a:r>
-          </a:p>
-        </p:txBody>
-      </p:sp>
-      <p:sp>
-        <p:nvSpPr>
-          <p:cNvPr id="3" name="Content Placeholder 2"/>
-          <p:cNvSpPr>
-            <a:spLocks noGrp="1"/>
-          </p:cNvSpPr>
-          <p:nvPr>
-            <p:ph idx="1"/>
-          </p:nvPr>
-        </p:nvSpPr>
-        <p:spPr/>
-        <p:txBody>
-          <a:bodyPr/>
-          <a:lstStyle/>
-          <a:p>
-            <a:pPr lvl="0" indent="0" marL="0">
-              <a:buNone/>
-            </a:pPr>
-            <a:r>
-              <a:rPr/>
-              <a:t>Dataset yang digunakan dalam analisis ini adalah </a:t>
-            </a:r>
-            <a:r>
-              <a:rPr i="1"/>
-              <a:t>pembangunan_wilayah_missing_outlier.csv</a:t>
-            </a:r>
-            <a:r>
-              <a:rPr/>
-              <a:t>, yang berisi informasi pembangunan wilayah pada tingkat kabupaten/kota di Indonesia. Variabel yang dianalisis mencakup identitas wilayah (wilayah, provinsi, dan tahun) serta berbagai indikator sosial-ekonomi, seperti PDRB per kapita, kemiskinan, pengangguran, IPM, harapan hidup, rata-rata lama sekolah, akses internet, kondisi jalan, dan akses air bersih. Selain itu, dataset juga memuat informasi kualitas data melalui variabel </a:t>
-            </a:r>
-            <a:r>
-              <a:rPr i="1"/>
-              <a:t>catatan_data</a:t>
-            </a:r>
-            <a:r>
-              <a:rPr/>
-              <a:t> yang menunjukkan keberadaan missing value atau outlier.</a:t>
-            </a:r>
-          </a:p>
-        </p:txBody>
-      </p:sp>
-    </p:spTree>
-  </p:cSld>
-</p:sld>
-</file>
-
-<file path=ppt/slides/slide5.xml><?xml version="1.0" encoding="utf-8"?>
-<p:sld xmlns:a="http://schemas.openxmlformats.org/drawingml/2006/main" xmlns:r="http://schemas.openxmlformats.org/officeDocument/2006/relationships" xmlns:p="http://schemas.openxmlformats.org/presentationml/2006/main">
-  <p:cSld>
-    <p:spTree>
-      <p:nvGrpSpPr>
-        <p:cNvPr id="1" name=""/>
-        <p:cNvGrpSpPr/>
-        <p:nvPr/>
-      </p:nvGrpSpPr>
-      <p:grpSpPr>
-        <a:xfrm>
-          <a:off x="0" y="0"/>
-          <a:ext cx="0" cy="0"/>
-          <a:chOff x="0" y="0"/>
-          <a:chExt cx="0" cy="0"/>
-        </a:xfrm>
-      </p:grpSpPr>
-      <p:sp>
-        <p:nvSpPr>
-          <p:cNvPr id="2" name="Title 1"/>
-          <p:cNvSpPr>
-            <a:spLocks noGrp="1"/>
-          </p:cNvSpPr>
-          <p:nvPr>
-            <p:ph type="title"/>
-          </p:nvPr>
-        </p:nvSpPr>
-        <p:spPr/>
-        <p:txBody>
-          <a:bodyPr/>
-          <a:lstStyle/>
-          <a:p>
-            <a:pPr lvl="0" indent="0" marL="0">
-              <a:buNone/>
-            </a:pPr>
-            <a:r>
-              <a:rPr/>
-              <a:t>Tools</a:t>
-            </a:r>
-          </a:p>
-        </p:txBody>
-      </p:sp>
-    </p:spTree>
-  </p:cSld>
-</p:sld>
-</file>
-
-<file path=ppt/slides/slide6.xml><?xml version="1.0" encoding="utf-8"?>
-<p:sld xmlns:a="http://schemas.openxmlformats.org/drawingml/2006/main" xmlns:r="http://schemas.openxmlformats.org/officeDocument/2006/relationships" xmlns:p="http://schemas.openxmlformats.org/presentationml/2006/main">
-  <p:cSld>
-    <p:spTree>
-      <p:nvGrpSpPr>
-        <p:cNvPr id="1" name=""/>
-        <p:cNvGrpSpPr/>
-        <p:nvPr/>
-      </p:nvGrpSpPr>
-      <p:grpSpPr>
-        <a:xfrm>
-          <a:off x="0" y="0"/>
-          <a:ext cx="0" cy="0"/>
-          <a:chOff x="0" y="0"/>
-          <a:chExt cx="0" cy="0"/>
-        </a:xfrm>
-      </p:grpSpPr>
-      <p:sp>
-        <p:nvSpPr>
-          <p:cNvPr id="2" name="Title 1"/>
-          <p:cNvSpPr>
-            <a:spLocks noGrp="1"/>
-          </p:cNvSpPr>
-          <p:nvPr>
-            <p:ph type="title"/>
-          </p:nvPr>
-        </p:nvSpPr>
-        <p:spPr/>
-        <p:txBody>
-          <a:bodyPr/>
-          <a:lstStyle/>
-          <a:p>
-            <a:pPr lvl="0" indent="0" marL="0">
-              <a:buNone/>
-            </a:pPr>
-            <a:r>
-              <a:rPr/>
-              <a:t>Visualisasi</a:t>
-            </a:r>
-          </a:p>
-        </p:txBody>
-      </p:sp>
-      <p:pic>
-        <p:nvPicPr>
           <p:cNvPr descr="images/BarPlotJumlahLaporanProvinsi.png" id="0" name="Picture 1"/>
           <p:cNvPicPr>
             <a:picLocks noGrp="1" noChangeAspect="1"/>
@@ -3595,7 +3251,7 @@
 </p:sld>
 </file>
 
-<file path=ppt/slides/slide7.xml><?xml version="1.0" encoding="utf-8"?>
+<file path=ppt/slides/slide11.xml><?xml version="1.0" encoding="utf-8"?>
 <p:sld xmlns:a="http://schemas.openxmlformats.org/drawingml/2006/main" xmlns:r="http://schemas.openxmlformats.org/officeDocument/2006/relationships" xmlns:p="http://schemas.openxmlformats.org/presentationml/2006/main">
   <p:cSld>
     <p:spTree>
@@ -3672,7 +3328,7 @@
 </p:sld>
 </file>
 
-<file path=ppt/slides/slide8.xml><?xml version="1.0" encoding="utf-8"?>
+<file path=ppt/slides/slide12.xml><?xml version="1.0" encoding="utf-8"?>
 <p:sld xmlns:a="http://schemas.openxmlformats.org/drawingml/2006/main" xmlns:r="http://schemas.openxmlformats.org/officeDocument/2006/relationships" xmlns:p="http://schemas.openxmlformats.org/presentationml/2006/main">
   <p:cSld>
     <p:spTree>
@@ -3749,7 +3405,7 @@
 </p:sld>
 </file>
 
-<file path=ppt/slides/slide9.xml><?xml version="1.0" encoding="utf-8"?>
+<file path=ppt/slides/slide13.xml><?xml version="1.0" encoding="utf-8"?>
 <p:sld xmlns:a="http://schemas.openxmlformats.org/drawingml/2006/main" xmlns:r="http://schemas.openxmlformats.org/officeDocument/2006/relationships" xmlns:p="http://schemas.openxmlformats.org/presentationml/2006/main">
   <p:cSld>
     <p:spTree>
@@ -3821,6 +3477,1539 @@
           </a:ln>
         </p:spPr>
       </p:pic>
+    </p:spTree>
+  </p:cSld>
+</p:sld>
+</file>
+
+<file path=ppt/slides/slide14.xml><?xml version="1.0" encoding="utf-8"?>
+<p:sld xmlns:a="http://schemas.openxmlformats.org/drawingml/2006/main" xmlns:r="http://schemas.openxmlformats.org/officeDocument/2006/relationships" xmlns:p="http://schemas.openxmlformats.org/presentationml/2006/main">
+  <p:cSld>
+    <p:spTree>
+      <p:nvGrpSpPr>
+        <p:cNvPr id="1" name=""/>
+        <p:cNvGrpSpPr/>
+        <p:nvPr/>
+      </p:nvGrpSpPr>
+      <p:grpSpPr>
+        <a:xfrm>
+          <a:off x="0" y="0"/>
+          <a:ext cx="0" cy="0"/>
+          <a:chOff x="0" y="0"/>
+          <a:chExt cx="0" cy="0"/>
+        </a:xfrm>
+      </p:grpSpPr>
+      <p:sp>
+        <p:nvSpPr>
+          <p:cNvPr id="2" name="Title 1"/>
+          <p:cNvSpPr>
+            <a:spLocks noGrp="1"/>
+          </p:cNvSpPr>
+          <p:nvPr>
+            <p:ph type="title"/>
+          </p:nvPr>
+        </p:nvSpPr>
+        <p:spPr/>
+        <p:txBody>
+          <a:bodyPr/>
+          <a:lstStyle/>
+          <a:p>
+            <a:pPr lvl="0" indent="0" marL="0">
+              <a:buNone/>
+            </a:pPr>
+            <a:r>
+              <a:rPr/>
+              <a:t>Visualisasi</a:t>
+            </a:r>
+          </a:p>
+        </p:txBody>
+      </p:sp>
+      <p:pic>
+        <p:nvPicPr>
+          <p:cNvPr descr="images/visualisasi4.png" id="0" name="Picture 1"/>
+          <p:cNvPicPr>
+            <a:picLocks noGrp="1" noChangeAspect="1"/>
+          </p:cNvPicPr>
+          <p:nvPr/>
+        </p:nvPicPr>
+        <p:blipFill>
+          <a:blip r:embed="rId2"/>
+          <a:stretch>
+            <a:fillRect/>
+          </a:stretch>
+        </p:blipFill>
+        <p:spPr bwMode="auto">
+          <a:xfrm>
+            <a:off x="2286000" y="1193800"/>
+            <a:ext cx="4559300" cy="3390900"/>
+          </a:xfrm>
+          <a:prstGeom prst="rect">
+            <a:avLst/>
+          </a:prstGeom>
+          <a:noFill/>
+          <a:ln w="9525">
+            <a:noFill/>
+            <a:headEnd/>
+            <a:tailEnd/>
+          </a:ln>
+        </p:spPr>
+      </p:pic>
+    </p:spTree>
+  </p:cSld>
+</p:sld>
+</file>
+
+<file path=ppt/slides/slide15.xml><?xml version="1.0" encoding="utf-8"?>
+<p:sld xmlns:a="http://schemas.openxmlformats.org/drawingml/2006/main" xmlns:r="http://schemas.openxmlformats.org/officeDocument/2006/relationships" xmlns:p="http://schemas.openxmlformats.org/presentationml/2006/main">
+  <p:cSld>
+    <p:spTree>
+      <p:nvGrpSpPr>
+        <p:cNvPr id="1" name=""/>
+        <p:cNvGrpSpPr/>
+        <p:nvPr/>
+      </p:nvGrpSpPr>
+      <p:grpSpPr>
+        <a:xfrm>
+          <a:off x="0" y="0"/>
+          <a:ext cx="0" cy="0"/>
+          <a:chOff x="0" y="0"/>
+          <a:chExt cx="0" cy="0"/>
+        </a:xfrm>
+      </p:grpSpPr>
+      <p:sp>
+        <p:nvSpPr>
+          <p:cNvPr id="2" name="Title 1"/>
+          <p:cNvSpPr>
+            <a:spLocks noGrp="1"/>
+          </p:cNvSpPr>
+          <p:nvPr>
+            <p:ph type="title"/>
+          </p:nvPr>
+        </p:nvSpPr>
+        <p:spPr/>
+        <p:txBody>
+          <a:bodyPr/>
+          <a:lstStyle/>
+          <a:p>
+            <a:pPr lvl="0" indent="0" marL="0">
+              <a:buNone/>
+            </a:pPr>
+            <a:r>
+              <a:rPr/>
+              <a:t>Distribusi Data</a:t>
+            </a:r>
+          </a:p>
+        </p:txBody>
+      </p:sp>
+      <p:pic>
+        <p:nvPicPr>
+          <p:cNvPr descr="images/Uji%20Normalitas%20Kemiskinan.png" id="0" name="Picture 1"/>
+          <p:cNvPicPr>
+            <a:picLocks noGrp="1" noChangeAspect="1"/>
+          </p:cNvPicPr>
+          <p:nvPr/>
+        </p:nvPicPr>
+        <p:blipFill>
+          <a:blip r:embed="rId2"/>
+          <a:stretch>
+            <a:fillRect/>
+          </a:stretch>
+        </p:blipFill>
+        <p:spPr bwMode="auto">
+          <a:xfrm>
+            <a:off x="3390900" y="1193800"/>
+            <a:ext cx="2374900" cy="3390900"/>
+          </a:xfrm>
+          <a:prstGeom prst="rect">
+            <a:avLst/>
+          </a:prstGeom>
+          <a:noFill/>
+          <a:ln w="9525">
+            <a:noFill/>
+            <a:headEnd/>
+            <a:tailEnd/>
+          </a:ln>
+        </p:spPr>
+      </p:pic>
+    </p:spTree>
+  </p:cSld>
+</p:sld>
+</file>
+
+<file path=ppt/slides/slide16.xml><?xml version="1.0" encoding="utf-8"?>
+<p:sld xmlns:a="http://schemas.openxmlformats.org/drawingml/2006/main" xmlns:r="http://schemas.openxmlformats.org/officeDocument/2006/relationships" xmlns:p="http://schemas.openxmlformats.org/presentationml/2006/main">
+  <p:cSld>
+    <p:spTree>
+      <p:nvGrpSpPr>
+        <p:cNvPr id="1" name=""/>
+        <p:cNvGrpSpPr/>
+        <p:nvPr/>
+      </p:nvGrpSpPr>
+      <p:grpSpPr>
+        <a:xfrm>
+          <a:off x="0" y="0"/>
+          <a:ext cx="0" cy="0"/>
+          <a:chOff x="0" y="0"/>
+          <a:chExt cx="0" cy="0"/>
+        </a:xfrm>
+      </p:grpSpPr>
+      <p:sp>
+        <p:nvSpPr>
+          <p:cNvPr id="2" name="Title 1"/>
+          <p:cNvSpPr>
+            <a:spLocks noGrp="1"/>
+          </p:cNvSpPr>
+          <p:nvPr>
+            <p:ph type="title"/>
+          </p:nvPr>
+        </p:nvSpPr>
+        <p:spPr/>
+        <p:txBody>
+          <a:bodyPr/>
+          <a:lstStyle/>
+          <a:p>
+            <a:pPr lvl="0" indent="0" marL="0">
+              <a:buNone/>
+            </a:pPr>
+            <a:r>
+              <a:rPr/>
+              <a:t>Distribusi Data</a:t>
+            </a:r>
+          </a:p>
+        </p:txBody>
+      </p:sp>
+      <p:pic>
+        <p:nvPicPr>
+          <p:cNvPr descr="images/Perbandingan%20Distribusi%20Peluang%20Kemiskinan.png" id="0" name="Picture 1"/>
+          <p:cNvPicPr>
+            <a:picLocks noGrp="1" noChangeAspect="1"/>
+          </p:cNvPicPr>
+          <p:nvPr/>
+        </p:nvPicPr>
+        <p:blipFill>
+          <a:blip r:embed="rId2"/>
+          <a:stretch>
+            <a:fillRect/>
+          </a:stretch>
+        </p:blipFill>
+        <p:spPr bwMode="auto">
+          <a:xfrm>
+            <a:off x="3390900" y="1193800"/>
+            <a:ext cx="2374900" cy="3390900"/>
+          </a:xfrm>
+          <a:prstGeom prst="rect">
+            <a:avLst/>
+          </a:prstGeom>
+          <a:noFill/>
+          <a:ln w="9525">
+            <a:noFill/>
+            <a:headEnd/>
+            <a:tailEnd/>
+          </a:ln>
+        </p:spPr>
+      </p:pic>
+    </p:spTree>
+  </p:cSld>
+</p:sld>
+</file>
+
+<file path=ppt/slides/slide17.xml><?xml version="1.0" encoding="utf-8"?>
+<p:sld xmlns:a="http://schemas.openxmlformats.org/drawingml/2006/main" xmlns:r="http://schemas.openxmlformats.org/officeDocument/2006/relationships" xmlns:p="http://schemas.openxmlformats.org/presentationml/2006/main">
+  <p:cSld>
+    <p:spTree>
+      <p:nvGrpSpPr>
+        <p:cNvPr id="1" name=""/>
+        <p:cNvGrpSpPr/>
+        <p:nvPr/>
+      </p:nvGrpSpPr>
+      <p:grpSpPr>
+        <a:xfrm>
+          <a:off x="0" y="0"/>
+          <a:ext cx="0" cy="0"/>
+          <a:chOff x="0" y="0"/>
+          <a:chExt cx="0" cy="0"/>
+        </a:xfrm>
+      </p:grpSpPr>
+      <p:sp>
+        <p:nvSpPr>
+          <p:cNvPr id="2" name="Title 1"/>
+          <p:cNvSpPr>
+            <a:spLocks noGrp="1"/>
+          </p:cNvSpPr>
+          <p:nvPr>
+            <p:ph type="title"/>
+          </p:nvPr>
+        </p:nvSpPr>
+        <p:spPr/>
+        <p:txBody>
+          <a:bodyPr/>
+          <a:lstStyle/>
+          <a:p>
+            <a:pPr lvl="0" indent="0" marL="0">
+              <a:buNone/>
+            </a:pPr>
+            <a:r>
+              <a:rPr/>
+              <a:t>Korelasi</a:t>
+            </a:r>
+          </a:p>
+        </p:txBody>
+      </p:sp>
+      <p:pic>
+        <p:nvPicPr>
+          <p:cNvPr descr="images/Korelasi1.PNG" id="0" name="Picture 1"/>
+          <p:cNvPicPr>
+            <a:picLocks noGrp="1" noChangeAspect="1"/>
+          </p:cNvPicPr>
+          <p:nvPr/>
+        </p:nvPicPr>
+        <p:blipFill>
+          <a:blip r:embed="rId2"/>
+          <a:stretch>
+            <a:fillRect/>
+          </a:stretch>
+        </p:blipFill>
+        <p:spPr bwMode="auto">
+          <a:xfrm>
+            <a:off x="457200" y="1244600"/>
+            <a:ext cx="8229600" cy="3289300"/>
+          </a:xfrm>
+          <a:prstGeom prst="rect">
+            <a:avLst/>
+          </a:prstGeom>
+          <a:noFill/>
+          <a:ln w="9525">
+            <a:noFill/>
+            <a:headEnd/>
+            <a:tailEnd/>
+          </a:ln>
+        </p:spPr>
+      </p:pic>
+    </p:spTree>
+  </p:cSld>
+</p:sld>
+</file>
+
+<file path=ppt/slides/slide18.xml><?xml version="1.0" encoding="utf-8"?>
+<p:sld xmlns:a="http://schemas.openxmlformats.org/drawingml/2006/main" xmlns:r="http://schemas.openxmlformats.org/officeDocument/2006/relationships" xmlns:p="http://schemas.openxmlformats.org/presentationml/2006/main">
+  <p:cSld>
+    <p:spTree>
+      <p:nvGrpSpPr>
+        <p:cNvPr id="1" name=""/>
+        <p:cNvGrpSpPr/>
+        <p:nvPr/>
+      </p:nvGrpSpPr>
+      <p:grpSpPr>
+        <a:xfrm>
+          <a:off x="0" y="0"/>
+          <a:ext cx="0" cy="0"/>
+          <a:chOff x="0" y="0"/>
+          <a:chExt cx="0" cy="0"/>
+        </a:xfrm>
+      </p:grpSpPr>
+      <p:sp>
+        <p:nvSpPr>
+          <p:cNvPr id="2" name="Title 1"/>
+          <p:cNvSpPr>
+            <a:spLocks noGrp="1"/>
+          </p:cNvSpPr>
+          <p:nvPr>
+            <p:ph type="title"/>
+          </p:nvPr>
+        </p:nvSpPr>
+        <p:spPr/>
+        <p:txBody>
+          <a:bodyPr/>
+          <a:lstStyle/>
+          <a:p>
+            <a:pPr lvl="0" indent="0" marL="0">
+              <a:buNone/>
+            </a:pPr>
+            <a:r>
+              <a:rPr/>
+              <a:t>Korelasi</a:t>
+            </a:r>
+          </a:p>
+        </p:txBody>
+      </p:sp>
+      <p:pic>
+        <p:nvPicPr>
+          <p:cNvPr descr="images/Korelasi2.PNG" id="0" name="Picture 1"/>
+          <p:cNvPicPr>
+            <a:picLocks noGrp="1" noChangeAspect="1"/>
+          </p:cNvPicPr>
+          <p:nvPr/>
+        </p:nvPicPr>
+        <p:blipFill>
+          <a:blip r:embed="rId2"/>
+          <a:stretch>
+            <a:fillRect/>
+          </a:stretch>
+        </p:blipFill>
+        <p:spPr bwMode="auto">
+          <a:xfrm>
+            <a:off x="457200" y="1676400"/>
+            <a:ext cx="8229600" cy="2425700"/>
+          </a:xfrm>
+          <a:prstGeom prst="rect">
+            <a:avLst/>
+          </a:prstGeom>
+          <a:noFill/>
+          <a:ln w="9525">
+            <a:noFill/>
+            <a:headEnd/>
+            <a:tailEnd/>
+          </a:ln>
+        </p:spPr>
+      </p:pic>
+    </p:spTree>
+  </p:cSld>
+</p:sld>
+</file>
+
+<file path=ppt/slides/slide19.xml><?xml version="1.0" encoding="utf-8"?>
+<p:sld xmlns:a="http://schemas.openxmlformats.org/drawingml/2006/main" xmlns:r="http://schemas.openxmlformats.org/officeDocument/2006/relationships" xmlns:p="http://schemas.openxmlformats.org/presentationml/2006/main">
+  <p:cSld>
+    <p:spTree>
+      <p:nvGrpSpPr>
+        <p:cNvPr id="1" name=""/>
+        <p:cNvGrpSpPr/>
+        <p:nvPr/>
+      </p:nvGrpSpPr>
+      <p:grpSpPr>
+        <a:xfrm>
+          <a:off x="0" y="0"/>
+          <a:ext cx="0" cy="0"/>
+          <a:chOff x="0" y="0"/>
+          <a:chExt cx="0" cy="0"/>
+        </a:xfrm>
+      </p:grpSpPr>
+      <p:sp>
+        <p:nvSpPr>
+          <p:cNvPr id="2" name="Title 1"/>
+          <p:cNvSpPr>
+            <a:spLocks noGrp="1"/>
+          </p:cNvSpPr>
+          <p:nvPr>
+            <p:ph type="title"/>
+          </p:nvPr>
+        </p:nvSpPr>
+        <p:spPr/>
+        <p:txBody>
+          <a:bodyPr/>
+          <a:lstStyle/>
+          <a:p>
+            <a:pPr lvl="0" indent="0" marL="0">
+              <a:buNone/>
+            </a:pPr>
+            <a:r>
+              <a:rPr/>
+              <a:t>Interpretasi</a:t>
+            </a:r>
+          </a:p>
+        </p:txBody>
+      </p:sp>
+      <p:sp>
+        <p:nvSpPr>
+          <p:cNvPr id="3" name="Content Placeholder 2"/>
+          <p:cNvSpPr>
+            <a:spLocks noGrp="1"/>
+          </p:cNvSpPr>
+          <p:nvPr>
+            <p:ph idx="1"/>
+          </p:nvPr>
+        </p:nvSpPr>
+        <p:spPr/>
+        <p:txBody>
+          <a:bodyPr/>
+          <a:lstStyle/>
+          <a:p>
+            <a:pPr lvl="0" indent="0" marL="0">
+              <a:buNone/>
+            </a:pPr>
+            <a:r>
+              <a:rPr/>
+              <a:t>Penjelasan lebih lanjut mengenai korelasi antara variabel kemiskinan dan rata lama sekolah akan dibahas lebih lanjut dibagian interpretasi.</a:t>
+            </a:r>
+          </a:p>
+          <a:p>
+            <a:pPr lvl="0" indent="0" marL="0">
+              <a:buNone/>
+            </a:pPr>
+            <a:r>
+              <a:rPr/>
+              <a:t>H</a:t>
+            </a:r>
+            <a:r>
+              <a:rPr baseline="-25000"/>
+              <a:t>0</a:t>
+            </a:r>
+            <a:r>
+              <a:rPr/>
+              <a:t> = 0 (Nilai korelasi antara kemiskinan dan rata lama sekolah tidak bernilai signifikan dari 0)</a:t>
+            </a:r>
+          </a:p>
+          <a:p>
+            <a:pPr lvl="0" indent="0" marL="0">
+              <a:buNone/>
+            </a:pPr>
+            <a:r>
+              <a:rPr/>
+              <a:t>H</a:t>
+            </a:r>
+            <a:r>
+              <a:rPr baseline="-25000"/>
+              <a:t>1</a:t>
+            </a:r>
+            <a:r>
+              <a:rPr/>
+              <a:t> ≠ 0 (Nilai korelasi antara kemiskinan dan rata lama sekolah bernilai signifikan dari 0)</a:t>
+            </a:r>
+          </a:p>
+          <a:p>
+            <a:pPr lvl="0" indent="0" marL="0">
+              <a:buNone/>
+            </a:pPr>
+            <a:r>
+              <a:rPr/>
+              <a:t>Hasil analisis :</a:t>
+            </a:r>
+          </a:p>
+          <a:p>
+            <a:pPr lvl="0" indent="0" marL="0">
+              <a:buNone/>
+            </a:pPr>
+            <a:r>
+              <a:rPr/>
+              <a:t>Nilai p-value melebih dari nilai yang ditentukan yaitu 0.05 (5%) sehingga bisa dinyatakan bahwa kita gagal menolak pernyataan H</a:t>
+            </a:r>
+            <a:r>
+              <a:rPr baseline="-25000"/>
+              <a:t>0.</a:t>
+            </a:r>
+            <a:r>
+              <a:rPr/>
+              <a:t> tidak terdapat cukup bukti untuk menyatakan adanya pengaruh signifikan antara variabel </a:t>
+            </a:r>
+            <a:r>
+              <a:rPr b="1"/>
+              <a:t>kemiskinan</a:t>
+            </a:r>
+            <a:r>
+              <a:rPr/>
+              <a:t> dengan </a:t>
+            </a:r>
+            <a:r>
+              <a:rPr b="1"/>
+              <a:t>rata lama sekolah</a:t>
+            </a:r>
+            <a:r>
+              <a:rPr/>
+              <a:t>.</a:t>
+            </a:r>
+          </a:p>
+        </p:txBody>
+      </p:sp>
+    </p:spTree>
+  </p:cSld>
+</p:sld>
+</file>
+
+<file path=ppt/slides/slide2.xml><?xml version="1.0" encoding="utf-8"?>
+<p:sld xmlns:a="http://schemas.openxmlformats.org/drawingml/2006/main" xmlns:r="http://schemas.openxmlformats.org/officeDocument/2006/relationships" xmlns:p="http://schemas.openxmlformats.org/presentationml/2006/main">
+  <p:cSld>
+    <p:spTree>
+      <p:nvGrpSpPr>
+        <p:cNvPr id="1" name=""/>
+        <p:cNvGrpSpPr/>
+        <p:nvPr/>
+      </p:nvGrpSpPr>
+      <p:grpSpPr>
+        <a:xfrm>
+          <a:off x="0" y="0"/>
+          <a:ext cx="0" cy="0"/>
+          <a:chOff x="0" y="0"/>
+          <a:chExt cx="0" cy="0"/>
+        </a:xfrm>
+      </p:grpSpPr>
+      <p:sp>
+        <p:nvSpPr>
+          <p:cNvPr id="2" name="Title 1"/>
+          <p:cNvSpPr>
+            <a:spLocks noGrp="1"/>
+          </p:cNvSpPr>
+          <p:nvPr>
+            <p:ph type="title"/>
+          </p:nvPr>
+        </p:nvSpPr>
+        <p:spPr/>
+        <p:txBody>
+          <a:bodyPr/>
+          <a:lstStyle/>
+          <a:p>
+            <a:pPr lvl="0" indent="0" marL="0">
+              <a:buNone/>
+            </a:pPr>
+            <a:r>
+              <a:rPr/>
+              <a:t>Latar belakang</a:t>
+            </a:r>
+          </a:p>
+        </p:txBody>
+      </p:sp>
+      <p:sp>
+        <p:nvSpPr>
+          <p:cNvPr id="3" name="Content Placeholder 2"/>
+          <p:cNvSpPr>
+            <a:spLocks noGrp="1"/>
+          </p:cNvSpPr>
+          <p:nvPr>
+            <p:ph idx="1"/>
+          </p:nvPr>
+        </p:nvSpPr>
+        <p:spPr/>
+        <p:txBody>
+          <a:bodyPr/>
+          <a:lstStyle/>
+          <a:p>
+            <a:pPr lvl="0" indent="0" marL="0">
+              <a:buNone/>
+            </a:pPr>
+            <a:r>
+              <a:rPr/>
+              <a:t>Kemiskinan merupakan salah satu indikator penting dalam menilai tingkat kesejahteraan masyarakat suatu wilayah. Faktor seperti rata-rata lama sekolah diduga memiliki hubungan dengan persentase kemiskinan. Oleh karena itu, penelitian ini bertujuan menganalisis hubungan kedua faktor tersebut terhadap tingkat kemiskinan menggunakan bahasa pemrograman R.</a:t>
+            </a:r>
+          </a:p>
+        </p:txBody>
+      </p:sp>
+    </p:spTree>
+  </p:cSld>
+</p:sld>
+</file>
+
+<file path=ppt/slides/slide20.xml><?xml version="1.0" encoding="utf-8"?>
+<p:sld xmlns:a="http://schemas.openxmlformats.org/drawingml/2006/main" xmlns:r="http://schemas.openxmlformats.org/officeDocument/2006/relationships" xmlns:p="http://schemas.openxmlformats.org/presentationml/2006/main">
+  <p:cSld>
+    <p:spTree>
+      <p:nvGrpSpPr>
+        <p:cNvPr id="1" name=""/>
+        <p:cNvGrpSpPr/>
+        <p:nvPr/>
+      </p:nvGrpSpPr>
+      <p:grpSpPr>
+        <a:xfrm>
+          <a:off x="0" y="0"/>
+          <a:ext cx="0" cy="0"/>
+          <a:chOff x="0" y="0"/>
+          <a:chExt cx="0" cy="0"/>
+        </a:xfrm>
+      </p:grpSpPr>
+      <p:sp>
+        <p:nvSpPr>
+          <p:cNvPr id="2" name="Title 1"/>
+          <p:cNvSpPr>
+            <a:spLocks noGrp="1"/>
+          </p:cNvSpPr>
+          <p:nvPr>
+            <p:ph type="title"/>
+          </p:nvPr>
+        </p:nvSpPr>
+        <p:spPr/>
+        <p:txBody>
+          <a:bodyPr/>
+          <a:lstStyle/>
+          <a:p>
+            <a:pPr lvl="0" indent="0" marL="0">
+              <a:buNone/>
+            </a:pPr>
+            <a:r>
+              <a:rPr/>
+              <a:t>Kesimpulan Utama</a:t>
+            </a:r>
+          </a:p>
+        </p:txBody>
+      </p:sp>
+      <p:sp>
+        <p:nvSpPr>
+          <p:cNvPr id="3" name="Content Placeholder 2"/>
+          <p:cNvSpPr>
+            <a:spLocks noGrp="1"/>
+          </p:cNvSpPr>
+          <p:nvPr>
+            <p:ph idx="1"/>
+          </p:nvPr>
+        </p:nvSpPr>
+        <p:spPr/>
+        <p:txBody>
+          <a:bodyPr/>
+          <a:lstStyle/>
+          <a:p>
+            <a:pPr lvl="0" indent="0" marL="0">
+              <a:buNone/>
+            </a:pPr>
+            <a:r>
+              <a:rPr/>
+              <a:t>Berdasarkan hasil analisis, dataset pembangunan wilayah mengandung </a:t>
+            </a:r>
+            <a:r>
+              <a:rPr i="1"/>
+              <a:t>missing value</a:t>
+            </a:r>
+            <a:r>
+              <a:rPr/>
+              <a:t> dan </a:t>
+            </a:r>
+            <a:r>
+              <a:rPr i="1"/>
+              <a:t>outlier</a:t>
+            </a:r>
+            <a:r>
+              <a:rPr/>
+              <a:t> yang ditangani menggunakan </a:t>
+            </a:r>
+            <a:r>
+              <a:rPr i="1"/>
+              <a:t>median imputation</a:t>
+            </a:r>
+            <a:r>
+              <a:rPr/>
+              <a:t> dan </a:t>
+            </a:r>
+            <a:r>
+              <a:rPr i="1"/>
+              <a:t>trimming</a:t>
+            </a:r>
+            <a:r>
+              <a:rPr/>
+              <a:t> berbasis IQR. Proses pembersihan data terbukti efektif, ditunjukkan oleh penurunan nilai maksimum kemiskinan dari 67,53% menjadi 25,00% serta distribusi kemiskinan yang menjadi lebih mendekati normal berdasarkan histogram dan Q-Q Plot. Hasil uji korelasi Pearson menunjukkan nilai </a:t>
+            </a:r>
+            <a:r>
+              <a:rPr i="1"/>
+              <a:t>p-value</a:t>
+            </a:r>
+            <a:r>
+              <a:rPr/>
+              <a:t> &gt; 0,05 sehingga tidak terdapat bukti statistik yang cukup untuk menyatakan adanya hubungan signifikan antara tingkat kemiskinan dan rata-rata lama sekolah pada dataset ini.</a:t>
+            </a:r>
+          </a:p>
+        </p:txBody>
+      </p:sp>
+    </p:spTree>
+  </p:cSld>
+</p:sld>
+</file>
+
+<file path=ppt/slides/slide21.xml><?xml version="1.0" encoding="utf-8"?>
+<p:sld xmlns:a="http://schemas.openxmlformats.org/drawingml/2006/main" xmlns:r="http://schemas.openxmlformats.org/officeDocument/2006/relationships" xmlns:p="http://schemas.openxmlformats.org/presentationml/2006/main">
+  <p:cSld>
+    <p:spTree>
+      <p:nvGrpSpPr>
+        <p:cNvPr id="1" name=""/>
+        <p:cNvGrpSpPr/>
+        <p:nvPr/>
+      </p:nvGrpSpPr>
+      <p:grpSpPr>
+        <a:xfrm>
+          <a:off x="0" y="0"/>
+          <a:ext cx="0" cy="0"/>
+          <a:chOff x="0" y="0"/>
+          <a:chExt cx="0" cy="0"/>
+        </a:xfrm>
+      </p:grpSpPr>
+      <p:sp>
+        <p:nvSpPr>
+          <p:cNvPr id="2" name="Title 1"/>
+          <p:cNvSpPr>
+            <a:spLocks noGrp="1"/>
+          </p:cNvSpPr>
+          <p:nvPr>
+            <p:ph type="title"/>
+          </p:nvPr>
+        </p:nvSpPr>
+        <p:spPr/>
+        <p:txBody>
+          <a:bodyPr/>
+          <a:lstStyle/>
+          <a:p>
+            <a:pPr lvl="0" indent="0" marL="0">
+              <a:buNone/>
+            </a:pPr>
+            <a:r>
+              <a:rPr/>
+              <a:t>Insight</a:t>
+            </a:r>
+          </a:p>
+        </p:txBody>
+      </p:sp>
+      <p:sp>
+        <p:nvSpPr>
+          <p:cNvPr id="3" name="Content Placeholder 2"/>
+          <p:cNvSpPr>
+            <a:spLocks noGrp="1"/>
+          </p:cNvSpPr>
+          <p:nvPr>
+            <p:ph idx="1"/>
+          </p:nvPr>
+        </p:nvSpPr>
+        <p:spPr/>
+        <p:txBody>
+          <a:bodyPr/>
+          <a:lstStyle/>
+          <a:p>
+            <a:pPr lvl="0" indent="0" marL="0">
+              <a:buNone/>
+            </a:pPr>
+            <a:r>
+              <a:rPr/>
+              <a:t>Hasil analisis menunjukkan masih adanya kesenjangan pembangunan antarwilayah, terutama antara wilayah di Pulau Jawa dan luar Jawa. Keberadaan </a:t>
+            </a:r>
+            <a:r>
+              <a:rPr i="1"/>
+              <a:t>missing value</a:t>
+            </a:r>
+            <a:r>
+              <a:rPr/>
+              <a:t> dan </a:t>
+            </a:r>
+            <a:r>
+              <a:rPr i="1"/>
+              <a:t>outlier</a:t>
+            </a:r>
+            <a:r>
+              <a:rPr/>
+              <a:t> juga menegaskan pentingnya tahap </a:t>
+            </a:r>
+            <a:r>
+              <a:rPr i="1"/>
+              <a:t>data pre-processing</a:t>
+            </a:r>
+            <a:r>
+              <a:rPr/>
+              <a:t> sebelum analisis dilakukan. Meskipun hubungan antara kemiskinan dan rata-rata lama sekolah tidak signifikan secara statistik, arah hubungan yang ditemukan tetap sesuai dengan teori dan mengindikasikan bahwa kemiskinan dipengaruhi oleh berbagai faktor lain, seperti infrastruktur, akses internet, dan layanan kesehatan.</a:t>
+            </a:r>
+          </a:p>
+        </p:txBody>
+      </p:sp>
+    </p:spTree>
+  </p:cSld>
+</p:sld>
+</file>
+
+<file path=ppt/slides/slide22.xml><?xml version="1.0" encoding="utf-8"?>
+<p:sld xmlns:a="http://schemas.openxmlformats.org/drawingml/2006/main" xmlns:r="http://schemas.openxmlformats.org/officeDocument/2006/relationships" xmlns:p="http://schemas.openxmlformats.org/presentationml/2006/main">
+  <p:cSld>
+    <p:spTree>
+      <p:nvGrpSpPr>
+        <p:cNvPr id="1" name=""/>
+        <p:cNvGrpSpPr/>
+        <p:nvPr/>
+      </p:nvGrpSpPr>
+      <p:grpSpPr>
+        <a:xfrm>
+          <a:off x="0" y="0"/>
+          <a:ext cx="0" cy="0"/>
+          <a:chOff x="0" y="0"/>
+          <a:chExt cx="0" cy="0"/>
+        </a:xfrm>
+      </p:grpSpPr>
+      <p:sp>
+        <p:nvSpPr>
+          <p:cNvPr id="2" name="Title 1"/>
+          <p:cNvSpPr>
+            <a:spLocks noGrp="1"/>
+          </p:cNvSpPr>
+          <p:nvPr>
+            <p:ph type="title"/>
+          </p:nvPr>
+        </p:nvSpPr>
+        <p:spPr/>
+        <p:txBody>
+          <a:bodyPr/>
+          <a:lstStyle/>
+          <a:p>
+            <a:pPr lvl="0" indent="0" marL="0">
+              <a:buNone/>
+            </a:pPr>
+            <a:r>
+              <a:rPr/>
+              <a:t>Saran</a:t>
+            </a:r>
+          </a:p>
+        </p:txBody>
+      </p:sp>
+      <p:sp>
+        <p:nvSpPr>
+          <p:cNvPr id="3" name="Content Placeholder 2"/>
+          <p:cNvSpPr>
+            <a:spLocks noGrp="1"/>
+          </p:cNvSpPr>
+          <p:nvPr>
+            <p:ph idx="1"/>
+          </p:nvPr>
+        </p:nvSpPr>
+        <p:spPr/>
+        <p:txBody>
+          <a:bodyPr/>
+          <a:lstStyle/>
+          <a:p>
+            <a:pPr lvl="0" indent="0" marL="0">
+              <a:buNone/>
+            </a:pPr>
+            <a:r>
+              <a:rPr/>
+              <a:t>Pemerintah daerah disarankan untuk meningkatkan investasi pada sektor pendidikan serta memperluas pemerataan infrastruktur, akses internet, dan layanan kesehatan guna mendukung pengurangan tingkat kemiskinan. Untuk penelitian selanjutnya, disarankan menggunakan analisis regresi berganda yang melibatkan lebih banyak variabel agar faktor-faktor yang memengaruhi kemiskinan dapat dijelaskan secara lebih komprehensif.</a:t>
+            </a:r>
+          </a:p>
+        </p:txBody>
+      </p:sp>
+    </p:spTree>
+  </p:cSld>
+</p:sld>
+</file>
+
+<file path=ppt/slides/slide3.xml><?xml version="1.0" encoding="utf-8"?>
+<p:sld xmlns:a="http://schemas.openxmlformats.org/drawingml/2006/main" xmlns:r="http://schemas.openxmlformats.org/officeDocument/2006/relationships" xmlns:p="http://schemas.openxmlformats.org/presentationml/2006/main">
+  <p:cSld>
+    <p:spTree>
+      <p:nvGrpSpPr>
+        <p:cNvPr id="1" name=""/>
+        <p:cNvGrpSpPr/>
+        <p:nvPr/>
+      </p:nvGrpSpPr>
+      <p:grpSpPr>
+        <a:xfrm>
+          <a:off x="0" y="0"/>
+          <a:ext cx="0" cy="0"/>
+          <a:chOff x="0" y="0"/>
+          <a:chExt cx="0" cy="0"/>
+        </a:xfrm>
+      </p:grpSpPr>
+      <p:sp>
+        <p:nvSpPr>
+          <p:cNvPr id="2" name="Title 1"/>
+          <p:cNvSpPr>
+            <a:spLocks noGrp="1"/>
+          </p:cNvSpPr>
+          <p:nvPr>
+            <p:ph type="title"/>
+          </p:nvPr>
+        </p:nvSpPr>
+        <p:spPr/>
+        <p:txBody>
+          <a:bodyPr/>
+          <a:lstStyle/>
+          <a:p>
+            <a:pPr lvl="0" indent="0" marL="0">
+              <a:buNone/>
+            </a:pPr>
+            <a:r>
+              <a:rPr/>
+              <a:t>Tujuan</a:t>
+            </a:r>
+          </a:p>
+        </p:txBody>
+      </p:sp>
+      <p:sp>
+        <p:nvSpPr>
+          <p:cNvPr id="3" name="Content Placeholder 2"/>
+          <p:cNvSpPr>
+            <a:spLocks noGrp="1"/>
+          </p:cNvSpPr>
+          <p:nvPr>
+            <p:ph idx="1"/>
+          </p:nvPr>
+        </p:nvSpPr>
+        <p:spPr/>
+        <p:txBody>
+          <a:bodyPr/>
+          <a:lstStyle/>
+          <a:p>
+            <a:pPr lvl="0" indent="0" marL="0">
+              <a:buNone/>
+            </a:pPr>
+            <a:r>
+              <a:rPr/>
+              <a:t>Analisis ini bertujuan memahami karakteristik data pembangunan wilayah melalui eksplorasi, statistika deskriptif, visualisasi data, identifikasi missing value dan outlier, serta analisis hubungan antar variabel untuk menghasilkan kesimpulan yang dapat dikomunikasikan secara sistematis dalam bentuk laporan ilmiah.</a:t>
+            </a:r>
+          </a:p>
+        </p:txBody>
+      </p:sp>
+    </p:spTree>
+  </p:cSld>
+</p:sld>
+</file>
+
+<file path=ppt/slides/slide4.xml><?xml version="1.0" encoding="utf-8"?>
+<p:sld xmlns:a="http://schemas.openxmlformats.org/drawingml/2006/main" xmlns:r="http://schemas.openxmlformats.org/officeDocument/2006/relationships" xmlns:p="http://schemas.openxmlformats.org/presentationml/2006/main">
+  <p:cSld>
+    <p:spTree>
+      <p:nvGrpSpPr>
+        <p:cNvPr id="1" name=""/>
+        <p:cNvGrpSpPr/>
+        <p:nvPr/>
+      </p:nvGrpSpPr>
+      <p:grpSpPr>
+        <a:xfrm>
+          <a:off x="0" y="0"/>
+          <a:ext cx="0" cy="0"/>
+          <a:chOff x="0" y="0"/>
+          <a:chExt cx="0" cy="0"/>
+        </a:xfrm>
+      </p:grpSpPr>
+      <p:sp>
+        <p:nvSpPr>
+          <p:cNvPr id="2" name="Title 1"/>
+          <p:cNvSpPr>
+            <a:spLocks noGrp="1"/>
+          </p:cNvSpPr>
+          <p:nvPr>
+            <p:ph type="title"/>
+          </p:nvPr>
+        </p:nvSpPr>
+        <p:spPr/>
+        <p:txBody>
+          <a:bodyPr/>
+          <a:lstStyle/>
+          <a:p>
+            <a:pPr lvl="0" indent="0" marL="0">
+              <a:buNone/>
+            </a:pPr>
+            <a:r>
+              <a:rPr/>
+              <a:t>Deskripsi Dataset</a:t>
+            </a:r>
+          </a:p>
+        </p:txBody>
+      </p:sp>
+      <p:sp>
+        <p:nvSpPr>
+          <p:cNvPr id="3" name="Content Placeholder 2"/>
+          <p:cNvSpPr>
+            <a:spLocks noGrp="1"/>
+          </p:cNvSpPr>
+          <p:nvPr>
+            <p:ph idx="1"/>
+          </p:nvPr>
+        </p:nvSpPr>
+        <p:spPr/>
+        <p:txBody>
+          <a:bodyPr/>
+          <a:lstStyle/>
+          <a:p>
+            <a:pPr lvl="0" indent="0" marL="0">
+              <a:buNone/>
+            </a:pPr>
+            <a:r>
+              <a:rPr/>
+              <a:t>Dataset yang digunakan dalam analisis ini adalah </a:t>
+            </a:r>
+            <a:r>
+              <a:rPr i="1"/>
+              <a:t>pembangunan_wilayah_missing_outlier.csv</a:t>
+            </a:r>
+            <a:r>
+              <a:rPr/>
+              <a:t>, yang berisi informasi pembangunan wilayah pada tingkat kabupaten/kota di Indonesia. Variabel yang dianalisis mencakup identitas wilayah (wilayah, provinsi, dan tahun) serta berbagai indikator sosial-ekonomi, seperti PDRB per kapita, kemiskinan, pengangguran, IPM, harapan hidup, rata-rata lama sekolah, akses internet, kondisi jalan, dan akses air bersih. Selain itu, dataset juga memuat informasi kualitas data melalui variabel </a:t>
+            </a:r>
+            <a:r>
+              <a:rPr i="1"/>
+              <a:t>catatan_data</a:t>
+            </a:r>
+            <a:r>
+              <a:rPr/>
+              <a:t> yang menunjukkan keberadaan missing value atau outlier.</a:t>
+            </a:r>
+          </a:p>
+        </p:txBody>
+      </p:sp>
+    </p:spTree>
+  </p:cSld>
+</p:sld>
+</file>
+
+<file path=ppt/slides/slide5.xml><?xml version="1.0" encoding="utf-8"?>
+<p:sld xmlns:a="http://schemas.openxmlformats.org/drawingml/2006/main" xmlns:r="http://schemas.openxmlformats.org/officeDocument/2006/relationships" xmlns:p="http://schemas.openxmlformats.org/presentationml/2006/main">
+  <p:cSld>
+    <p:spTree>
+      <p:nvGrpSpPr>
+        <p:cNvPr id="1" name=""/>
+        <p:cNvGrpSpPr/>
+        <p:nvPr/>
+      </p:nvGrpSpPr>
+      <p:grpSpPr>
+        <a:xfrm>
+          <a:off x="0" y="0"/>
+          <a:ext cx="0" cy="0"/>
+          <a:chOff x="0" y="0"/>
+          <a:chExt cx="0" cy="0"/>
+        </a:xfrm>
+      </p:grpSpPr>
+      <p:sp>
+        <p:nvSpPr>
+          <p:cNvPr id="2" name="Title 1"/>
+          <p:cNvSpPr>
+            <a:spLocks noGrp="1"/>
+          </p:cNvSpPr>
+          <p:nvPr>
+            <p:ph type="title"/>
+          </p:nvPr>
+        </p:nvSpPr>
+        <p:spPr/>
+        <p:txBody>
+          <a:bodyPr/>
+          <a:lstStyle/>
+          <a:p>
+            <a:pPr lvl="0" indent="0" marL="0">
+              <a:buNone/>
+            </a:pPr>
+            <a:r>
+              <a:rPr/>
+              <a:t>Tools</a:t>
+            </a:r>
+          </a:p>
+        </p:txBody>
+      </p:sp>
+      <p:sp>
+        <p:nvSpPr>
+          <p:cNvPr id="3" name="Content Placeholder 2"/>
+          <p:cNvSpPr>
+            <a:spLocks noGrp="1"/>
+          </p:cNvSpPr>
+          <p:nvPr>
+            <p:ph idx="1"/>
+          </p:nvPr>
+        </p:nvSpPr>
+        <p:spPr/>
+        <p:txBody>
+          <a:bodyPr/>
+          <a:lstStyle/>
+          <a:p>
+            <a:pPr lvl="0" indent="0" marL="0">
+              <a:buNone/>
+            </a:pPr>
+            <a:r>
+              <a:rPr/>
+              <a:t>Proyek ini menggunakan bahasa pemrograman R dan RStudio sebagai lingkungan utama untuk analisis data statistik. Pengolahan dan visualisasi data dilakukan dengan bantuan library </a:t>
+            </a:r>
+            <a:r>
+              <a:rPr i="1"/>
+              <a:t>dplyr</a:t>
+            </a:r>
+            <a:r>
+              <a:rPr/>
+              <a:t> untuk manipulasi data serta </a:t>
+            </a:r>
+            <a:r>
+              <a:rPr i="1"/>
+              <a:t>ggplot2</a:t>
+            </a:r>
+            <a:r>
+              <a:rPr/>
+              <a:t> untuk pembuatan grafik dan visualisasi. Selain itu, GitHub digunakan sebagai repositori untuk pengelolaan versi kode dan dokumen secara kolaboratif.</a:t>
+            </a:r>
+          </a:p>
+        </p:txBody>
+      </p:sp>
+    </p:spTree>
+  </p:cSld>
+</p:sld>
+</file>
+
+<file path=ppt/slides/slide6.xml><?xml version="1.0" encoding="utf-8"?>
+<p:sld xmlns:a="http://schemas.openxmlformats.org/drawingml/2006/main" xmlns:r="http://schemas.openxmlformats.org/officeDocument/2006/relationships" xmlns:p="http://schemas.openxmlformats.org/presentationml/2006/main">
+  <p:cSld>
+    <p:spTree>
+      <p:nvGrpSpPr>
+        <p:cNvPr id="1" name=""/>
+        <p:cNvGrpSpPr/>
+        <p:nvPr/>
+      </p:nvGrpSpPr>
+      <p:grpSpPr>
+        <a:xfrm>
+          <a:off x="0" y="0"/>
+          <a:ext cx="0" cy="0"/>
+          <a:chOff x="0" y="0"/>
+          <a:chExt cx="0" cy="0"/>
+        </a:xfrm>
+      </p:grpSpPr>
+      <p:sp>
+        <p:nvSpPr>
+          <p:cNvPr id="2" name="Title 1"/>
+          <p:cNvSpPr>
+            <a:spLocks noGrp="1"/>
+          </p:cNvSpPr>
+          <p:nvPr>
+            <p:ph type="title"/>
+          </p:nvPr>
+        </p:nvSpPr>
+        <p:spPr/>
+        <p:txBody>
+          <a:bodyPr/>
+          <a:lstStyle/>
+          <a:p>
+            <a:pPr lvl="0" indent="0" marL="0">
+              <a:buNone/>
+            </a:pPr>
+            <a:r>
+              <a:rPr/>
+              <a:t>Metode Analisis</a:t>
+            </a:r>
+          </a:p>
+        </p:txBody>
+      </p:sp>
+      <p:sp>
+        <p:nvSpPr>
+          <p:cNvPr id="3" name="Content Placeholder 2"/>
+          <p:cNvSpPr>
+            <a:spLocks noGrp="1"/>
+          </p:cNvSpPr>
+          <p:nvPr>
+            <p:ph idx="1"/>
+          </p:nvPr>
+        </p:nvSpPr>
+        <p:spPr/>
+        <p:txBody>
+          <a:bodyPr/>
+          <a:lstStyle/>
+          <a:p>
+            <a:pPr lvl="0" indent="0" marL="0">
+              <a:buNone/>
+            </a:pPr>
+            <a:r>
+              <a:rPr/>
+              <a:t>Analisis data dilakukan menggunakan bahasa pemrograman R melalui beberapa tahapan, yaitu statistika deskriptif untuk menggambarkan karakteristik data, pra-pemrosesan data yang mencakup penanganan missing value dengan imputasi median dan penghapusan outlier menggunakan metode IQR, serta visualisasi data menggunakan berbagai grafik eksploratif. Selanjutnya, dilakukan analisis korelasi Pearson untuk menguji hubungan antara rata-rata lama sekolah dan tingkat pengangguran terhadap tingkat kemiskinan. Tahap akhir meliputi analisis probabilitas dan distribusi data melalui histogram, kurva densitas, dan Q-Q Plot untuk mengevaluasi pola sebaran data serta asumsi kenormalannya.</a:t>
+            </a:r>
+          </a:p>
+        </p:txBody>
+      </p:sp>
+    </p:spTree>
+  </p:cSld>
+</p:sld>
+</file>
+
+<file path=ppt/slides/slide7.xml><?xml version="1.0" encoding="utf-8"?>
+<p:sld xmlns:a="http://schemas.openxmlformats.org/drawingml/2006/main" xmlns:r="http://schemas.openxmlformats.org/officeDocument/2006/relationships" xmlns:p="http://schemas.openxmlformats.org/presentationml/2006/main">
+  <p:cSld>
+    <p:spTree>
+      <p:nvGrpSpPr>
+        <p:cNvPr id="1" name=""/>
+        <p:cNvGrpSpPr/>
+        <p:nvPr/>
+      </p:nvGrpSpPr>
+      <p:grpSpPr>
+        <a:xfrm>
+          <a:off x="0" y="0"/>
+          <a:ext cx="0" cy="0"/>
+          <a:chOff x="0" y="0"/>
+          <a:chExt cx="0" cy="0"/>
+        </a:xfrm>
+      </p:grpSpPr>
+      <p:sp>
+        <p:nvSpPr>
+          <p:cNvPr id="2" name="Title 1"/>
+          <p:cNvSpPr>
+            <a:spLocks noGrp="1"/>
+          </p:cNvSpPr>
+          <p:nvPr>
+            <p:ph type="title"/>
+          </p:nvPr>
+        </p:nvSpPr>
+        <p:spPr/>
+        <p:txBody>
+          <a:bodyPr/>
+          <a:lstStyle/>
+          <a:p>
+            <a:pPr lvl="0" indent="0" marL="0">
+              <a:buNone/>
+            </a:pPr>
+            <a:r>
+              <a:rPr/>
+              <a:t>Statistika Deskriptif</a:t>
+            </a:r>
+          </a:p>
+        </p:txBody>
+      </p:sp>
+      <p:sp>
+        <p:nvSpPr>
+          <p:cNvPr id="3" name="Content Placeholder 2"/>
+          <p:cNvSpPr>
+            <a:spLocks noGrp="1"/>
+          </p:cNvSpPr>
+          <p:nvPr>
+            <p:ph idx="1"/>
+          </p:nvPr>
+        </p:nvSpPr>
+        <p:spPr/>
+        <p:txBody>
+          <a:bodyPr/>
+          <a:lstStyle/>
+          <a:p>
+            <a:pPr lvl="0" indent="0" marL="0">
+              <a:buNone/>
+            </a:pPr>
+            <a:r>
+              <a:rPr/>
+              <a:t>Analisis statistika deskriptif dilakukan terhadap seluruh variabel numerik dalam dataset dengan menghitung ukuran pemusatan dan penyebaran data, seperti mean, median, minimum, maksimum, kuartil, standar deviasi, dan varians. Hasil analisis menunjukkan bahwa variabel </a:t>
+            </a:r>
+            <a:r>
+              <a:rPr i="1"/>
+              <a:t>pdrb_perkapita</a:t>
+            </a:r>
+            <a:r>
+              <a:rPr/>
+              <a:t> memiliki nilai rata-rata tertinggi, yaitu sebesar 135.650.500, yang menandakan skala nilainya jauh lebih besar dibandingkan variabel lainnya. Variabel ini juga memiliki standar deviasi terbesar (89.341.270) dan varians sebesar 7,98 × 10¹⁵, sehingga menunjukkan adanya variasi yang sangat besar antar wilayah. Selain itu, rentang data yang sangat lebar, yaitu dari 15.031.581 hingga 1.774.545.000, mengindikasikan distribusi data yang tidak sepenuhnya normal serta kemungkinan adanya nilai ekstrem (</a:t>
+            </a:r>
+            <a:r>
+              <a:rPr i="1"/>
+              <a:t>outlier</a:t>
+            </a:r>
+            <a:r>
+              <a:rPr/>
+              <a:t>) yang memengaruhi sebaran data.</a:t>
+            </a:r>
+          </a:p>
+        </p:txBody>
+      </p:sp>
+    </p:spTree>
+  </p:cSld>
+</p:sld>
+</file>
+
+<file path=ppt/slides/slide8.xml><?xml version="1.0" encoding="utf-8"?>
+<p:sld xmlns:a="http://schemas.openxmlformats.org/drawingml/2006/main" xmlns:r="http://schemas.openxmlformats.org/officeDocument/2006/relationships" xmlns:p="http://schemas.openxmlformats.org/presentationml/2006/main">
+  <p:cSld>
+    <p:spTree>
+      <p:nvGrpSpPr>
+        <p:cNvPr id="1" name=""/>
+        <p:cNvGrpSpPr/>
+        <p:nvPr/>
+      </p:nvGrpSpPr>
+      <p:grpSpPr>
+        <a:xfrm>
+          <a:off x="0" y="0"/>
+          <a:ext cx="0" cy="0"/>
+          <a:chOff x="0" y="0"/>
+          <a:chExt cx="0" cy="0"/>
+        </a:xfrm>
+      </p:grpSpPr>
+      <p:sp>
+        <p:nvSpPr>
+          <p:cNvPr id="2" name="Title 1"/>
+          <p:cNvSpPr>
+            <a:spLocks noGrp="1"/>
+          </p:cNvSpPr>
+          <p:nvPr>
+            <p:ph type="title"/>
+          </p:nvPr>
+        </p:nvSpPr>
+        <p:spPr/>
+        <p:txBody>
+          <a:bodyPr/>
+          <a:lstStyle/>
+          <a:p>
+            <a:pPr lvl="0" indent="0" marL="0">
+              <a:buNone/>
+            </a:pPr>
+            <a:r>
+              <a:rPr/>
+              <a:t>Missing Value</a:t>
+            </a:r>
+          </a:p>
+        </p:txBody>
+      </p:sp>
+      <p:sp>
+        <p:nvSpPr>
+          <p:cNvPr id="3" name="Content Placeholder 2"/>
+          <p:cNvSpPr>
+            <a:spLocks noGrp="1"/>
+          </p:cNvSpPr>
+          <p:nvPr>
+            <p:ph idx="1"/>
+          </p:nvPr>
+        </p:nvSpPr>
+        <p:spPr/>
+        <p:txBody>
+          <a:bodyPr/>
+          <a:lstStyle/>
+          <a:p>
+            <a:pPr lvl="0" indent="0" marL="0">
+              <a:buNone/>
+            </a:pPr>
+            <a:r>
+              <a:rPr i="1"/>
+              <a:t>Missing value</a:t>
+            </a:r>
+            <a:r>
+              <a:rPr/>
+              <a:t> merupakan data yang seharusnya diperoleh saat proses pengumpulan data, tetapi tidak tersedia karena berbagai faktor, seperti responden yang tidak menjawab seluruh pertanyaan, kesalahan pengukuran, atau kesalahan pada proses entri data (Kaiser, 2014). Untuk menangani permasalahan tersebut, digunakan metode </a:t>
+            </a:r>
+            <a:r>
+              <a:rPr i="1"/>
+              <a:t>median imputation</a:t>
+            </a:r>
+            <a:r>
+              <a:rPr/>
+              <a:t>, yaitu mengganti nilai yang hilang dengan nilai median dari variabel yang bersangkutan (Alam et al., 2023). Pada dataset yang dianalisis, beberapa variabel mengandung </a:t>
+            </a:r>
+            <a:r>
+              <a:rPr i="1"/>
+              <a:t>missing value</a:t>
+            </a:r>
+            <a:r>
+              <a:rPr/>
+              <a:t>, sehingga dilakukan perhitungan median pada masing-masing variabel dan nilai tersebut digunakan untuk mengisi data yang hilang.</a:t>
+            </a:r>
+          </a:p>
+        </p:txBody>
+      </p:sp>
+    </p:spTree>
+  </p:cSld>
+</p:sld>
+</file>
+
+<file path=ppt/slides/slide9.xml><?xml version="1.0" encoding="utf-8"?>
+<p:sld xmlns:a="http://schemas.openxmlformats.org/drawingml/2006/main" xmlns:r="http://schemas.openxmlformats.org/officeDocument/2006/relationships" xmlns:p="http://schemas.openxmlformats.org/presentationml/2006/main">
+  <p:cSld>
+    <p:spTree>
+      <p:nvGrpSpPr>
+        <p:cNvPr id="1" name=""/>
+        <p:cNvGrpSpPr/>
+        <p:nvPr/>
+      </p:nvGrpSpPr>
+      <p:grpSpPr>
+        <a:xfrm>
+          <a:off x="0" y="0"/>
+          <a:ext cx="0" cy="0"/>
+          <a:chOff x="0" y="0"/>
+          <a:chExt cx="0" cy="0"/>
+        </a:xfrm>
+      </p:grpSpPr>
+      <p:sp>
+        <p:nvSpPr>
+          <p:cNvPr id="2" name="Title 1"/>
+          <p:cNvSpPr>
+            <a:spLocks noGrp="1"/>
+          </p:cNvSpPr>
+          <p:nvPr>
+            <p:ph type="title"/>
+          </p:nvPr>
+        </p:nvSpPr>
+        <p:spPr/>
+        <p:txBody>
+          <a:bodyPr/>
+          <a:lstStyle/>
+          <a:p>
+            <a:pPr lvl="0" indent="0" marL="0">
+              <a:buNone/>
+            </a:pPr>
+            <a:r>
+              <a:rPr/>
+              <a:t>Outlier</a:t>
+            </a:r>
+          </a:p>
+        </p:txBody>
+      </p:sp>
+      <p:sp>
+        <p:nvSpPr>
+          <p:cNvPr id="3" name="Content Placeholder 2"/>
+          <p:cNvSpPr>
+            <a:spLocks noGrp="1"/>
+          </p:cNvSpPr>
+          <p:nvPr>
+            <p:ph idx="1"/>
+          </p:nvPr>
+        </p:nvSpPr>
+        <p:spPr/>
+        <p:txBody>
+          <a:bodyPr/>
+          <a:lstStyle/>
+          <a:p>
+            <a:pPr lvl="0" indent="0" marL="0">
+              <a:buNone/>
+            </a:pPr>
+            <a:r>
+              <a:rPr i="1"/>
+              <a:t>Outlier</a:t>
+            </a:r>
+            <a:r>
+              <a:rPr/>
+              <a:t> merupakan nilai ekstrem yang berada di luar pola distribusi normal suatu variabel (Kwak dan Kim, 2017). Untuk menanganinya, digunakan metode </a:t>
+            </a:r>
+            <a:r>
+              <a:rPr i="1"/>
+              <a:t>trimming</a:t>
+            </a:r>
+            <a:r>
+              <a:rPr/>
+              <a:t>, yaitu menghapus data </a:t>
+            </a:r>
+            <a:r>
+              <a:rPr i="1"/>
+              <a:t>outlier</a:t>
+            </a:r>
+            <a:r>
+              <a:rPr/>
+              <a:t> dari dataset, karena jumlah </a:t>
+            </a:r>
+            <a:r>
+              <a:rPr i="1"/>
+              <a:t>outlier</a:t>
+            </a:r>
+            <a:r>
+              <a:rPr/>
+              <a:t> yang ditemukan relatif sedikit sehingga tidak memberikan pengaruh yang signifikan terhadap keseluruhan data. Pada dataset ini terdapat 15 </a:t>
+            </a:r>
+            <a:r>
+              <a:rPr i="1"/>
+              <a:t>outlier</a:t>
+            </a:r>
+            <a:r>
+              <a:rPr/>
+              <a:t> yang tersebar pada variabel </a:t>
+            </a:r>
+            <a:r>
+              <a:rPr i="1"/>
+              <a:t>pdrb_perkapita</a:t>
+            </a:r>
+            <a:r>
+              <a:rPr/>
+              <a:t>, </a:t>
+            </a:r>
+            <a:r>
+              <a:rPr i="1"/>
+              <a:t>kemiskinan</a:t>
+            </a:r>
+            <a:r>
+              <a:rPr/>
+              <a:t>, dan </a:t>
+            </a:r>
+            <a:r>
+              <a:rPr i="1"/>
+              <a:t>pengangguran</a:t>
+            </a:r>
+            <a:r>
+              <a:rPr/>
+              <a:t> (masing-masing 5 </a:t>
+            </a:r>
+            <a:r>
+              <a:rPr i="1"/>
+              <a:t>outlier</a:t>
+            </a:r>
+            <a:r>
+              <a:rPr/>
+              <a:t>), sehingga setelah proses </a:t>
+            </a:r>
+            <a:r>
+              <a:rPr i="1"/>
+              <a:t>trimming</a:t>
+            </a:r>
+            <a:r>
+              <a:rPr/>
+              <a:t> jumlah observasi berkurang dari 2500 menjadi 2485.</a:t>
+            </a:r>
+          </a:p>
+        </p:txBody>
+      </p:sp>
     </p:spTree>
   </p:cSld>
 </p:sld>

--- a/dokumen/PPT-Laporan.pptx
+++ b/dokumen/PPT-Laporan.pptx
@@ -1,6 +1,6 @@
 
 <file path=ppt/presentation.xml><?xml version="1.0" encoding="utf-8"?>
-<p:presentation xmlns:a="http://schemas.openxmlformats.org/drawingml/2006/main" xmlns:p="http://schemas.openxmlformats.org/presentationml/2006/main" xmlns:r="http://schemas.openxmlformats.org/officeDocument/2006/relationships" autoCompressPictures="0" saveSubsetFonts="1">
+<p:presentation xmlns:a="http://schemas.openxmlformats.org/drawingml/2006/main" xmlns:r="http://schemas.openxmlformats.org/officeDocument/2006/relationships" xmlns:p="http://schemas.openxmlformats.org/presentationml/2006/main" saveSubsetFonts="1" autoCompressPictures="0">
   <p:sldMasterIdLst>
     <p:sldMasterId id="2147483648" r:id="rId1"/>
   </p:sldMasterIdLst>
@@ -34,8 +34,8 @@
     <a:defPPr>
       <a:defRPr lang="en-US"/>
     </a:defPPr>
-    <a:lvl1pPr algn="l" defTabSz="457200" eaLnBrk="1" hangingPunct="1" latinLnBrk="0" marL="0" rtl="0">
-      <a:defRPr kern="1200" sz="1800">
+    <a:lvl1pPr marL="0" algn="l" defTabSz="457200" rtl="0" eaLnBrk="1" latinLnBrk="0" hangingPunct="1">
+      <a:defRPr sz="1800" kern="1200">
         <a:solidFill>
           <a:schemeClr val="tx1"/>
         </a:solidFill>
@@ -44,8 +44,8 @@
         <a:cs typeface="+mn-cs"/>
       </a:defRPr>
     </a:lvl1pPr>
-    <a:lvl2pPr algn="l" defTabSz="457200" eaLnBrk="1" hangingPunct="1" latinLnBrk="0" marL="457200" rtl="0">
-      <a:defRPr kern="1200" sz="1800">
+    <a:lvl2pPr marL="457200" algn="l" defTabSz="457200" rtl="0" eaLnBrk="1" latinLnBrk="0" hangingPunct="1">
+      <a:defRPr sz="1800" kern="1200">
         <a:solidFill>
           <a:schemeClr val="tx1"/>
         </a:solidFill>
@@ -54,8 +54,8 @@
         <a:cs typeface="+mn-cs"/>
       </a:defRPr>
     </a:lvl2pPr>
-    <a:lvl3pPr algn="l" defTabSz="457200" eaLnBrk="1" hangingPunct="1" latinLnBrk="0" marL="914400" rtl="0">
-      <a:defRPr kern="1200" sz="1800">
+    <a:lvl3pPr marL="914400" algn="l" defTabSz="457200" rtl="0" eaLnBrk="1" latinLnBrk="0" hangingPunct="1">
+      <a:defRPr sz="1800" kern="1200">
         <a:solidFill>
           <a:schemeClr val="tx1"/>
         </a:solidFill>
@@ -64,8 +64,8 @@
         <a:cs typeface="+mn-cs"/>
       </a:defRPr>
     </a:lvl3pPr>
-    <a:lvl4pPr algn="l" defTabSz="457200" eaLnBrk="1" hangingPunct="1" latinLnBrk="0" marL="1371600" rtl="0">
-      <a:defRPr kern="1200" sz="1800">
+    <a:lvl4pPr marL="1371600" algn="l" defTabSz="457200" rtl="0" eaLnBrk="1" latinLnBrk="0" hangingPunct="1">
+      <a:defRPr sz="1800" kern="1200">
         <a:solidFill>
           <a:schemeClr val="tx1"/>
         </a:solidFill>
@@ -74,8 +74,8 @@
         <a:cs typeface="+mn-cs"/>
       </a:defRPr>
     </a:lvl4pPr>
-    <a:lvl5pPr algn="l" defTabSz="457200" eaLnBrk="1" hangingPunct="1" latinLnBrk="0" marL="1828800" rtl="0">
-      <a:defRPr kern="1200" sz="1800">
+    <a:lvl5pPr marL="1828800" algn="l" defTabSz="457200" rtl="0" eaLnBrk="1" latinLnBrk="0" hangingPunct="1">
+      <a:defRPr sz="1800" kern="1200">
         <a:solidFill>
           <a:schemeClr val="tx1"/>
         </a:solidFill>
@@ -84,8 +84,8 @@
         <a:cs typeface="+mn-cs"/>
       </a:defRPr>
     </a:lvl5pPr>
-    <a:lvl6pPr algn="l" defTabSz="457200" eaLnBrk="1" hangingPunct="1" latinLnBrk="0" marL="2286000" rtl="0">
-      <a:defRPr kern="1200" sz="1800">
+    <a:lvl6pPr marL="2286000" algn="l" defTabSz="457200" rtl="0" eaLnBrk="1" latinLnBrk="0" hangingPunct="1">
+      <a:defRPr sz="1800" kern="1200">
         <a:solidFill>
           <a:schemeClr val="tx1"/>
         </a:solidFill>
@@ -94,8 +94,8 @@
         <a:cs typeface="+mn-cs"/>
       </a:defRPr>
     </a:lvl6pPr>
-    <a:lvl7pPr algn="l" defTabSz="457200" eaLnBrk="1" hangingPunct="1" latinLnBrk="0" marL="2743200" rtl="0">
-      <a:defRPr kern="1200" sz="1800">
+    <a:lvl7pPr marL="2743200" algn="l" defTabSz="457200" rtl="0" eaLnBrk="1" latinLnBrk="0" hangingPunct="1">
+      <a:defRPr sz="1800" kern="1200">
         <a:solidFill>
           <a:schemeClr val="tx1"/>
         </a:solidFill>
@@ -104,8 +104,8 @@
         <a:cs typeface="+mn-cs"/>
       </a:defRPr>
     </a:lvl7pPr>
-    <a:lvl8pPr algn="l" defTabSz="457200" eaLnBrk="1" hangingPunct="1" latinLnBrk="0" marL="3200400" rtl="0">
-      <a:defRPr kern="1200" sz="1800">
+    <a:lvl8pPr marL="3200400" algn="l" defTabSz="457200" rtl="0" eaLnBrk="1" latinLnBrk="0" hangingPunct="1">
+      <a:defRPr sz="1800" kern="1200">
         <a:solidFill>
           <a:schemeClr val="tx1"/>
         </a:solidFill>
@@ -114,8 +114,8 @@
         <a:cs typeface="+mn-cs"/>
       </a:defRPr>
     </a:lvl8pPr>
-    <a:lvl9pPr algn="l" defTabSz="457200" eaLnBrk="1" hangingPunct="1" latinLnBrk="0" marL="3657600" rtl="0">
-      <a:defRPr kern="1200" sz="1800">
+    <a:lvl9pPr marL="3657600" algn="l" defTabSz="457200" rtl="0" eaLnBrk="1" latinLnBrk="0" hangingPunct="1">
+      <a:defRPr sz="1800" kern="1200">
         <a:solidFill>
           <a:schemeClr val="tx1"/>
         </a:solidFill>
@@ -323,7 +323,7 @@
           <a:p>
             <a:fld id="{241EB5C9-1307-BA42-ABA2-0BC069CD8E7F}" type="datetimeFigureOut">
               <a:rPr lang="en-US" smtClean="0"/>
-              <a:t>1/2/22</a:t>
+              <a:t>6/8/2026</a:t>
             </a:fld>
             <a:endParaRPr lang="en-US"/>
           </a:p>
@@ -491,7 +491,7 @@
           <a:p>
             <a:fld id="{241EB5C9-1307-BA42-ABA2-0BC069CD8E7F}" type="datetimeFigureOut">
               <a:rPr lang="en-US" smtClean="0"/>
-              <a:t>1/2/22</a:t>
+              <a:t>6/8/2026</a:t>
             </a:fld>
             <a:endParaRPr lang="en-US"/>
           </a:p>
@@ -669,7 +669,7 @@
           <a:p>
             <a:fld id="{241EB5C9-1307-BA42-ABA2-0BC069CD8E7F}" type="datetimeFigureOut">
               <a:rPr lang="en-US" smtClean="0"/>
-              <a:t>1/2/22</a:t>
+              <a:t>6/8/2026</a:t>
             </a:fld>
             <a:endParaRPr lang="en-US"/>
           </a:p>
@@ -837,7 +837,7 @@
           <a:p>
             <a:fld id="{241EB5C9-1307-BA42-ABA2-0BC069CD8E7F}" type="datetimeFigureOut">
               <a:rPr lang="en-US" smtClean="0"/>
-              <a:t>1/2/22</a:t>
+              <a:t>6/8/2026</a:t>
             </a:fld>
             <a:endParaRPr lang="en-US"/>
           </a:p>
@@ -1082,7 +1082,7 @@
           <a:p>
             <a:fld id="{241EB5C9-1307-BA42-ABA2-0BC069CD8E7F}" type="datetimeFigureOut">
               <a:rPr lang="en-US" smtClean="0"/>
-              <a:t>1/2/22</a:t>
+              <a:t>6/8/2026</a:t>
             </a:fld>
             <a:endParaRPr lang="en-US"/>
           </a:p>
@@ -1367,7 +1367,7 @@
           <a:p>
             <a:fld id="{241EB5C9-1307-BA42-ABA2-0BC069CD8E7F}" type="datetimeFigureOut">
               <a:rPr lang="en-US" smtClean="0"/>
-              <a:t>1/2/22</a:t>
+              <a:t>6/8/2026</a:t>
             </a:fld>
             <a:endParaRPr lang="en-US"/>
           </a:p>
@@ -1786,7 +1786,7 @@
           <a:p>
             <a:fld id="{241EB5C9-1307-BA42-ABA2-0BC069CD8E7F}" type="datetimeFigureOut">
               <a:rPr lang="en-US" smtClean="0"/>
-              <a:t>1/2/22</a:t>
+              <a:t>6/8/2026</a:t>
             </a:fld>
             <a:endParaRPr lang="en-US"/>
           </a:p>
@@ -1903,7 +1903,7 @@
           <a:p>
             <a:fld id="{241EB5C9-1307-BA42-ABA2-0BC069CD8E7F}" type="datetimeFigureOut">
               <a:rPr lang="en-US" smtClean="0"/>
-              <a:t>1/2/22</a:t>
+              <a:t>6/8/2026</a:t>
             </a:fld>
             <a:endParaRPr lang="en-US"/>
           </a:p>
@@ -1998,7 +1998,7 @@
           <a:p>
             <a:fld id="{241EB5C9-1307-BA42-ABA2-0BC069CD8E7F}" type="datetimeFigureOut">
               <a:rPr lang="en-US" smtClean="0"/>
-              <a:t>1/2/22</a:t>
+              <a:t>6/8/2026</a:t>
             </a:fld>
             <a:endParaRPr lang="en-US"/>
           </a:p>
@@ -2273,7 +2273,7 @@
           <a:p>
             <a:fld id="{241EB5C9-1307-BA42-ABA2-0BC069CD8E7F}" type="datetimeFigureOut">
               <a:rPr lang="en-US" smtClean="0"/>
-              <a:t>1/2/22</a:t>
+              <a:t>6/8/2026</a:t>
             </a:fld>
             <a:endParaRPr lang="en-US"/>
           </a:p>
@@ -2525,7 +2525,7 @@
           <a:p>
             <a:fld id="{241EB5C9-1307-BA42-ABA2-0BC069CD8E7F}" type="datetimeFigureOut">
               <a:rPr lang="en-US" smtClean="0"/>
-              <a:t>1/2/22</a:t>
+              <a:t>6/8/2026</a:t>
             </a:fld>
             <a:endParaRPr lang="en-US"/>
           </a:p>
@@ -2587,7 +2587,7 @@
 </file>
 
 <file path=ppt/slideMasters/slideMaster1.xml><?xml version="1.0" encoding="utf-8"?>
-<p:sldMaster xmlns:a="http://schemas.openxmlformats.org/drawingml/2006/main" xmlns:p="http://schemas.openxmlformats.org/presentationml/2006/main" xmlns:r="http://schemas.openxmlformats.org/officeDocument/2006/relationships">
+<p:sldMaster xmlns:a="http://schemas.openxmlformats.org/drawingml/2006/main" xmlns:r="http://schemas.openxmlformats.org/officeDocument/2006/relationships" xmlns:p="http://schemas.openxmlformats.org/presentationml/2006/main">
   <p:cSld>
     <p:bg>
       <p:bgRef idx="1001">
@@ -2628,7 +2628,7 @@
           </a:prstGeom>
         </p:spPr>
         <p:txBody>
-          <a:bodyPr anchor="ctr" bIns="45720" lIns="91440" rIns="91440" rtlCol="0" tIns="45720" vert="horz">
+          <a:bodyPr vert="horz" lIns="91440" tIns="45720" rIns="91440" bIns="45720" rtlCol="0" anchor="ctr">
             <a:normAutofit/>
           </a:bodyPr>
           <a:lstStyle/>
@@ -2647,7 +2647,7 @@
             <a:spLocks noGrp="1"/>
           </p:cNvSpPr>
           <p:nvPr>
-            <p:ph idx="1" type="body"/>
+            <p:ph type="body" idx="1"/>
           </p:nvPr>
         </p:nvSpPr>
         <p:spPr>
@@ -2660,7 +2660,7 @@
           </a:prstGeom>
         </p:spPr>
         <p:txBody>
-          <a:bodyPr bIns="45720" lIns="91440" rIns="91440" rtlCol="0" tIns="45720" vert="horz">
+          <a:bodyPr vert="horz" lIns="91440" tIns="45720" rIns="91440" bIns="45720" rtlCol="0">
             <a:normAutofit/>
           </a:bodyPr>
           <a:lstStyle/>
@@ -2708,7 +2708,7 @@
             <a:spLocks noGrp="1"/>
           </p:cNvSpPr>
           <p:nvPr>
-            <p:ph idx="2" sz="half" type="dt"/>
+            <p:ph type="dt" sz="half" idx="2"/>
           </p:nvPr>
         </p:nvSpPr>
         <p:spPr>
@@ -2721,7 +2721,7 @@
           </a:prstGeom>
         </p:spPr>
         <p:txBody>
-          <a:bodyPr anchor="ctr" bIns="45720" lIns="91440" rIns="91440" rtlCol="0" tIns="45720" vert="horz"/>
+          <a:bodyPr vert="horz" lIns="91440" tIns="45720" rIns="91440" bIns="45720" rtlCol="0" anchor="ctr"/>
           <a:lstStyle>
             <a:lvl1pPr algn="l">
               <a:defRPr sz="900">
@@ -2736,7 +2736,7 @@
           <a:p>
             <a:fld id="{241EB5C9-1307-BA42-ABA2-0BC069CD8E7F}" type="datetimeFigureOut">
               <a:rPr lang="en-US" smtClean="0"/>
-              <a:t>1/2/22</a:t>
+              <a:t>6/8/2026</a:t>
             </a:fld>
             <a:endParaRPr lang="en-US"/>
           </a:p>
@@ -2749,7 +2749,7 @@
             <a:spLocks noGrp="1"/>
           </p:cNvSpPr>
           <p:nvPr>
-            <p:ph idx="3" sz="quarter" type="ftr"/>
+            <p:ph type="ftr" sz="quarter" idx="3"/>
           </p:nvPr>
         </p:nvSpPr>
         <p:spPr>
@@ -2762,7 +2762,7 @@
           </a:prstGeom>
         </p:spPr>
         <p:txBody>
-          <a:bodyPr anchor="ctr" bIns="45720" lIns="91440" rIns="91440" rtlCol="0" tIns="45720" vert="horz"/>
+          <a:bodyPr vert="horz" lIns="91440" tIns="45720" rIns="91440" bIns="45720" rtlCol="0" anchor="ctr"/>
           <a:lstStyle>
             <a:lvl1pPr algn="ctr">
               <a:defRPr sz="900">
@@ -2786,7 +2786,7 @@
             <a:spLocks noGrp="1"/>
           </p:cNvSpPr>
           <p:nvPr>
-            <p:ph idx="4" sz="quarter" type="sldNum"/>
+            <p:ph type="sldNum" sz="quarter" idx="4"/>
           </p:nvPr>
         </p:nvSpPr>
         <p:spPr>
@@ -2799,7 +2799,7 @@
           </a:prstGeom>
         </p:spPr>
         <p:txBody>
-          <a:bodyPr anchor="ctr" bIns="45720" lIns="91440" rIns="91440" rtlCol="0" tIns="45720" vert="horz"/>
+          <a:bodyPr vert="horz" lIns="91440" tIns="45720" rIns="91440" bIns="45720" rtlCol="0" anchor="ctr"/>
           <a:lstStyle>
             <a:lvl1pPr algn="r">
               <a:defRPr sz="900">
@@ -2827,7 +2827,7 @@
       </p:ext>
     </p:extLst>
   </p:cSld>
-  <p:clrMap accent1="accent1" accent2="accent2" accent3="accent3" accent4="accent4" accent5="accent5" accent6="accent6" bg1="lt1" bg2="lt2" folHlink="folHlink" hlink="hlink" tx1="dk1" tx2="dk2"/>
+  <p:clrMap bg1="lt1" tx1="dk1" bg2="lt2" tx2="dk2" accent1="accent1" accent2="accent2" accent3="accent3" accent4="accent4" accent5="accent5" accent6="accent6" hlink="hlink" folHlink="folHlink"/>
   <p:sldLayoutIdLst>
     <p:sldLayoutId id="2147483649" r:id="rId1"/>
     <p:sldLayoutId id="2147483650" r:id="rId2"/>
@@ -2843,12 +2843,12 @@
   </p:sldLayoutIdLst>
   <p:txStyles>
     <p:titleStyle>
-      <a:lvl1pPr algn="ctr" defTabSz="342900" eaLnBrk="1" hangingPunct="1" latinLnBrk="0" rtl="0">
+      <a:lvl1pPr algn="ctr" defTabSz="342900" rtl="0" eaLnBrk="1" latinLnBrk="0" hangingPunct="1">
         <a:spcBef>
           <a:spcPct val="0"/>
         </a:spcBef>
         <a:buNone/>
-        <a:defRPr kern="1200" sz="3300">
+        <a:defRPr sz="3300" kern="1200">
           <a:solidFill>
             <a:schemeClr val="tx1"/>
           </a:solidFill>
@@ -2859,13 +2859,13 @@
       </a:lvl1pPr>
     </p:titleStyle>
     <p:bodyStyle>
-      <a:lvl1pPr algn="l" defTabSz="342900" eaLnBrk="1" hangingPunct="1" indent="-342900" latinLnBrk="0" marL="342900" rtl="0">
+      <a:lvl1pPr marL="342900" indent="-342900" algn="l" defTabSz="342900" rtl="0" eaLnBrk="1" latinLnBrk="0" hangingPunct="1">
         <a:spcBef>
           <a:spcPct val="20000"/>
         </a:spcBef>
         <a:buFont typeface="Arial"/>
         <a:buChar char="•"/>
-        <a:defRPr kern="1200" sz="2400">
+        <a:defRPr sz="2400" kern="1200">
           <a:solidFill>
             <a:schemeClr val="tx1"/>
           </a:solidFill>
@@ -2874,13 +2874,13 @@
           <a:cs typeface="+mn-cs"/>
         </a:defRPr>
       </a:lvl1pPr>
-      <a:lvl2pPr algn="l" defTabSz="342900" eaLnBrk="1" hangingPunct="1" indent="-342900" latinLnBrk="0" marL="685800" rtl="0">
+      <a:lvl2pPr marL="685800" indent="-342900" algn="l" defTabSz="342900" rtl="0" eaLnBrk="1" latinLnBrk="0" hangingPunct="1">
         <a:spcBef>
           <a:spcPct val="20000"/>
         </a:spcBef>
         <a:buFont typeface="Arial"/>
         <a:buChar char="–"/>
-        <a:defRPr kern="1200" sz="2100">
+        <a:defRPr sz="2100" kern="1200">
           <a:solidFill>
             <a:schemeClr val="tx1"/>
           </a:solidFill>
@@ -2889,13 +2889,13 @@
           <a:cs typeface="+mn-cs"/>
         </a:defRPr>
       </a:lvl2pPr>
-      <a:lvl3pPr algn="l" defTabSz="342900" eaLnBrk="1" hangingPunct="1" indent="-342900" latinLnBrk="0" marL="1028700" rtl="0">
+      <a:lvl3pPr marL="1028700" indent="-342900" algn="l" defTabSz="342900" rtl="0" eaLnBrk="1" latinLnBrk="0" hangingPunct="1">
         <a:spcBef>
           <a:spcPct val="20000"/>
         </a:spcBef>
         <a:buFont typeface="Arial"/>
         <a:buChar char="•"/>
-        <a:defRPr kern="1200" sz="1800">
+        <a:defRPr sz="1800" kern="1200">
           <a:solidFill>
             <a:schemeClr val="tx1"/>
           </a:solidFill>
@@ -2904,13 +2904,13 @@
           <a:cs typeface="+mn-cs"/>
         </a:defRPr>
       </a:lvl3pPr>
-      <a:lvl4pPr algn="l" defTabSz="342900" eaLnBrk="1" hangingPunct="1" indent="-342900" latinLnBrk="0" marL="1371600" rtl="0">
+      <a:lvl4pPr marL="1371600" indent="-342900" algn="l" defTabSz="342900" rtl="0" eaLnBrk="1" latinLnBrk="0" hangingPunct="1">
         <a:spcBef>
           <a:spcPct val="20000"/>
         </a:spcBef>
         <a:buFont typeface="Arial"/>
         <a:buChar char="–"/>
-        <a:defRPr kern="1200" sz="1500">
+        <a:defRPr sz="1500" kern="1200">
           <a:solidFill>
             <a:schemeClr val="tx1"/>
           </a:solidFill>
@@ -2919,13 +2919,13 @@
           <a:cs typeface="+mn-cs"/>
         </a:defRPr>
       </a:lvl4pPr>
-      <a:lvl5pPr algn="l" defTabSz="342900" eaLnBrk="1" hangingPunct="1" indent="-342900" latinLnBrk="0" marL="1714500" rtl="0">
+      <a:lvl5pPr marL="1714500" indent="-342900" algn="l" defTabSz="342900" rtl="0" eaLnBrk="1" latinLnBrk="0" hangingPunct="1">
         <a:spcBef>
           <a:spcPct val="20000"/>
         </a:spcBef>
         <a:buFont typeface="Arial"/>
         <a:buChar char="»"/>
-        <a:defRPr kern="1200" sz="1500">
+        <a:defRPr sz="1500" kern="1200">
           <a:solidFill>
             <a:schemeClr val="tx1"/>
           </a:solidFill>
@@ -2934,13 +2934,13 @@
           <a:cs typeface="+mn-cs"/>
         </a:defRPr>
       </a:lvl5pPr>
-      <a:lvl6pPr algn="l" defTabSz="342900" eaLnBrk="1" hangingPunct="1" indent="-342900" latinLnBrk="0" marL="2057400" rtl="0">
+      <a:lvl6pPr marL="2057400" indent="-342900" algn="l" defTabSz="342900" rtl="0" eaLnBrk="1" latinLnBrk="0" hangingPunct="1">
         <a:spcBef>
           <a:spcPct val="20000"/>
         </a:spcBef>
         <a:buFont typeface="Arial"/>
         <a:buChar char="•"/>
-        <a:defRPr kern="1200" sz="1500">
+        <a:defRPr sz="1500" kern="1200">
           <a:solidFill>
             <a:schemeClr val="tx1"/>
           </a:solidFill>
@@ -2949,13 +2949,13 @@
           <a:cs typeface="+mn-cs"/>
         </a:defRPr>
       </a:lvl6pPr>
-      <a:lvl7pPr algn="l" defTabSz="342900" eaLnBrk="1" hangingPunct="1" indent="-342900" latinLnBrk="0" marL="2400300" rtl="0">
+      <a:lvl7pPr marL="2400300" indent="-342900" algn="l" defTabSz="342900" rtl="0" eaLnBrk="1" latinLnBrk="0" hangingPunct="1">
         <a:spcBef>
           <a:spcPct val="20000"/>
         </a:spcBef>
         <a:buFont typeface="Arial"/>
         <a:buChar char="•"/>
-        <a:defRPr kern="1200" sz="1500">
+        <a:defRPr sz="1500" kern="1200">
           <a:solidFill>
             <a:schemeClr val="tx1"/>
           </a:solidFill>
@@ -2964,13 +2964,13 @@
           <a:cs typeface="+mn-cs"/>
         </a:defRPr>
       </a:lvl7pPr>
-      <a:lvl8pPr algn="l" defTabSz="342900" eaLnBrk="1" hangingPunct="1" indent="-342900" latinLnBrk="0" marL="2743200" rtl="0">
+      <a:lvl8pPr marL="2743200" indent="-342900" algn="l" defTabSz="342900" rtl="0" eaLnBrk="1" latinLnBrk="0" hangingPunct="1">
         <a:spcBef>
           <a:spcPct val="20000"/>
         </a:spcBef>
         <a:buFont typeface="Arial"/>
         <a:buChar char="•"/>
-        <a:defRPr kern="1200" sz="1500">
+        <a:defRPr sz="1500" kern="1200">
           <a:solidFill>
             <a:schemeClr val="tx1"/>
           </a:solidFill>
@@ -2979,13 +2979,13 @@
           <a:cs typeface="+mn-cs"/>
         </a:defRPr>
       </a:lvl8pPr>
-      <a:lvl9pPr algn="l" defTabSz="342900" eaLnBrk="1" hangingPunct="1" indent="-342900" latinLnBrk="0" marL="3086100" rtl="0">
+      <a:lvl9pPr marL="3086100" indent="-342900" algn="l" defTabSz="342900" rtl="0" eaLnBrk="1" latinLnBrk="0" hangingPunct="1">
         <a:spcBef>
           <a:spcPct val="20000"/>
         </a:spcBef>
         <a:buFont typeface="Arial"/>
         <a:buChar char="•"/>
-        <a:defRPr kern="1200" sz="1500">
+        <a:defRPr sz="1500" kern="1200">
           <a:solidFill>
             <a:schemeClr val="tx1"/>
           </a:solidFill>
@@ -2999,8 +2999,8 @@
       <a:defPPr>
         <a:defRPr lang="en-US"/>
       </a:defPPr>
-      <a:lvl1pPr algn="l" defTabSz="342900" eaLnBrk="1" hangingPunct="1" latinLnBrk="0" marL="0" rtl="0">
-        <a:defRPr kern="1200" sz="1350">
+      <a:lvl1pPr marL="0" algn="l" defTabSz="342900" rtl="0" eaLnBrk="1" latinLnBrk="0" hangingPunct="1">
+        <a:defRPr sz="1350" kern="1200">
           <a:solidFill>
             <a:schemeClr val="tx1"/>
           </a:solidFill>
@@ -3009,8 +3009,8 @@
           <a:cs typeface="+mn-cs"/>
         </a:defRPr>
       </a:lvl1pPr>
-      <a:lvl2pPr algn="l" defTabSz="342900" eaLnBrk="1" hangingPunct="1" latinLnBrk="0" marL="342900" rtl="0">
-        <a:defRPr kern="1200" sz="1350">
+      <a:lvl2pPr marL="342900" algn="l" defTabSz="342900" rtl="0" eaLnBrk="1" latinLnBrk="0" hangingPunct="1">
+        <a:defRPr sz="1350" kern="1200">
           <a:solidFill>
             <a:schemeClr val="tx1"/>
           </a:solidFill>
@@ -3019,8 +3019,8 @@
           <a:cs typeface="+mn-cs"/>
         </a:defRPr>
       </a:lvl2pPr>
-      <a:lvl3pPr algn="l" defTabSz="342900" eaLnBrk="1" hangingPunct="1" latinLnBrk="0" marL="685800" rtl="0">
-        <a:defRPr kern="1200" sz="1350">
+      <a:lvl3pPr marL="685800" algn="l" defTabSz="342900" rtl="0" eaLnBrk="1" latinLnBrk="0" hangingPunct="1">
+        <a:defRPr sz="1350" kern="1200">
           <a:solidFill>
             <a:schemeClr val="tx1"/>
           </a:solidFill>
@@ -3029,8 +3029,8 @@
           <a:cs typeface="+mn-cs"/>
         </a:defRPr>
       </a:lvl3pPr>
-      <a:lvl4pPr algn="l" defTabSz="342900" eaLnBrk="1" hangingPunct="1" latinLnBrk="0" marL="1028700" rtl="0">
-        <a:defRPr kern="1200" sz="1350">
+      <a:lvl4pPr marL="1028700" algn="l" defTabSz="342900" rtl="0" eaLnBrk="1" latinLnBrk="0" hangingPunct="1">
+        <a:defRPr sz="1350" kern="1200">
           <a:solidFill>
             <a:schemeClr val="tx1"/>
           </a:solidFill>
@@ -3039,8 +3039,8 @@
           <a:cs typeface="+mn-cs"/>
         </a:defRPr>
       </a:lvl4pPr>
-      <a:lvl5pPr algn="l" defTabSz="342900" eaLnBrk="1" hangingPunct="1" latinLnBrk="0" marL="1371600" rtl="0">
-        <a:defRPr kern="1200" sz="1350">
+      <a:lvl5pPr marL="1371600" algn="l" defTabSz="342900" rtl="0" eaLnBrk="1" latinLnBrk="0" hangingPunct="1">
+        <a:defRPr sz="1350" kern="1200">
           <a:solidFill>
             <a:schemeClr val="tx1"/>
           </a:solidFill>
@@ -3049,8 +3049,8 @@
           <a:cs typeface="+mn-cs"/>
         </a:defRPr>
       </a:lvl5pPr>
-      <a:lvl6pPr algn="l" defTabSz="342900" eaLnBrk="1" hangingPunct="1" latinLnBrk="0" marL="1714500" rtl="0">
-        <a:defRPr kern="1200" sz="1350">
+      <a:lvl6pPr marL="1714500" algn="l" defTabSz="342900" rtl="0" eaLnBrk="1" latinLnBrk="0" hangingPunct="1">
+        <a:defRPr sz="1350" kern="1200">
           <a:solidFill>
             <a:schemeClr val="tx1"/>
           </a:solidFill>
@@ -3059,8 +3059,8 @@
           <a:cs typeface="+mn-cs"/>
         </a:defRPr>
       </a:lvl6pPr>
-      <a:lvl7pPr algn="l" defTabSz="342900" eaLnBrk="1" hangingPunct="1" latinLnBrk="0" marL="2057400" rtl="0">
-        <a:defRPr kern="1200" sz="1350">
+      <a:lvl7pPr marL="2057400" algn="l" defTabSz="342900" rtl="0" eaLnBrk="1" latinLnBrk="0" hangingPunct="1">
+        <a:defRPr sz="1350" kern="1200">
           <a:solidFill>
             <a:schemeClr val="tx1"/>
           </a:solidFill>
@@ -3069,8 +3069,8 @@
           <a:cs typeface="+mn-cs"/>
         </a:defRPr>
       </a:lvl7pPr>
-      <a:lvl8pPr algn="l" defTabSz="342900" eaLnBrk="1" hangingPunct="1" latinLnBrk="0" marL="2400300" rtl="0">
-        <a:defRPr kern="1200" sz="1350">
+      <a:lvl8pPr marL="2400300" algn="l" defTabSz="342900" rtl="0" eaLnBrk="1" latinLnBrk="0" hangingPunct="1">
+        <a:defRPr sz="1350" kern="1200">
           <a:solidFill>
             <a:schemeClr val="tx1"/>
           </a:solidFill>
@@ -3079,8 +3079,8 @@
           <a:cs typeface="+mn-cs"/>
         </a:defRPr>
       </a:lvl8pPr>
-      <a:lvl9pPr algn="l" defTabSz="342900" eaLnBrk="1" hangingPunct="1" latinLnBrk="0" marL="2743200" rtl="0">
-        <a:defRPr kern="1200" sz="1350">
+      <a:lvl9pPr marL="2743200" algn="l" defTabSz="342900" rtl="0" eaLnBrk="1" latinLnBrk="0" hangingPunct="1">
+        <a:defRPr sz="1350" kern="1200">
           <a:solidFill>
             <a:schemeClr val="tx1"/>
           </a:solidFill>
@@ -3131,11 +3131,10 @@
           <a:bodyPr/>
           <a:lstStyle/>
           <a:p>
-            <a:pPr lvl="0" indent="0" marL="0">
+            <a:pPr marL="0" lvl="0" indent="0">
               <a:buNone/>
             </a:pPr>
             <a:r>
-              <a:rPr/>
               <a:t>Analisis Pengaruh Kemiskinan dan Rata Lama Sekolah Terhadap Pembanguna Wilayah di Indonesia</a:t>
             </a:r>
           </a:p>
@@ -3148,7 +3147,7 @@
             <a:spLocks noGrp="1"/>
           </p:cNvSpPr>
           <p:nvPr>
-            <p:ph idx="1" type="subTitle"/>
+            <p:ph type="subTitle" idx="1"/>
           </p:nvPr>
         </p:nvSpPr>
         <p:spPr>
@@ -3161,16 +3160,20 @@
           <a:bodyPr/>
           <a:lstStyle/>
           <a:p>
-            <a:pPr lvl="0" indent="0" marL="0">
+            <a:pPr marL="0" lvl="0" indent="0">
               <a:buNone/>
             </a:pPr>
             <a:br/>
             <a:br/>
+            <a:endParaRPr/>
           </a:p>
         </p:txBody>
       </p:sp>
     </p:spTree>
   </p:cSld>
+  <p:clrMapOvr>
+    <a:masterClrMapping/>
+  </p:clrMapOvr>
 </p:sld>
 </file>
 
@@ -3206,11 +3209,10 @@
           <a:bodyPr/>
           <a:lstStyle/>
           <a:p>
-            <a:pPr lvl="0" indent="0" marL="0">
+            <a:pPr marL="0" lvl="0" indent="0">
               <a:buNone/>
             </a:pPr>
             <a:r>
-              <a:rPr/>
               <a:t>Visualisasi</a:t>
             </a:r>
           </a:p>
@@ -3218,7 +3220,7 @@
       </p:sp>
       <p:pic>
         <p:nvPicPr>
-          <p:cNvPr descr="images/BarPlotJumlahLaporanProvinsi.png" id="0" name="Picture 1"/>
+          <p:cNvPr id="3" name="Picture 1" descr="images/BarPlotJumlahLaporanProvinsi.png"/>
           <p:cNvPicPr>
             <a:picLocks noGrp="1" noChangeAspect="1"/>
           </p:cNvPicPr>
@@ -3248,6 +3250,9 @@
       </p:pic>
     </p:spTree>
   </p:cSld>
+  <p:clrMapOvr>
+    <a:masterClrMapping/>
+  </p:clrMapOvr>
 </p:sld>
 </file>
 
@@ -3283,11 +3288,10 @@
           <a:bodyPr/>
           <a:lstStyle/>
           <a:p>
-            <a:pPr lvl="0" indent="0" marL="0">
+            <a:pPr marL="0" lvl="0" indent="0">
               <a:buNone/>
             </a:pPr>
             <a:r>
-              <a:rPr/>
               <a:t>Visualisasi</a:t>
             </a:r>
           </a:p>
@@ -3295,7 +3299,7 @@
       </p:sp>
       <p:pic>
         <p:nvPicPr>
-          <p:cNvPr descr="images/BarPlotJumlahLaporanTahun.png" id="0" name="Picture 1"/>
+          <p:cNvPr id="3" name="Picture 1" descr="images/BarPlotJumlahLaporanTahun.png"/>
           <p:cNvPicPr>
             <a:picLocks noGrp="1" noChangeAspect="1"/>
           </p:cNvPicPr>
@@ -3325,6 +3329,9 @@
       </p:pic>
     </p:spTree>
   </p:cSld>
+  <p:clrMapOvr>
+    <a:masterClrMapping/>
+  </p:clrMapOvr>
 </p:sld>
 </file>
 
@@ -3360,11 +3367,10 @@
           <a:bodyPr/>
           <a:lstStyle/>
           <a:p>
-            <a:pPr lvl="0" indent="0" marL="0">
+            <a:pPr marL="0" lvl="0" indent="0">
               <a:buNone/>
             </a:pPr>
             <a:r>
-              <a:rPr/>
               <a:t>Visualisasi</a:t>
             </a:r>
           </a:p>
@@ -3372,7 +3378,7 @@
       </p:sp>
       <p:pic>
         <p:nvPicPr>
-          <p:cNvPr descr="images/visualisasi2.png" id="0" name="Picture 1"/>
+          <p:cNvPr id="3" name="Picture 1" descr="images/visualisasi2.png"/>
           <p:cNvPicPr>
             <a:picLocks noGrp="1" noChangeAspect="1"/>
           </p:cNvPicPr>
@@ -3402,6 +3408,9 @@
       </p:pic>
     </p:spTree>
   </p:cSld>
+  <p:clrMapOvr>
+    <a:masterClrMapping/>
+  </p:clrMapOvr>
 </p:sld>
 </file>
 
@@ -3437,11 +3446,10 @@
           <a:bodyPr/>
           <a:lstStyle/>
           <a:p>
-            <a:pPr lvl="0" indent="0" marL="0">
+            <a:pPr marL="0" lvl="0" indent="0">
               <a:buNone/>
             </a:pPr>
             <a:r>
-              <a:rPr/>
               <a:t>Visualisasi</a:t>
             </a:r>
           </a:p>
@@ -3449,7 +3457,7 @@
       </p:sp>
       <p:pic>
         <p:nvPicPr>
-          <p:cNvPr descr="images/visualisasi3.png" id="0" name="Picture 1"/>
+          <p:cNvPr id="3" name="Picture 1" descr="images/visualisasi3.png"/>
           <p:cNvPicPr>
             <a:picLocks noGrp="1" noChangeAspect="1"/>
           </p:cNvPicPr>
@@ -3479,6 +3487,9 @@
       </p:pic>
     </p:spTree>
   </p:cSld>
+  <p:clrMapOvr>
+    <a:masterClrMapping/>
+  </p:clrMapOvr>
 </p:sld>
 </file>
 
@@ -3514,11 +3525,10 @@
           <a:bodyPr/>
           <a:lstStyle/>
           <a:p>
-            <a:pPr lvl="0" indent="0" marL="0">
+            <a:pPr marL="0" lvl="0" indent="0">
               <a:buNone/>
             </a:pPr>
             <a:r>
-              <a:rPr/>
               <a:t>Visualisasi</a:t>
             </a:r>
           </a:p>
@@ -3526,7 +3536,7 @@
       </p:sp>
       <p:pic>
         <p:nvPicPr>
-          <p:cNvPr descr="images/visualisasi4.png" id="0" name="Picture 1"/>
+          <p:cNvPr id="3" name="Picture 1" descr="images/visualisasi4.png"/>
           <p:cNvPicPr>
             <a:picLocks noGrp="1" noChangeAspect="1"/>
           </p:cNvPicPr>
@@ -3556,6 +3566,9 @@
       </p:pic>
     </p:spTree>
   </p:cSld>
+  <p:clrMapOvr>
+    <a:masterClrMapping/>
+  </p:clrMapOvr>
 </p:sld>
 </file>
 
@@ -3591,11 +3604,10 @@
           <a:bodyPr/>
           <a:lstStyle/>
           <a:p>
-            <a:pPr lvl="0" indent="0" marL="0">
+            <a:pPr marL="0" lvl="0" indent="0">
               <a:buNone/>
             </a:pPr>
             <a:r>
-              <a:rPr/>
               <a:t>Distribusi Data</a:t>
             </a:r>
           </a:p>
@@ -3603,7 +3615,7 @@
       </p:sp>
       <p:pic>
         <p:nvPicPr>
-          <p:cNvPr descr="images/Uji%20Normalitas%20Kemiskinan.png" id="0" name="Picture 1"/>
+          <p:cNvPr id="3" name="Picture 1" descr="images/Uji%20Normalitas%20Kemiskinan.png"/>
           <p:cNvPicPr>
             <a:picLocks noGrp="1" noChangeAspect="1"/>
           </p:cNvPicPr>
@@ -3633,6 +3645,9 @@
       </p:pic>
     </p:spTree>
   </p:cSld>
+  <p:clrMapOvr>
+    <a:masterClrMapping/>
+  </p:clrMapOvr>
 </p:sld>
 </file>
 
@@ -3668,11 +3683,10 @@
           <a:bodyPr/>
           <a:lstStyle/>
           <a:p>
-            <a:pPr lvl="0" indent="0" marL="0">
+            <a:pPr marL="0" lvl="0" indent="0">
               <a:buNone/>
             </a:pPr>
             <a:r>
-              <a:rPr/>
               <a:t>Distribusi Data</a:t>
             </a:r>
           </a:p>
@@ -3680,7 +3694,7 @@
       </p:sp>
       <p:pic>
         <p:nvPicPr>
-          <p:cNvPr descr="images/Perbandingan%20Distribusi%20Peluang%20Kemiskinan.png" id="0" name="Picture 1"/>
+          <p:cNvPr id="3" name="Picture 1" descr="images/Perbandingan%20Distribusi%20Peluang%20Kemiskinan.png"/>
           <p:cNvPicPr>
             <a:picLocks noGrp="1" noChangeAspect="1"/>
           </p:cNvPicPr>
@@ -3710,6 +3724,9 @@
       </p:pic>
     </p:spTree>
   </p:cSld>
+  <p:clrMapOvr>
+    <a:masterClrMapping/>
+  </p:clrMapOvr>
 </p:sld>
 </file>
 
@@ -3745,11 +3762,10 @@
           <a:bodyPr/>
           <a:lstStyle/>
           <a:p>
-            <a:pPr lvl="0" indent="0" marL="0">
+            <a:pPr marL="0" lvl="0" indent="0">
               <a:buNone/>
             </a:pPr>
             <a:r>
-              <a:rPr/>
               <a:t>Korelasi</a:t>
             </a:r>
           </a:p>
@@ -3757,7 +3773,7 @@
       </p:sp>
       <p:pic>
         <p:nvPicPr>
-          <p:cNvPr descr="images/Korelasi1.PNG" id="0" name="Picture 1"/>
+          <p:cNvPr id="3" name="Picture 1" descr="images/Korelasi1.PNG"/>
           <p:cNvPicPr>
             <a:picLocks noGrp="1" noChangeAspect="1"/>
           </p:cNvPicPr>
@@ -3787,6 +3803,9 @@
       </p:pic>
     </p:spTree>
   </p:cSld>
+  <p:clrMapOvr>
+    <a:masterClrMapping/>
+  </p:clrMapOvr>
 </p:sld>
 </file>
 
@@ -3822,11 +3841,10 @@
           <a:bodyPr/>
           <a:lstStyle/>
           <a:p>
-            <a:pPr lvl="0" indent="0" marL="0">
+            <a:pPr marL="0" lvl="0" indent="0">
               <a:buNone/>
             </a:pPr>
             <a:r>
-              <a:rPr/>
               <a:t>Korelasi</a:t>
             </a:r>
           </a:p>
@@ -3834,7 +3852,7 @@
       </p:sp>
       <p:pic>
         <p:nvPicPr>
-          <p:cNvPr descr="images/Korelasi2.PNG" id="0" name="Picture 1"/>
+          <p:cNvPr id="3" name="Picture 1" descr="images/Korelasi2.PNG"/>
           <p:cNvPicPr>
             <a:picLocks noGrp="1" noChangeAspect="1"/>
           </p:cNvPicPr>
@@ -3864,6 +3882,9 @@
       </p:pic>
     </p:spTree>
   </p:cSld>
+  <p:clrMapOvr>
+    <a:masterClrMapping/>
+  </p:clrMapOvr>
 </p:sld>
 </file>
 
@@ -3899,11 +3920,10 @@
           <a:bodyPr/>
           <a:lstStyle/>
           <a:p>
-            <a:pPr lvl="0" indent="0" marL="0">
+            <a:pPr marL="0" lvl="0" indent="0">
               <a:buNone/>
             </a:pPr>
             <a:r>
-              <a:rPr/>
               <a:t>Interpretasi</a:t>
             </a:r>
           </a:p>
@@ -3921,90 +3941,532 @@
         </p:nvSpPr>
         <p:spPr/>
         <p:txBody>
-          <a:bodyPr/>
-          <a:lstStyle/>
-          <a:p>
-            <a:pPr lvl="0" indent="0" marL="0">
+          <a:bodyPr>
+            <a:normAutofit/>
+          </a:bodyPr>
+          <a:lstStyle/>
+          <a:p>
+            <a:pPr marL="0" lvl="0" indent="0">
               <a:buNone/>
             </a:pPr>
             <a:r>
-              <a:rPr/>
-              <a:t>Penjelasan lebih lanjut mengenai korelasi antara variabel kemiskinan dan rata lama sekolah akan dibahas lebih lanjut dibagian interpretasi.</a:t>
-            </a:r>
-          </a:p>
-          <a:p>
-            <a:pPr lvl="0" indent="0" marL="0">
+              <a:rPr sz="1800" dirty="0" err="1"/>
+              <a:t>Penjelasan</a:t>
+            </a:r>
+            <a:r>
+              <a:rPr sz="1800" dirty="0"/>
+              <a:t> </a:t>
+            </a:r>
+            <a:r>
+              <a:rPr sz="1800" dirty="0" err="1"/>
+              <a:t>lebih</a:t>
+            </a:r>
+            <a:r>
+              <a:rPr sz="1800" dirty="0"/>
+              <a:t> </a:t>
+            </a:r>
+            <a:r>
+              <a:rPr sz="1800" dirty="0" err="1"/>
+              <a:t>lanjut</a:t>
+            </a:r>
+            <a:r>
+              <a:rPr sz="1800" dirty="0"/>
+              <a:t> </a:t>
+            </a:r>
+            <a:r>
+              <a:rPr sz="1800" dirty="0" err="1"/>
+              <a:t>mengenai</a:t>
+            </a:r>
+            <a:r>
+              <a:rPr sz="1800" dirty="0"/>
+              <a:t> </a:t>
+            </a:r>
+            <a:r>
+              <a:rPr sz="1800" dirty="0" err="1"/>
+              <a:t>korelasi</a:t>
+            </a:r>
+            <a:r>
+              <a:rPr sz="1800" dirty="0"/>
+              <a:t> </a:t>
+            </a:r>
+            <a:r>
+              <a:rPr sz="1800" dirty="0" err="1"/>
+              <a:t>antara</a:t>
+            </a:r>
+            <a:r>
+              <a:rPr sz="1800" dirty="0"/>
+              <a:t> </a:t>
+            </a:r>
+            <a:r>
+              <a:rPr sz="1800" dirty="0" err="1"/>
+              <a:t>variabel</a:t>
+            </a:r>
+            <a:r>
+              <a:rPr sz="1800" dirty="0"/>
+              <a:t> </a:t>
+            </a:r>
+            <a:r>
+              <a:rPr sz="1800" dirty="0" err="1"/>
+              <a:t>kemiskinan</a:t>
+            </a:r>
+            <a:r>
+              <a:rPr sz="1800" dirty="0"/>
+              <a:t> dan rata lama </a:t>
+            </a:r>
+            <a:r>
+              <a:rPr sz="1800" dirty="0" err="1"/>
+              <a:t>sekolah</a:t>
+            </a:r>
+            <a:r>
+              <a:rPr sz="1800" dirty="0"/>
+              <a:t> </a:t>
+            </a:r>
+            <a:r>
+              <a:rPr sz="1800" dirty="0" err="1"/>
+              <a:t>akan</a:t>
+            </a:r>
+            <a:r>
+              <a:rPr sz="1800" dirty="0"/>
+              <a:t> </a:t>
+            </a:r>
+            <a:r>
+              <a:rPr sz="1800" dirty="0" err="1"/>
+              <a:t>dibahas</a:t>
+            </a:r>
+            <a:r>
+              <a:rPr sz="1800" dirty="0"/>
+              <a:t> </a:t>
+            </a:r>
+            <a:r>
+              <a:rPr sz="1800" dirty="0" err="1"/>
+              <a:t>lebih</a:t>
+            </a:r>
+            <a:r>
+              <a:rPr sz="1800" dirty="0"/>
+              <a:t> </a:t>
+            </a:r>
+            <a:r>
+              <a:rPr sz="1800" dirty="0" err="1"/>
+              <a:t>lanjut</a:t>
+            </a:r>
+            <a:r>
+              <a:rPr sz="1800" dirty="0"/>
+              <a:t> </a:t>
+            </a:r>
+            <a:r>
+              <a:rPr sz="1800" dirty="0" err="1"/>
+              <a:t>dibagian</a:t>
+            </a:r>
+            <a:r>
+              <a:rPr sz="1800" dirty="0"/>
+              <a:t> </a:t>
+            </a:r>
+            <a:r>
+              <a:rPr sz="1800" dirty="0" err="1"/>
+              <a:t>interpretasi</a:t>
+            </a:r>
+            <a:r>
+              <a:rPr sz="1800" dirty="0"/>
+              <a:t>.</a:t>
+            </a:r>
+          </a:p>
+          <a:p>
+            <a:pPr marL="0" lvl="0" indent="0">
               <a:buNone/>
             </a:pPr>
             <a:r>
-              <a:rPr/>
+              <a:rPr sz="1800" dirty="0"/>
               <a:t>H</a:t>
             </a:r>
             <a:r>
-              <a:rPr baseline="-25000"/>
+              <a:rPr sz="1800" baseline="-25000" dirty="0"/>
               <a:t>0</a:t>
             </a:r>
             <a:r>
-              <a:rPr/>
-              <a:t> = 0 (Nilai korelasi antara kemiskinan dan rata lama sekolah tidak bernilai signifikan dari 0)</a:t>
-            </a:r>
-          </a:p>
-          <a:p>
-            <a:pPr lvl="0" indent="0" marL="0">
+              <a:rPr sz="1800" dirty="0"/>
+              <a:t> = 0 (Nilai </a:t>
+            </a:r>
+            <a:r>
+              <a:rPr sz="1800" dirty="0" err="1"/>
+              <a:t>korelasi</a:t>
+            </a:r>
+            <a:r>
+              <a:rPr sz="1800" dirty="0"/>
+              <a:t> </a:t>
+            </a:r>
+            <a:r>
+              <a:rPr sz="1800" dirty="0" err="1"/>
+              <a:t>antara</a:t>
+            </a:r>
+            <a:r>
+              <a:rPr sz="1800" dirty="0"/>
+              <a:t> </a:t>
+            </a:r>
+            <a:r>
+              <a:rPr sz="1800" dirty="0" err="1"/>
+              <a:t>kemiskinan</a:t>
+            </a:r>
+            <a:r>
+              <a:rPr sz="1800" dirty="0"/>
+              <a:t> dan rata lama </a:t>
+            </a:r>
+            <a:r>
+              <a:rPr sz="1800" dirty="0" err="1"/>
+              <a:t>sekolah</a:t>
+            </a:r>
+            <a:r>
+              <a:rPr sz="1800" dirty="0"/>
+              <a:t> </a:t>
+            </a:r>
+            <a:r>
+              <a:rPr sz="1800" dirty="0" err="1"/>
+              <a:t>tidak</a:t>
+            </a:r>
+            <a:r>
+              <a:rPr sz="1800" dirty="0"/>
+              <a:t> </a:t>
+            </a:r>
+            <a:r>
+              <a:rPr sz="1800" dirty="0" err="1"/>
+              <a:t>bernilai</a:t>
+            </a:r>
+            <a:r>
+              <a:rPr sz="1800" dirty="0"/>
+              <a:t> </a:t>
+            </a:r>
+            <a:r>
+              <a:rPr sz="1800" dirty="0" err="1"/>
+              <a:t>signifikan</a:t>
+            </a:r>
+            <a:r>
+              <a:rPr sz="1800" dirty="0"/>
+              <a:t> </a:t>
+            </a:r>
+            <a:r>
+              <a:rPr sz="1800" dirty="0" err="1"/>
+              <a:t>dari</a:t>
+            </a:r>
+            <a:r>
+              <a:rPr sz="1800" dirty="0"/>
+              <a:t> 0)</a:t>
+            </a:r>
+          </a:p>
+          <a:p>
+            <a:pPr marL="0" lvl="0" indent="0">
               <a:buNone/>
             </a:pPr>
             <a:r>
-              <a:rPr/>
+              <a:rPr sz="1800" dirty="0"/>
               <a:t>H</a:t>
             </a:r>
             <a:r>
-              <a:rPr baseline="-25000"/>
+              <a:rPr sz="1800" baseline="-25000" dirty="0"/>
               <a:t>1</a:t>
             </a:r>
             <a:r>
-              <a:rPr/>
-              <a:t> ≠ 0 (Nilai korelasi antara kemiskinan dan rata lama sekolah bernilai signifikan dari 0)</a:t>
-            </a:r>
-          </a:p>
-          <a:p>
-            <a:pPr lvl="0" indent="0" marL="0">
+              <a:rPr sz="1800" dirty="0"/>
+              <a:t> ≠ 0 (Nilai </a:t>
+            </a:r>
+            <a:r>
+              <a:rPr sz="1800" dirty="0" err="1"/>
+              <a:t>korelasi</a:t>
+            </a:r>
+            <a:r>
+              <a:rPr sz="1800" dirty="0"/>
+              <a:t> </a:t>
+            </a:r>
+            <a:r>
+              <a:rPr sz="1800" dirty="0" err="1"/>
+              <a:t>antara</a:t>
+            </a:r>
+            <a:r>
+              <a:rPr sz="1800" dirty="0"/>
+              <a:t> </a:t>
+            </a:r>
+            <a:r>
+              <a:rPr sz="1800" dirty="0" err="1"/>
+              <a:t>kemiskinan</a:t>
+            </a:r>
+            <a:r>
+              <a:rPr sz="1800" dirty="0"/>
+              <a:t> dan rata lama </a:t>
+            </a:r>
+            <a:r>
+              <a:rPr sz="1800" dirty="0" err="1"/>
+              <a:t>sekolah</a:t>
+            </a:r>
+            <a:r>
+              <a:rPr sz="1800" dirty="0"/>
+              <a:t> </a:t>
+            </a:r>
+            <a:r>
+              <a:rPr sz="1800" dirty="0" err="1"/>
+              <a:t>bernilai</a:t>
+            </a:r>
+            <a:r>
+              <a:rPr sz="1800" dirty="0"/>
+              <a:t> </a:t>
+            </a:r>
+            <a:r>
+              <a:rPr sz="1800" dirty="0" err="1"/>
+              <a:t>signifikan</a:t>
+            </a:r>
+            <a:r>
+              <a:rPr sz="1800" dirty="0"/>
+              <a:t> </a:t>
+            </a:r>
+            <a:r>
+              <a:rPr sz="1800" dirty="0" err="1"/>
+              <a:t>dari</a:t>
+            </a:r>
+            <a:r>
+              <a:rPr sz="1800" dirty="0"/>
+              <a:t> 0)</a:t>
+            </a:r>
+          </a:p>
+          <a:p>
+            <a:pPr marL="0" lvl="0" indent="0">
               <a:buNone/>
             </a:pPr>
             <a:r>
-              <a:rPr/>
-              <a:t>Hasil analisis :</a:t>
-            </a:r>
-          </a:p>
-          <a:p>
-            <a:pPr lvl="0" indent="0" marL="0">
+              <a:rPr sz="1800" dirty="0"/>
+              <a:t>Hasil </a:t>
+            </a:r>
+            <a:r>
+              <a:rPr sz="1800" dirty="0" err="1"/>
+              <a:t>analisis</a:t>
+            </a:r>
+            <a:r>
+              <a:rPr sz="1800" dirty="0"/>
+              <a:t> :</a:t>
+            </a:r>
+          </a:p>
+          <a:p>
+            <a:pPr marL="0" lvl="0" indent="0">
               <a:buNone/>
             </a:pPr>
             <a:r>
-              <a:rPr/>
-              <a:t>Nilai p-value melebih dari nilai yang ditentukan yaitu 0.05 (5%) sehingga bisa dinyatakan bahwa kita gagal menolak pernyataan H</a:t>
-            </a:r>
-            <a:r>
-              <a:rPr baseline="-25000"/>
+              <a:rPr sz="1800" dirty="0"/>
+              <a:t>Nilai p-value </a:t>
+            </a:r>
+            <a:r>
+              <a:rPr sz="1800" dirty="0" err="1"/>
+              <a:t>melebih</a:t>
+            </a:r>
+            <a:r>
+              <a:rPr sz="1800" dirty="0"/>
+              <a:t> </a:t>
+            </a:r>
+            <a:r>
+              <a:rPr sz="1800" dirty="0" err="1"/>
+              <a:t>dari</a:t>
+            </a:r>
+            <a:r>
+              <a:rPr sz="1800" dirty="0"/>
+              <a:t> </a:t>
+            </a:r>
+            <a:r>
+              <a:rPr sz="1800" dirty="0" err="1"/>
+              <a:t>nilai</a:t>
+            </a:r>
+            <a:r>
+              <a:rPr sz="1800" dirty="0"/>
+              <a:t> yang </a:t>
+            </a:r>
+            <a:r>
+              <a:rPr sz="1800" dirty="0" err="1"/>
+              <a:t>ditentukan</a:t>
+            </a:r>
+            <a:r>
+              <a:rPr sz="1800" dirty="0"/>
+              <a:t> </a:t>
+            </a:r>
+            <a:r>
+              <a:rPr sz="1800" dirty="0" err="1"/>
+              <a:t>yaitu</a:t>
+            </a:r>
+            <a:r>
+              <a:rPr sz="1800" dirty="0"/>
+              <a:t> 0.05 (5%) </a:t>
+            </a:r>
+            <a:r>
+              <a:rPr sz="1800" dirty="0" err="1"/>
+              <a:t>sehingga</a:t>
+            </a:r>
+            <a:r>
+              <a:rPr sz="1800" dirty="0"/>
+              <a:t> bisa </a:t>
+            </a:r>
+            <a:r>
+              <a:rPr sz="1800" dirty="0" err="1"/>
+              <a:t>dinyatakan</a:t>
+            </a:r>
+            <a:r>
+              <a:rPr sz="1800" dirty="0"/>
+              <a:t> </a:t>
+            </a:r>
+            <a:r>
+              <a:rPr sz="1800" dirty="0" err="1"/>
+              <a:t>bahwa</a:t>
+            </a:r>
+            <a:r>
+              <a:rPr sz="1800" dirty="0"/>
+              <a:t> </a:t>
+            </a:r>
+            <a:r>
+              <a:rPr sz="1800" dirty="0" err="1"/>
+              <a:t>kita</a:t>
+            </a:r>
+            <a:r>
+              <a:rPr sz="1800" dirty="0"/>
+              <a:t> </a:t>
+            </a:r>
+            <a:r>
+              <a:rPr sz="1800" dirty="0" err="1"/>
+              <a:t>gagal</a:t>
+            </a:r>
+            <a:r>
+              <a:rPr sz="1800" dirty="0"/>
+              <a:t> </a:t>
+            </a:r>
+            <a:r>
+              <a:rPr sz="1800" dirty="0" err="1"/>
+              <a:t>menolak</a:t>
+            </a:r>
+            <a:r>
+              <a:rPr sz="1800" dirty="0"/>
+              <a:t> </a:t>
+            </a:r>
+            <a:r>
+              <a:rPr sz="1800" dirty="0" err="1"/>
+              <a:t>pernyataan</a:t>
+            </a:r>
+            <a:r>
+              <a:rPr sz="1800" dirty="0"/>
+              <a:t> H</a:t>
+            </a:r>
+            <a:r>
+              <a:rPr sz="1800" baseline="-25000" dirty="0"/>
               <a:t>0.</a:t>
             </a:r>
             <a:r>
-              <a:rPr/>
-              <a:t> tidak terdapat cukup bukti untuk menyatakan adanya pengaruh signifikan antara variabel </a:t>
-            </a:r>
-            <a:r>
-              <a:rPr b="1"/>
+              <a:rPr sz="1800" dirty="0"/>
+              <a:t> </a:t>
+            </a:r>
+            <a:r>
+              <a:rPr sz="1800" dirty="0" err="1"/>
+              <a:t>tidak</a:t>
+            </a:r>
+            <a:r>
+              <a:rPr sz="1800" dirty="0"/>
+              <a:t> </a:t>
+            </a:r>
+            <a:r>
+              <a:rPr sz="1800" dirty="0" err="1"/>
+              <a:t>terdapat</a:t>
+            </a:r>
+            <a:r>
+              <a:rPr sz="1800" dirty="0"/>
+              <a:t> </a:t>
+            </a:r>
+            <a:r>
+              <a:rPr sz="1800" dirty="0" err="1"/>
+              <a:t>cukup</a:t>
+            </a:r>
+            <a:r>
+              <a:rPr sz="1800" dirty="0"/>
+              <a:t> </a:t>
+            </a:r>
+            <a:r>
+              <a:rPr sz="1800" dirty="0" err="1"/>
+              <a:t>bukti</a:t>
+            </a:r>
+            <a:r>
+              <a:rPr sz="1800" dirty="0"/>
+              <a:t> </a:t>
+            </a:r>
+            <a:r>
+              <a:rPr sz="1800" dirty="0" err="1"/>
+              <a:t>untuk</a:t>
+            </a:r>
+            <a:r>
+              <a:rPr sz="1800" dirty="0"/>
+              <a:t> </a:t>
+            </a:r>
+            <a:r>
+              <a:rPr sz="1800" dirty="0" err="1"/>
+              <a:t>menyatakan</a:t>
+            </a:r>
+            <a:r>
+              <a:rPr sz="1800" dirty="0"/>
+              <a:t> </a:t>
+            </a:r>
+            <a:r>
+              <a:rPr sz="1800" dirty="0" err="1"/>
+              <a:t>adanya</a:t>
+            </a:r>
+            <a:r>
+              <a:rPr sz="1800" dirty="0"/>
+              <a:t> </a:t>
+            </a:r>
+            <a:r>
+              <a:rPr sz="1800" dirty="0" err="1"/>
+              <a:t>pengaruh</a:t>
+            </a:r>
+            <a:r>
+              <a:rPr sz="1800" dirty="0"/>
+              <a:t> </a:t>
+            </a:r>
+            <a:r>
+              <a:rPr sz="1800" dirty="0" err="1"/>
+              <a:t>signifikan</a:t>
+            </a:r>
+            <a:r>
+              <a:rPr sz="1800" dirty="0"/>
+              <a:t> </a:t>
+            </a:r>
+            <a:r>
+              <a:rPr sz="1800" dirty="0" err="1"/>
+              <a:t>antara</a:t>
+            </a:r>
+            <a:r>
+              <a:rPr sz="1800" dirty="0"/>
+              <a:t> </a:t>
+            </a:r>
+            <a:r>
+              <a:rPr sz="1800" dirty="0" err="1"/>
+              <a:t>variabel</a:t>
+            </a:r>
+            <a:r>
+              <a:rPr sz="1800" dirty="0"/>
+              <a:t> </a:t>
+            </a:r>
+            <a:r>
+              <a:rPr sz="1800" b="1" dirty="0" err="1"/>
               <a:t>kemiskinan</a:t>
             </a:r>
             <a:r>
-              <a:rPr/>
-              <a:t> dengan </a:t>
-            </a:r>
-            <a:r>
-              <a:rPr b="1"/>
-              <a:t>rata lama sekolah</a:t>
-            </a:r>
-            <a:r>
-              <a:rPr/>
+              <a:rPr sz="1800" dirty="0"/>
+              <a:t> </a:t>
+            </a:r>
+            <a:r>
+              <a:rPr sz="1800" dirty="0" err="1"/>
+              <a:t>dengan</a:t>
+            </a:r>
+            <a:r>
+              <a:rPr sz="1800" dirty="0"/>
+              <a:t> </a:t>
+            </a:r>
+            <a:r>
+              <a:rPr sz="1800" b="1" dirty="0"/>
+              <a:t>rata lama </a:t>
+            </a:r>
+            <a:r>
+              <a:rPr sz="1800" b="1" dirty="0" err="1"/>
+              <a:t>sekolah</a:t>
+            </a:r>
+            <a:r>
+              <a:rPr sz="1800" dirty="0"/>
               <a:t>.</a:t>
             </a:r>
           </a:p>
@@ -4012,6 +4474,9 @@
       </p:sp>
     </p:spTree>
   </p:cSld>
+  <p:clrMapOvr>
+    <a:masterClrMapping/>
+  </p:clrMapOvr>
 </p:sld>
 </file>
 
@@ -4047,11 +4512,10 @@
           <a:bodyPr/>
           <a:lstStyle/>
           <a:p>
-            <a:pPr lvl="0" indent="0" marL="0">
+            <a:pPr marL="0" lvl="0" indent="0">
               <a:buNone/>
             </a:pPr>
             <a:r>
-              <a:rPr/>
               <a:t>Latar belakang</a:t>
             </a:r>
           </a:p>
@@ -4072,11 +4536,10 @@
           <a:bodyPr/>
           <a:lstStyle/>
           <a:p>
-            <a:pPr lvl="0" indent="0" marL="0">
+            <a:pPr marL="0" lvl="0" indent="0">
               <a:buNone/>
             </a:pPr>
             <a:r>
-              <a:rPr/>
               <a:t>Kemiskinan merupakan salah satu indikator penting dalam menilai tingkat kesejahteraan masyarakat suatu wilayah. Faktor seperti rata-rata lama sekolah diduga memiliki hubungan dengan persentase kemiskinan. Oleh karena itu, penelitian ini bertujuan menganalisis hubungan kedua faktor tersebut terhadap tingkat kemiskinan menggunakan bahasa pemrograman R.</a:t>
             </a:r>
           </a:p>
@@ -4084,6 +4547,9 @@
       </p:sp>
     </p:spTree>
   </p:cSld>
+  <p:clrMapOvr>
+    <a:masterClrMapping/>
+  </p:clrMapOvr>
 </p:sld>
 </file>
 
@@ -4119,11 +4585,10 @@
           <a:bodyPr/>
           <a:lstStyle/>
           <a:p>
-            <a:pPr lvl="0" indent="0" marL="0">
+            <a:pPr marL="0" lvl="0" indent="0">
               <a:buNone/>
             </a:pPr>
             <a:r>
-              <a:rPr/>
               <a:t>Kesimpulan Utama</a:t>
             </a:r>
           </a:p>
@@ -4141,61 +4606,398 @@
         </p:nvSpPr>
         <p:spPr/>
         <p:txBody>
-          <a:bodyPr/>
-          <a:lstStyle/>
-          <a:p>
-            <a:pPr lvl="0" indent="0" marL="0">
+          <a:bodyPr>
+            <a:noAutofit/>
+          </a:bodyPr>
+          <a:lstStyle/>
+          <a:p>
+            <a:pPr marL="0" lvl="0" indent="0">
               <a:buNone/>
             </a:pPr>
             <a:r>
-              <a:rPr/>
-              <a:t>Berdasarkan hasil analisis, dataset pembangunan wilayah mengandung </a:t>
-            </a:r>
-            <a:r>
-              <a:rPr i="1"/>
+              <a:rPr sz="2000" dirty="0" err="1"/>
+              <a:t>Berdasarkan</a:t>
+            </a:r>
+            <a:r>
+              <a:rPr sz="2000" dirty="0"/>
+              <a:t> hasil </a:t>
+            </a:r>
+            <a:r>
+              <a:rPr sz="2000" dirty="0" err="1"/>
+              <a:t>analisis</a:t>
+            </a:r>
+            <a:r>
+              <a:rPr sz="2000" dirty="0"/>
+              <a:t>, dataset </a:t>
+            </a:r>
+            <a:r>
+              <a:rPr sz="2000" dirty="0" err="1"/>
+              <a:t>pembangunan</a:t>
+            </a:r>
+            <a:r>
+              <a:rPr sz="2000" dirty="0"/>
+              <a:t> wilayah </a:t>
+            </a:r>
+            <a:r>
+              <a:rPr sz="2000" dirty="0" err="1"/>
+              <a:t>mengandung</a:t>
+            </a:r>
+            <a:r>
+              <a:rPr sz="2000" dirty="0"/>
+              <a:t> </a:t>
+            </a:r>
+            <a:r>
+              <a:rPr sz="2000" i="1" dirty="0"/>
               <a:t>missing value</a:t>
             </a:r>
             <a:r>
-              <a:rPr/>
+              <a:rPr sz="2000" dirty="0"/>
               <a:t> dan </a:t>
             </a:r>
             <a:r>
-              <a:rPr i="1"/>
+              <a:rPr sz="2000" i="1" dirty="0"/>
               <a:t>outlier</a:t>
             </a:r>
             <a:r>
-              <a:rPr/>
-              <a:t> yang ditangani menggunakan </a:t>
-            </a:r>
-            <a:r>
-              <a:rPr i="1"/>
+              <a:rPr sz="2000" dirty="0"/>
+              <a:t> yang </a:t>
+            </a:r>
+            <a:r>
+              <a:rPr sz="2000" dirty="0" err="1"/>
+              <a:t>ditangani</a:t>
+            </a:r>
+            <a:r>
+              <a:rPr sz="2000" dirty="0"/>
+              <a:t> </a:t>
+            </a:r>
+            <a:r>
+              <a:rPr sz="2000" dirty="0" err="1"/>
+              <a:t>menggunakan</a:t>
+            </a:r>
+            <a:r>
+              <a:rPr sz="2000" dirty="0"/>
+              <a:t> </a:t>
+            </a:r>
+            <a:r>
+              <a:rPr sz="2000" i="1" dirty="0"/>
               <a:t>median imputation</a:t>
             </a:r>
             <a:r>
-              <a:rPr/>
+              <a:rPr sz="2000" dirty="0"/>
               <a:t> dan </a:t>
             </a:r>
             <a:r>
-              <a:rPr i="1"/>
+              <a:rPr sz="2000" i="1" dirty="0"/>
               <a:t>trimming</a:t>
             </a:r>
             <a:r>
-              <a:rPr/>
-              <a:t> berbasis IQR. Proses pembersihan data terbukti efektif, ditunjukkan oleh penurunan nilai maksimum kemiskinan dari 67,53% menjadi 25,00% serta distribusi kemiskinan yang menjadi lebih mendekati normal berdasarkan histogram dan Q-Q Plot. Hasil uji korelasi Pearson menunjukkan nilai </a:t>
-            </a:r>
-            <a:r>
-              <a:rPr i="1"/>
+              <a:rPr sz="2000" dirty="0"/>
+              <a:t> </a:t>
+            </a:r>
+            <a:r>
+              <a:rPr sz="2000" dirty="0" err="1"/>
+              <a:t>berbasis</a:t>
+            </a:r>
+            <a:r>
+              <a:rPr sz="2000" dirty="0"/>
+              <a:t> IQR. Proses </a:t>
+            </a:r>
+            <a:r>
+              <a:rPr sz="2000" dirty="0" err="1"/>
+              <a:t>pembersihan</a:t>
+            </a:r>
+            <a:r>
+              <a:rPr sz="2000" dirty="0"/>
+              <a:t> data </a:t>
+            </a:r>
+            <a:r>
+              <a:rPr sz="2000" dirty="0" err="1"/>
+              <a:t>terbukti</a:t>
+            </a:r>
+            <a:r>
+              <a:rPr sz="2000" dirty="0"/>
+              <a:t> </a:t>
+            </a:r>
+            <a:r>
+              <a:rPr sz="2000" dirty="0" err="1"/>
+              <a:t>efektif</a:t>
+            </a:r>
+            <a:r>
+              <a:rPr sz="2000" dirty="0"/>
+              <a:t>, </a:t>
+            </a:r>
+            <a:r>
+              <a:rPr sz="2000" dirty="0" err="1"/>
+              <a:t>ditunjukkan</a:t>
+            </a:r>
+            <a:r>
+              <a:rPr sz="2000" dirty="0"/>
+              <a:t> oleh </a:t>
+            </a:r>
+            <a:r>
+              <a:rPr sz="2000" dirty="0" err="1"/>
+              <a:t>penurunan</a:t>
+            </a:r>
+            <a:r>
+              <a:rPr sz="2000" dirty="0"/>
+              <a:t> </a:t>
+            </a:r>
+            <a:r>
+              <a:rPr sz="2000" dirty="0" err="1"/>
+              <a:t>nilai</a:t>
+            </a:r>
+            <a:r>
+              <a:rPr sz="2000" dirty="0"/>
+              <a:t> </a:t>
+            </a:r>
+            <a:r>
+              <a:rPr sz="2000" dirty="0" err="1"/>
+              <a:t>maksimum</a:t>
+            </a:r>
+            <a:r>
+              <a:rPr sz="2000" dirty="0"/>
+              <a:t> </a:t>
+            </a:r>
+            <a:r>
+              <a:rPr sz="2000" dirty="0" err="1"/>
+              <a:t>kemiskinan</a:t>
+            </a:r>
+            <a:r>
+              <a:rPr sz="2000" dirty="0"/>
+              <a:t> </a:t>
+            </a:r>
+            <a:r>
+              <a:rPr sz="2000" dirty="0" err="1"/>
+              <a:t>dari</a:t>
+            </a:r>
+            <a:r>
+              <a:rPr sz="2000" dirty="0"/>
+              <a:t> 67,53% </a:t>
+            </a:r>
+            <a:r>
+              <a:rPr sz="2000" dirty="0" err="1"/>
+              <a:t>menjadi</a:t>
+            </a:r>
+            <a:r>
+              <a:rPr sz="2000" dirty="0"/>
+              <a:t> 25,00% </a:t>
+            </a:r>
+            <a:r>
+              <a:rPr sz="2000" dirty="0" err="1"/>
+              <a:t>serta</a:t>
+            </a:r>
+            <a:r>
+              <a:rPr sz="2000" dirty="0"/>
+              <a:t> </a:t>
+            </a:r>
+            <a:r>
+              <a:rPr sz="2000" dirty="0" err="1"/>
+              <a:t>distribusi</a:t>
+            </a:r>
+            <a:r>
+              <a:rPr sz="2000" dirty="0"/>
+              <a:t> </a:t>
+            </a:r>
+            <a:r>
+              <a:rPr sz="2000" dirty="0" err="1"/>
+              <a:t>kemiskinan</a:t>
+            </a:r>
+            <a:r>
+              <a:rPr sz="2000" dirty="0"/>
+              <a:t> yang </a:t>
+            </a:r>
+            <a:r>
+              <a:rPr sz="2000" dirty="0" err="1"/>
+              <a:t>menjadi</a:t>
+            </a:r>
+            <a:r>
+              <a:rPr sz="2000" dirty="0"/>
+              <a:t> </a:t>
+            </a:r>
+            <a:r>
+              <a:rPr sz="2000" dirty="0" err="1"/>
+              <a:t>lebih</a:t>
+            </a:r>
+            <a:r>
+              <a:rPr sz="2000" dirty="0"/>
+              <a:t> </a:t>
+            </a:r>
+            <a:r>
+              <a:rPr sz="2000" dirty="0" err="1"/>
+              <a:t>mendekati</a:t>
+            </a:r>
+            <a:r>
+              <a:rPr sz="2000" dirty="0"/>
+              <a:t> normal </a:t>
+            </a:r>
+            <a:r>
+              <a:rPr sz="2000" dirty="0" err="1"/>
+              <a:t>berdasarkan</a:t>
+            </a:r>
+            <a:r>
+              <a:rPr sz="2000" dirty="0"/>
+              <a:t> histogram dan Q-Q Plot. Hasil uji </a:t>
+            </a:r>
+            <a:r>
+              <a:rPr sz="2000" dirty="0" err="1"/>
+              <a:t>korelasi</a:t>
+            </a:r>
+            <a:r>
+              <a:rPr sz="2000" dirty="0"/>
+              <a:t> Pearson </a:t>
+            </a:r>
+            <a:r>
+              <a:rPr sz="2000" dirty="0" err="1"/>
+              <a:t>menunjukkan</a:t>
+            </a:r>
+            <a:r>
+              <a:rPr sz="2000" dirty="0"/>
+              <a:t> </a:t>
+            </a:r>
+            <a:r>
+              <a:rPr sz="2000" dirty="0" err="1"/>
+              <a:t>nilai</a:t>
+            </a:r>
+            <a:r>
+              <a:rPr sz="2000" dirty="0"/>
+              <a:t> </a:t>
+            </a:r>
+            <a:r>
+              <a:rPr sz="2000" i="1" dirty="0"/>
               <a:t>p-value</a:t>
             </a:r>
             <a:r>
-              <a:rPr/>
-              <a:t> &gt; 0,05 sehingga tidak terdapat bukti statistik yang cukup untuk menyatakan adanya hubungan signifikan antara tingkat kemiskinan dan rata-rata lama sekolah pada dataset ini.</a:t>
+              <a:rPr sz="2000" dirty="0"/>
+              <a:t> &gt; 0,05 </a:t>
+            </a:r>
+            <a:r>
+              <a:rPr sz="2000" dirty="0" err="1"/>
+              <a:t>sehingga</a:t>
+            </a:r>
+            <a:r>
+              <a:rPr sz="2000" dirty="0"/>
+              <a:t> </a:t>
+            </a:r>
+            <a:r>
+              <a:rPr sz="2000" dirty="0" err="1"/>
+              <a:t>tidak</a:t>
+            </a:r>
+            <a:r>
+              <a:rPr sz="2000" dirty="0"/>
+              <a:t> </a:t>
+            </a:r>
+            <a:r>
+              <a:rPr sz="2000" dirty="0" err="1"/>
+              <a:t>terdapat</a:t>
+            </a:r>
+            <a:r>
+              <a:rPr sz="2000" dirty="0"/>
+              <a:t> </a:t>
+            </a:r>
+            <a:r>
+              <a:rPr sz="2000" dirty="0" err="1"/>
+              <a:t>bukti</a:t>
+            </a:r>
+            <a:r>
+              <a:rPr sz="2000" dirty="0"/>
+              <a:t> </a:t>
+            </a:r>
+            <a:r>
+              <a:rPr sz="2000" dirty="0" err="1"/>
+              <a:t>statistik</a:t>
+            </a:r>
+            <a:r>
+              <a:rPr sz="2000" dirty="0"/>
+              <a:t> yang </a:t>
+            </a:r>
+            <a:r>
+              <a:rPr sz="2000" dirty="0" err="1"/>
+              <a:t>cukup</a:t>
+            </a:r>
+            <a:r>
+              <a:rPr sz="2000" dirty="0"/>
+              <a:t> </a:t>
+            </a:r>
+            <a:r>
+              <a:rPr sz="2000" dirty="0" err="1"/>
+              <a:t>untuk</a:t>
+            </a:r>
+            <a:r>
+              <a:rPr sz="2000" dirty="0"/>
+              <a:t> </a:t>
+            </a:r>
+            <a:r>
+              <a:rPr sz="2000" dirty="0" err="1"/>
+              <a:t>menyatakan</a:t>
+            </a:r>
+            <a:r>
+              <a:rPr sz="2000" dirty="0"/>
+              <a:t> </a:t>
+            </a:r>
+            <a:r>
+              <a:rPr sz="2000" dirty="0" err="1"/>
+              <a:t>adanya</a:t>
+            </a:r>
+            <a:r>
+              <a:rPr sz="2000" dirty="0"/>
+              <a:t> </a:t>
+            </a:r>
+            <a:r>
+              <a:rPr sz="2000" dirty="0" err="1"/>
+              <a:t>hubungan</a:t>
+            </a:r>
+            <a:r>
+              <a:rPr sz="2000" dirty="0"/>
+              <a:t> </a:t>
+            </a:r>
+            <a:r>
+              <a:rPr sz="2000" dirty="0" err="1"/>
+              <a:t>signifikan</a:t>
+            </a:r>
+            <a:r>
+              <a:rPr sz="2000" dirty="0"/>
+              <a:t> </a:t>
+            </a:r>
+            <a:r>
+              <a:rPr sz="2000" dirty="0" err="1"/>
+              <a:t>antara</a:t>
+            </a:r>
+            <a:r>
+              <a:rPr sz="2000" dirty="0"/>
+              <a:t> </a:t>
+            </a:r>
+            <a:r>
+              <a:rPr sz="2000" dirty="0" err="1"/>
+              <a:t>tingkat</a:t>
+            </a:r>
+            <a:r>
+              <a:rPr sz="2000" dirty="0"/>
+              <a:t> </a:t>
+            </a:r>
+            <a:r>
+              <a:rPr sz="2000" dirty="0" err="1"/>
+              <a:t>kemiskinan</a:t>
+            </a:r>
+            <a:r>
+              <a:rPr sz="2000" dirty="0"/>
+              <a:t> dan rata-rata lama </a:t>
+            </a:r>
+            <a:r>
+              <a:rPr sz="2000" dirty="0" err="1"/>
+              <a:t>sekolah</a:t>
+            </a:r>
+            <a:r>
+              <a:rPr sz="2000" dirty="0"/>
+              <a:t> pada dataset ini.</a:t>
             </a:r>
           </a:p>
         </p:txBody>
       </p:sp>
     </p:spTree>
   </p:cSld>
+  <p:clrMapOvr>
+    <a:masterClrMapping/>
+  </p:clrMapOvr>
 </p:sld>
 </file>
 
@@ -4231,11 +5033,10 @@
           <a:bodyPr/>
           <a:lstStyle/>
           <a:p>
-            <a:pPr lvl="0" indent="0" marL="0">
+            <a:pPr marL="0" lvl="0" indent="0">
               <a:buNone/>
             </a:pPr>
             <a:r>
-              <a:rPr/>
               <a:t>Insight</a:t>
             </a:r>
           </a:p>
@@ -4256,11 +5057,10 @@
           <a:bodyPr/>
           <a:lstStyle/>
           <a:p>
-            <a:pPr lvl="0" indent="0" marL="0">
+            <a:pPr marL="0" lvl="0" indent="0">
               <a:buNone/>
             </a:pPr>
             <a:r>
-              <a:rPr/>
               <a:t>Hasil analisis menunjukkan masih adanya kesenjangan pembangunan antarwilayah, terutama antara wilayah di Pulau Jawa dan luar Jawa. Keberadaan </a:t>
             </a:r>
             <a:r>
@@ -4268,7 +5068,6 @@
               <a:t>missing value</a:t>
             </a:r>
             <a:r>
-              <a:rPr/>
               <a:t> dan </a:t>
             </a:r>
             <a:r>
@@ -4276,7 +5075,6 @@
               <a:t>outlier</a:t>
             </a:r>
             <a:r>
-              <a:rPr/>
               <a:t> juga menegaskan pentingnya tahap </a:t>
             </a:r>
             <a:r>
@@ -4284,7 +5082,6 @@
               <a:t>data pre-processing</a:t>
             </a:r>
             <a:r>
-              <a:rPr/>
               <a:t> sebelum analisis dilakukan. Meskipun hubungan antara kemiskinan dan rata-rata lama sekolah tidak signifikan secara statistik, arah hubungan yang ditemukan tetap sesuai dengan teori dan mengindikasikan bahwa kemiskinan dipengaruhi oleh berbagai faktor lain, seperti infrastruktur, akses internet, dan layanan kesehatan.</a:t>
             </a:r>
           </a:p>
@@ -4292,6 +5089,9 @@
       </p:sp>
     </p:spTree>
   </p:cSld>
+  <p:clrMapOvr>
+    <a:masterClrMapping/>
+  </p:clrMapOvr>
 </p:sld>
 </file>
 
@@ -4327,11 +5127,10 @@
           <a:bodyPr/>
           <a:lstStyle/>
           <a:p>
-            <a:pPr lvl="0" indent="0" marL="0">
+            <a:pPr marL="0" lvl="0" indent="0">
               <a:buNone/>
             </a:pPr>
             <a:r>
-              <a:rPr/>
               <a:t>Saran</a:t>
             </a:r>
           </a:p>
@@ -4352,11 +5151,10 @@
           <a:bodyPr/>
           <a:lstStyle/>
           <a:p>
-            <a:pPr lvl="0" indent="0" marL="0">
+            <a:pPr marL="0" lvl="0" indent="0">
               <a:buNone/>
             </a:pPr>
             <a:r>
-              <a:rPr/>
               <a:t>Pemerintah daerah disarankan untuk meningkatkan investasi pada sektor pendidikan serta memperluas pemerataan infrastruktur, akses internet, dan layanan kesehatan guna mendukung pengurangan tingkat kemiskinan. Untuk penelitian selanjutnya, disarankan menggunakan analisis regresi berganda yang melibatkan lebih banyak variabel agar faktor-faktor yang memengaruhi kemiskinan dapat dijelaskan secara lebih komprehensif.</a:t>
             </a:r>
           </a:p>
@@ -4364,6 +5162,9 @@
       </p:sp>
     </p:spTree>
   </p:cSld>
+  <p:clrMapOvr>
+    <a:masterClrMapping/>
+  </p:clrMapOvr>
 </p:sld>
 </file>
 
@@ -4399,11 +5200,10 @@
           <a:bodyPr/>
           <a:lstStyle/>
           <a:p>
-            <a:pPr lvl="0" indent="0" marL="0">
+            <a:pPr marL="0" lvl="0" indent="0">
               <a:buNone/>
             </a:pPr>
             <a:r>
-              <a:rPr/>
               <a:t>Tujuan</a:t>
             </a:r>
           </a:p>
@@ -4424,11 +5224,10 @@
           <a:bodyPr/>
           <a:lstStyle/>
           <a:p>
-            <a:pPr lvl="0" indent="0" marL="0">
+            <a:pPr marL="0" lvl="0" indent="0">
               <a:buNone/>
             </a:pPr>
             <a:r>
-              <a:rPr/>
               <a:t>Analisis ini bertujuan memahami karakteristik data pembangunan wilayah melalui eksplorasi, statistika deskriptif, visualisasi data, identifikasi missing value dan outlier, serta analisis hubungan antar variabel untuk menghasilkan kesimpulan yang dapat dikomunikasikan secara sistematis dalam bentuk laporan ilmiah.</a:t>
             </a:r>
           </a:p>
@@ -4436,6 +5235,9 @@
       </p:sp>
     </p:spTree>
   </p:cSld>
+  <p:clrMapOvr>
+    <a:masterClrMapping/>
+  </p:clrMapOvr>
 </p:sld>
 </file>
 
@@ -4471,11 +5273,10 @@
           <a:bodyPr/>
           <a:lstStyle/>
           <a:p>
-            <a:pPr lvl="0" indent="0" marL="0">
+            <a:pPr marL="0" lvl="0" indent="0">
               <a:buNone/>
             </a:pPr>
             <a:r>
-              <a:rPr/>
               <a:t>Deskripsi Dataset</a:t>
             </a:r>
           </a:p>
@@ -4496,11 +5297,10 @@
           <a:bodyPr/>
           <a:lstStyle/>
           <a:p>
-            <a:pPr lvl="0" indent="0" marL="0">
+            <a:pPr marL="0" lvl="0" indent="0">
               <a:buNone/>
             </a:pPr>
             <a:r>
-              <a:rPr/>
               <a:t>Dataset yang digunakan dalam analisis ini adalah </a:t>
             </a:r>
             <a:r>
@@ -4508,7 +5308,6 @@
               <a:t>pembangunan_wilayah_missing_outlier.csv</a:t>
             </a:r>
             <a:r>
-              <a:rPr/>
               <a:t>, yang berisi informasi pembangunan wilayah pada tingkat kabupaten/kota di Indonesia. Variabel yang dianalisis mencakup identitas wilayah (wilayah, provinsi, dan tahun) serta berbagai indikator sosial-ekonomi, seperti PDRB per kapita, kemiskinan, pengangguran, IPM, harapan hidup, rata-rata lama sekolah, akses internet, kondisi jalan, dan akses air bersih. Selain itu, dataset juga memuat informasi kualitas data melalui variabel </a:t>
             </a:r>
             <a:r>
@@ -4516,7 +5315,6 @@
               <a:t>catatan_data</a:t>
             </a:r>
             <a:r>
-              <a:rPr/>
               <a:t> yang menunjukkan keberadaan missing value atau outlier.</a:t>
             </a:r>
           </a:p>
@@ -4524,6 +5322,9 @@
       </p:sp>
     </p:spTree>
   </p:cSld>
+  <p:clrMapOvr>
+    <a:masterClrMapping/>
+  </p:clrMapOvr>
 </p:sld>
 </file>
 
@@ -4559,11 +5360,10 @@
           <a:bodyPr/>
           <a:lstStyle/>
           <a:p>
-            <a:pPr lvl="0" indent="0" marL="0">
+            <a:pPr marL="0" lvl="0" indent="0">
               <a:buNone/>
             </a:pPr>
             <a:r>
-              <a:rPr/>
               <a:t>Tools</a:t>
             </a:r>
           </a:p>
@@ -4584,11 +5384,10 @@
           <a:bodyPr/>
           <a:lstStyle/>
           <a:p>
-            <a:pPr lvl="0" indent="0" marL="0">
+            <a:pPr marL="0" lvl="0" indent="0">
               <a:buNone/>
             </a:pPr>
             <a:r>
-              <a:rPr/>
               <a:t>Proyek ini menggunakan bahasa pemrograman R dan RStudio sebagai lingkungan utama untuk analisis data statistik. Pengolahan dan visualisasi data dilakukan dengan bantuan library </a:t>
             </a:r>
             <a:r>
@@ -4596,7 +5395,6 @@
               <a:t>dplyr</a:t>
             </a:r>
             <a:r>
-              <a:rPr/>
               <a:t> untuk manipulasi data serta </a:t>
             </a:r>
             <a:r>
@@ -4604,7 +5402,6 @@
               <a:t>ggplot2</a:t>
             </a:r>
             <a:r>
-              <a:rPr/>
               <a:t> untuk pembuatan grafik dan visualisasi. Selain itu, GitHub digunakan sebagai repositori untuk pengelolaan versi kode dan dokumen secara kolaboratif.</a:t>
             </a:r>
           </a:p>
@@ -4612,6 +5409,9 @@
       </p:sp>
     </p:spTree>
   </p:cSld>
+  <p:clrMapOvr>
+    <a:masterClrMapping/>
+  </p:clrMapOvr>
 </p:sld>
 </file>
 
@@ -4647,11 +5447,10 @@
           <a:bodyPr/>
           <a:lstStyle/>
           <a:p>
-            <a:pPr lvl="0" indent="0" marL="0">
+            <a:pPr marL="0" lvl="0" indent="0">
               <a:buNone/>
             </a:pPr>
             <a:r>
-              <a:rPr/>
               <a:t>Metode Analisis</a:t>
             </a:r>
           </a:p>
@@ -4672,11 +5471,10 @@
           <a:bodyPr/>
           <a:lstStyle/>
           <a:p>
-            <a:pPr lvl="0" indent="0" marL="0">
+            <a:pPr marL="0" lvl="0" indent="0">
               <a:buNone/>
             </a:pPr>
             <a:r>
-              <a:rPr/>
               <a:t>Analisis data dilakukan menggunakan bahasa pemrograman R melalui beberapa tahapan, yaitu statistika deskriptif untuk menggambarkan karakteristik data, pra-pemrosesan data yang mencakup penanganan missing value dengan imputasi median dan penghapusan outlier menggunakan metode IQR, serta visualisasi data menggunakan berbagai grafik eksploratif. Selanjutnya, dilakukan analisis korelasi Pearson untuk menguji hubungan antara rata-rata lama sekolah dan tingkat pengangguran terhadap tingkat kemiskinan. Tahap akhir meliputi analisis probabilitas dan distribusi data melalui histogram, kurva densitas, dan Q-Q Plot untuk mengevaluasi pola sebaran data serta asumsi kenormalannya.</a:t>
             </a:r>
           </a:p>
@@ -4684,6 +5482,9 @@
       </p:sp>
     </p:spTree>
   </p:cSld>
+  <p:clrMapOvr>
+    <a:masterClrMapping/>
+  </p:clrMapOvr>
 </p:sld>
 </file>
 
@@ -4719,11 +5520,10 @@
           <a:bodyPr/>
           <a:lstStyle/>
           <a:p>
-            <a:pPr lvl="0" indent="0" marL="0">
+            <a:pPr marL="0" lvl="0" indent="0">
               <a:buNone/>
             </a:pPr>
             <a:r>
-              <a:rPr/>
               <a:t>Statistika Deskriptif</a:t>
             </a:r>
           </a:p>
@@ -4744,11 +5544,10 @@
           <a:bodyPr/>
           <a:lstStyle/>
           <a:p>
-            <a:pPr lvl="0" indent="0" marL="0">
+            <a:pPr marL="0" lvl="0" indent="0">
               <a:buNone/>
             </a:pPr>
             <a:r>
-              <a:rPr/>
               <a:t>Analisis statistika deskriptif dilakukan terhadap seluruh variabel numerik dalam dataset dengan menghitung ukuran pemusatan dan penyebaran data, seperti mean, median, minimum, maksimum, kuartil, standar deviasi, dan varians. Hasil analisis menunjukkan bahwa variabel </a:t>
             </a:r>
             <a:r>
@@ -4756,7 +5555,6 @@
               <a:t>pdrb_perkapita</a:t>
             </a:r>
             <a:r>
-              <a:rPr/>
               <a:t> memiliki nilai rata-rata tertinggi, yaitu sebesar 135.650.500, yang menandakan skala nilainya jauh lebih besar dibandingkan variabel lainnya. Variabel ini juga memiliki standar deviasi terbesar (89.341.270) dan varians sebesar 7,98 × 10¹⁵, sehingga menunjukkan adanya variasi yang sangat besar antar wilayah. Selain itu, rentang data yang sangat lebar, yaitu dari 15.031.581 hingga 1.774.545.000, mengindikasikan distribusi data yang tidak sepenuhnya normal serta kemungkinan adanya nilai ekstrem (</a:t>
             </a:r>
             <a:r>
@@ -4764,7 +5562,6 @@
               <a:t>outlier</a:t>
             </a:r>
             <a:r>
-              <a:rPr/>
               <a:t>) yang memengaruhi sebaran data.</a:t>
             </a:r>
           </a:p>
@@ -4772,6 +5569,9 @@
       </p:sp>
     </p:spTree>
   </p:cSld>
+  <p:clrMapOvr>
+    <a:masterClrMapping/>
+  </p:clrMapOvr>
 </p:sld>
 </file>
 
@@ -4807,11 +5607,10 @@
           <a:bodyPr/>
           <a:lstStyle/>
           <a:p>
-            <a:pPr lvl="0" indent="0" marL="0">
+            <a:pPr marL="0" lvl="0" indent="0">
               <a:buNone/>
             </a:pPr>
             <a:r>
-              <a:rPr/>
               <a:t>Missing Value</a:t>
             </a:r>
           </a:p>
@@ -4832,7 +5631,7 @@
           <a:bodyPr/>
           <a:lstStyle/>
           <a:p>
-            <a:pPr lvl="0" indent="0" marL="0">
+            <a:pPr marL="0" lvl="0" indent="0">
               <a:buNone/>
             </a:pPr>
             <a:r>
@@ -4840,7 +5639,6 @@
               <a:t>Missing value</a:t>
             </a:r>
             <a:r>
-              <a:rPr/>
               <a:t> merupakan data yang seharusnya diperoleh saat proses pengumpulan data, tetapi tidak tersedia karena berbagai faktor, seperti responden yang tidak menjawab seluruh pertanyaan, kesalahan pengukuran, atau kesalahan pada proses entri data (Kaiser, 2014). Untuk menangani permasalahan tersebut, digunakan metode </a:t>
             </a:r>
             <a:r>
@@ -4848,7 +5646,6 @@
               <a:t>median imputation</a:t>
             </a:r>
             <a:r>
-              <a:rPr/>
               <a:t>, yaitu mengganti nilai yang hilang dengan nilai median dari variabel yang bersangkutan (Alam et al., 2023). Pada dataset yang dianalisis, beberapa variabel mengandung </a:t>
             </a:r>
             <a:r>
@@ -4856,7 +5653,6 @@
               <a:t>missing value</a:t>
             </a:r>
             <a:r>
-              <a:rPr/>
               <a:t>, sehingga dilakukan perhitungan median pada masing-masing variabel dan nilai tersebut digunakan untuk mengisi data yang hilang.</a:t>
             </a:r>
           </a:p>
@@ -4864,6 +5660,9 @@
       </p:sp>
     </p:spTree>
   </p:cSld>
+  <p:clrMapOvr>
+    <a:masterClrMapping/>
+  </p:clrMapOvr>
 </p:sld>
 </file>
 
@@ -4899,11 +5698,10 @@
           <a:bodyPr/>
           <a:lstStyle/>
           <a:p>
-            <a:pPr lvl="0" indent="0" marL="0">
+            <a:pPr marL="0" lvl="0" indent="0">
               <a:buNone/>
             </a:pPr>
             <a:r>
-              <a:rPr/>
               <a:t>Outlier</a:t>
             </a:r>
           </a:p>
@@ -4924,7 +5722,7 @@
           <a:bodyPr/>
           <a:lstStyle/>
           <a:p>
-            <a:pPr lvl="0" indent="0" marL="0">
+            <a:pPr marL="0" lvl="0" indent="0">
               <a:buNone/>
             </a:pPr>
             <a:r>
@@ -4932,7 +5730,6 @@
               <a:t>Outlier</a:t>
             </a:r>
             <a:r>
-              <a:rPr/>
               <a:t> merupakan nilai ekstrem yang berada di luar pola distribusi normal suatu variabel (Kwak dan Kim, 2017). Untuk menanganinya, digunakan metode </a:t>
             </a:r>
             <a:r>
@@ -4940,7 +5737,6 @@
               <a:t>trimming</a:t>
             </a:r>
             <a:r>
-              <a:rPr/>
               <a:t>, yaitu menghapus data </a:t>
             </a:r>
             <a:r>
@@ -4948,7 +5744,6 @@
               <a:t>outlier</a:t>
             </a:r>
             <a:r>
-              <a:rPr/>
               <a:t> dari dataset, karena jumlah </a:t>
             </a:r>
             <a:r>
@@ -4956,7 +5751,6 @@
               <a:t>outlier</a:t>
             </a:r>
             <a:r>
-              <a:rPr/>
               <a:t> yang ditemukan relatif sedikit sehingga tidak memberikan pengaruh yang signifikan terhadap keseluruhan data. Pada dataset ini terdapat 15 </a:t>
             </a:r>
             <a:r>
@@ -4964,7 +5758,6 @@
               <a:t>outlier</a:t>
             </a:r>
             <a:r>
-              <a:rPr/>
               <a:t> yang tersebar pada variabel </a:t>
             </a:r>
             <a:r>
@@ -4972,7 +5765,6 @@
               <a:t>pdrb_perkapita</a:t>
             </a:r>
             <a:r>
-              <a:rPr/>
               <a:t>, </a:t>
             </a:r>
             <a:r>
@@ -4980,7 +5772,6 @@
               <a:t>kemiskinan</a:t>
             </a:r>
             <a:r>
-              <a:rPr/>
               <a:t>, dan </a:t>
             </a:r>
             <a:r>
@@ -4988,7 +5779,6 @@
               <a:t>pengangguran</a:t>
             </a:r>
             <a:r>
-              <a:rPr/>
               <a:t> (masing-masing 5 </a:t>
             </a:r>
             <a:r>
@@ -4996,7 +5786,6 @@
               <a:t>outlier</a:t>
             </a:r>
             <a:r>
-              <a:rPr/>
               <a:t>), sehingga setelah proses </a:t>
             </a:r>
             <a:r>
@@ -5004,7 +5793,6 @@
               <a:t>trimming</a:t>
             </a:r>
             <a:r>
-              <a:rPr/>
               <a:t> jumlah observasi berkurang dari 2500 menjadi 2485.</a:t>
             </a:r>
           </a:p>
@@ -5012,6 +5800,9 @@
       </p:sp>
     </p:spTree>
   </p:cSld>
+  <p:clrMapOvr>
+    <a:masterClrMapping/>
+  </p:clrMapOvr>
 </p:sld>
 </file>
 
@@ -5333,265 +6124,4 @@
   </a:objectDefaults>
   <a:extraClrSchemeLst/>
 </a:theme>
-</file>
-
-<file path=ppt/theme/theme2.xml><?xml version="1.0" encoding="utf-8"?>
-<a:theme xmlns:a="http://schemas.openxmlformats.org/drawingml/2006/main" name="Office Theme">
-  <a:themeElements>
-    <a:clrScheme name="Office">
-      <a:dk1>
-        <a:sysClr val="windowText" lastClr="000000"/>
-      </a:dk1>
-      <a:lt1>
-        <a:sysClr val="window" lastClr="FFFFFF"/>
-      </a:lt1>
-      <a:dk2>
-        <a:srgbClr val="44546A"/>
-      </a:dk2>
-      <a:lt2>
-        <a:srgbClr val="E7E6E6"/>
-      </a:lt2>
-      <a:accent1>
-        <a:srgbClr val="5B9BD5"/>
-      </a:accent1>
-      <a:accent2>
-        <a:srgbClr val="ED7D31"/>
-      </a:accent2>
-      <a:accent3>
-        <a:srgbClr val="A5A5A5"/>
-      </a:accent3>
-      <a:accent4>
-        <a:srgbClr val="FFC000"/>
-      </a:accent4>
-      <a:accent5>
-        <a:srgbClr val="4472C4"/>
-      </a:accent5>
-      <a:accent6>
-        <a:srgbClr val="70AD47"/>
-      </a:accent6>
-      <a:hlink>
-        <a:srgbClr val="0563C1"/>
-      </a:hlink>
-      <a:folHlink>
-        <a:srgbClr val="954F72"/>
-      </a:folHlink>
-    </a:clrScheme>
-    <a:fontScheme name="Office">
-      <a:majorFont>
-        <a:latin typeface="Calibri Light" panose="020F0302020204030204"/>
-        <a:ea typeface=""/>
-        <a:cs typeface=""/>
-        <a:font script="Jpan" typeface="ＭＳ Ｐゴシック"/>
-        <a:font script="Hang" typeface="맑은 고딕"/>
-        <a:font script="Hans" typeface="宋体"/>
-        <a:font script="Hant" typeface="新細明體"/>
-        <a:font script="Arab" typeface="Times New Roman"/>
-        <a:font script="Hebr" typeface="Times New Roman"/>
-        <a:font script="Thai" typeface="Angsana New"/>
-        <a:font script="Ethi" typeface="Nyala"/>
-        <a:font script="Beng" typeface="Vrinda"/>
-        <a:font script="Gujr" typeface="Shruti"/>
-        <a:font script="Khmr" typeface="MoolBoran"/>
-        <a:font script="Knda" typeface="Tunga"/>
-        <a:font script="Guru" typeface="Raavi"/>
-        <a:font script="Cans" typeface="Euphemia"/>
-        <a:font script="Cher" typeface="Plantagenet Cherokee"/>
-        <a:font script="Yiii" typeface="Microsoft Yi Baiti"/>
-        <a:font script="Tibt" typeface="Microsoft Himalaya"/>
-        <a:font script="Thaa" typeface="MV Boli"/>
-        <a:font script="Deva" typeface="Mangal"/>
-        <a:font script="Telu" typeface="Gautami"/>
-        <a:font script="Taml" typeface="Latha"/>
-        <a:font script="Syrc" typeface="Estrangelo Edessa"/>
-        <a:font script="Orya" typeface="Kalinga"/>
-        <a:font script="Mlym" typeface="Kartika"/>
-        <a:font script="Laoo" typeface="DokChampa"/>
-        <a:font script="Sinh" typeface="Iskoola Pota"/>
-        <a:font script="Mong" typeface="Mongolian Baiti"/>
-        <a:font script="Viet" typeface="Times New Roman"/>
-        <a:font script="Uigh" typeface="Microsoft Uighur"/>
-        <a:font script="Geor" typeface="Sylfaen"/>
-      </a:majorFont>
-      <a:minorFont>
-        <a:latin typeface="Calibri" panose="020F0502020204030204"/>
-        <a:ea typeface=""/>
-        <a:cs typeface=""/>
-        <a:font script="Jpan" typeface="ＭＳ Ｐゴシック"/>
-        <a:font script="Hang" typeface="맑은 고딕"/>
-        <a:font script="Hans" typeface="宋体"/>
-        <a:font script="Hant" typeface="新細明體"/>
-        <a:font script="Arab" typeface="Arial"/>
-        <a:font script="Hebr" typeface="Arial"/>
-        <a:font script="Thai" typeface="Cordia New"/>
-        <a:font script="Ethi" typeface="Nyala"/>
-        <a:font script="Beng" typeface="Vrinda"/>
-        <a:font script="Gujr" typeface="Shruti"/>
-        <a:font script="Khmr" typeface="DaunPenh"/>
-        <a:font script="Knda" typeface="Tunga"/>
-        <a:font script="Guru" typeface="Raavi"/>
-        <a:font script="Cans" typeface="Euphemia"/>
-        <a:font script="Cher" typeface="Plantagenet Cherokee"/>
-        <a:font script="Yiii" typeface="Microsoft Yi Baiti"/>
-        <a:font script="Tibt" typeface="Microsoft Himalaya"/>
-        <a:font script="Thaa" typeface="MV Boli"/>
-        <a:font script="Deva" typeface="Mangal"/>
-        <a:font script="Telu" typeface="Gautami"/>
-        <a:font script="Taml" typeface="Latha"/>
-        <a:font script="Syrc" typeface="Estrangelo Edessa"/>
-        <a:font script="Orya" typeface="Kalinga"/>
-        <a:font script="Mlym" typeface="Kartika"/>
-        <a:font script="Laoo" typeface="DokChampa"/>
-        <a:font script="Sinh" typeface="Iskoola Pota"/>
-        <a:font script="Mong" typeface="Mongolian Baiti"/>
-        <a:font script="Viet" typeface="Arial"/>
-        <a:font script="Uigh" typeface="Microsoft Uighur"/>
-        <a:font script="Geor" typeface="Sylfaen"/>
-      </a:minorFont>
-    </a:fontScheme>
-    <a:fmtScheme name="Office">
-      <a:fillStyleLst>
-        <a:solidFill>
-          <a:schemeClr val="phClr"/>
-        </a:solidFill>
-        <a:gradFill rotWithShape="1">
-          <a:gsLst>
-            <a:gs pos="0">
-              <a:schemeClr val="phClr">
-                <a:lumMod val="110000"/>
-                <a:satMod val="105000"/>
-                <a:tint val="67000"/>
-              </a:schemeClr>
-            </a:gs>
-            <a:gs pos="50000">
-              <a:schemeClr val="phClr">
-                <a:lumMod val="105000"/>
-                <a:satMod val="103000"/>
-                <a:tint val="73000"/>
-              </a:schemeClr>
-            </a:gs>
-            <a:gs pos="100000">
-              <a:schemeClr val="phClr">
-                <a:lumMod val="105000"/>
-                <a:satMod val="109000"/>
-                <a:tint val="81000"/>
-              </a:schemeClr>
-            </a:gs>
-          </a:gsLst>
-          <a:lin ang="5400000" scaled="0"/>
-        </a:gradFill>
-        <a:gradFill rotWithShape="1">
-          <a:gsLst>
-            <a:gs pos="0">
-              <a:schemeClr val="phClr">
-                <a:satMod val="103000"/>
-                <a:lumMod val="102000"/>
-                <a:tint val="94000"/>
-              </a:schemeClr>
-            </a:gs>
-            <a:gs pos="50000">
-              <a:schemeClr val="phClr">
-                <a:satMod val="110000"/>
-                <a:lumMod val="100000"/>
-                <a:shade val="100000"/>
-              </a:schemeClr>
-            </a:gs>
-            <a:gs pos="100000">
-              <a:schemeClr val="phClr">
-                <a:lumMod val="99000"/>
-                <a:satMod val="120000"/>
-                <a:shade val="78000"/>
-              </a:schemeClr>
-            </a:gs>
-          </a:gsLst>
-          <a:lin ang="5400000" scaled="0"/>
-        </a:gradFill>
-      </a:fillStyleLst>
-      <a:lnStyleLst>
-        <a:ln w="6350" cap="flat" cmpd="sng" algn="ctr">
-          <a:solidFill>
-            <a:schemeClr val="phClr"/>
-          </a:solidFill>
-          <a:prstDash val="solid"/>
-          <a:miter lim="800000"/>
-        </a:ln>
-        <a:ln w="12700" cap="flat" cmpd="sng" algn="ctr">
-          <a:solidFill>
-            <a:schemeClr val="phClr"/>
-          </a:solidFill>
-          <a:prstDash val="solid"/>
-          <a:miter lim="800000"/>
-        </a:ln>
-        <a:ln w="19050" cap="flat" cmpd="sng" algn="ctr">
-          <a:solidFill>
-            <a:schemeClr val="phClr"/>
-          </a:solidFill>
-          <a:prstDash val="solid"/>
-          <a:miter lim="800000"/>
-        </a:ln>
-      </a:lnStyleLst>
-      <a:effectStyleLst>
-        <a:effectStyle>
-          <a:effectLst/>
-        </a:effectStyle>
-        <a:effectStyle>
-          <a:effectLst/>
-        </a:effectStyle>
-        <a:effectStyle>
-          <a:effectLst>
-            <a:outerShdw blurRad="57150" dist="19050" dir="5400000" algn="ctr" rotWithShape="0">
-              <a:srgbClr val="000000">
-                <a:alpha val="63000"/>
-              </a:srgbClr>
-            </a:outerShdw>
-          </a:effectLst>
-        </a:effectStyle>
-      </a:effectStyleLst>
-      <a:bgFillStyleLst>
-        <a:solidFill>
-          <a:schemeClr val="phClr"/>
-        </a:solidFill>
-        <a:solidFill>
-          <a:schemeClr val="phClr">
-            <a:tint val="95000"/>
-            <a:satMod val="170000"/>
-          </a:schemeClr>
-        </a:solidFill>
-        <a:gradFill rotWithShape="1">
-          <a:gsLst>
-            <a:gs pos="0">
-              <a:schemeClr val="phClr">
-                <a:tint val="93000"/>
-                <a:satMod val="150000"/>
-                <a:shade val="98000"/>
-                <a:lumMod val="102000"/>
-              </a:schemeClr>
-            </a:gs>
-            <a:gs pos="50000">
-              <a:schemeClr val="phClr">
-                <a:tint val="98000"/>
-                <a:satMod val="130000"/>
-                <a:shade val="90000"/>
-                <a:lumMod val="103000"/>
-              </a:schemeClr>
-            </a:gs>
-            <a:gs pos="100000">
-              <a:schemeClr val="phClr">
-                <a:shade val="63000"/>
-                <a:satMod val="120000"/>
-              </a:schemeClr>
-            </a:gs>
-          </a:gsLst>
-          <a:lin ang="5400000" scaled="0"/>
-        </a:gradFill>
-      </a:bgFillStyleLst>
-    </a:fmtScheme>
-  </a:themeElements>
-  <a:objectDefaults/>
-  <a:extraClrSchemeLst/>
-  <a:extLst>
-    <a:ext uri="{05A4C25C-085E-4340-85A3-A5531E510DB2}">
-      <thm15:themeFamily xmlns:thm15="http://schemas.microsoft.com/office/thememl/2012/main" name="Office Theme" id="{62F939B6-93AF-4DB8-9C6B-D6C7DFDC589F}" vid="{4A3C46E8-61CC-4603-A589-7422A47A8E4A}"/>
-    </a:ext>
-  </a:extLst>
-</a:theme>
 </file>
--- a/dokumen/PPT-Laporan.pptx
+++ b/dokumen/PPT-Laporan.pptx
@@ -3141,6 +3141,34 @@
           </a:p>
         </p:txBody>
       </p:sp>
+      <p:sp>
+        <p:nvSpPr>
+          <p:cNvPr id="3" name="Subtitle 2"/>
+          <p:cNvSpPr>
+            <a:spLocks noGrp="1"/>
+          </p:cNvSpPr>
+          <p:nvPr>
+            <p:ph idx="1" type="subTitle"/>
+          </p:nvPr>
+        </p:nvSpPr>
+        <p:spPr>
+          <a:xfrm>
+            <a:off x="1371600" y="2914650"/>
+            <a:ext cx="6400800" cy="1314450"/>
+          </a:xfrm>
+        </p:spPr>
+        <p:txBody>
+          <a:bodyPr/>
+          <a:lstStyle/>
+          <a:p>
+            <a:pPr lvl="0" indent="0" marL="0">
+              <a:buNone/>
+            </a:pPr>
+            <a:br/>
+            <a:br/>
+          </a:p>
+        </p:txBody>
+      </p:sp>
     </p:spTree>
   </p:cSld>
 </p:sld>
@@ -3190,7 +3218,7 @@
       </p:sp>
       <p:pic>
         <p:nvPicPr>
-          <p:cNvPr descr="PPT-Laporan_files/images/BarPlotJumlahLaporanProvinsi.png" id="0" name="Picture 1"/>
+          <p:cNvPr descr="images/BarPlotJumlahLaporanProvinsi.png" id="0" name="Picture 1"/>
           <p:cNvPicPr>
             <a:picLocks noGrp="1" noChangeAspect="1"/>
           </p:cNvPicPr>
@@ -3267,7 +3295,7 @@
       </p:sp>
       <p:pic>
         <p:nvPicPr>
-          <p:cNvPr descr="PPT-Laporan_files/images/BarPlotJumlahLaporanTahun.png" id="0" name="Picture 1"/>
+          <p:cNvPr descr="images/BarPlotJumlahLaporanTahun.png" id="0" name="Picture 1"/>
           <p:cNvPicPr>
             <a:picLocks noGrp="1" noChangeAspect="1"/>
           </p:cNvPicPr>
@@ -3344,7 +3372,7 @@
       </p:sp>
       <p:pic>
         <p:nvPicPr>
-          <p:cNvPr descr="PPT-Laporan_files/images/visualisasi2.png" id="0" name="Picture 1"/>
+          <p:cNvPr descr="images/visualisasi2.png" id="0" name="Picture 1"/>
           <p:cNvPicPr>
             <a:picLocks noGrp="1" noChangeAspect="1"/>
           </p:cNvPicPr>
@@ -3421,7 +3449,7 @@
       </p:sp>
       <p:pic>
         <p:nvPicPr>
-          <p:cNvPr descr="PPT-Laporan_files/images/visualisasi3.png" id="0" name="Picture 1"/>
+          <p:cNvPr descr="images/visualisasi3.png" id="0" name="Picture 1"/>
           <p:cNvPicPr>
             <a:picLocks noGrp="1" noChangeAspect="1"/>
           </p:cNvPicPr>
@@ -3498,7 +3526,7 @@
       </p:sp>
       <p:pic>
         <p:nvPicPr>
-          <p:cNvPr descr="PPT-Laporan_files/images/visualisasi4.png" id="0" name="Picture 1"/>
+          <p:cNvPr descr="images/visualisasi4.png" id="0" name="Picture 1"/>
           <p:cNvPicPr>
             <a:picLocks noGrp="1" noChangeAspect="1"/>
           </p:cNvPicPr>
@@ -3575,7 +3603,7 @@
       </p:sp>
       <p:pic>
         <p:nvPicPr>
-          <p:cNvPr descr="PPT-Laporan_files/images/Uji Normalitas Kemiskinan.png" id="0" name="Picture 1"/>
+          <p:cNvPr descr="images/Uji%20Normalitas%20Kemiskinan.png" id="0" name="Picture 1"/>
           <p:cNvPicPr>
             <a:picLocks noGrp="1" noChangeAspect="1"/>
           </p:cNvPicPr>
@@ -3652,7 +3680,7 @@
       </p:sp>
       <p:pic>
         <p:nvPicPr>
-          <p:cNvPr descr="PPT-Laporan_files/images/Perbandingan Distribusi Peluang Kemiskinan.png" id="0" name="Picture 1"/>
+          <p:cNvPr descr="images/Perbandingan%20Distribusi%20Peluang%20Kemiskinan.png" id="0" name="Picture 1"/>
           <p:cNvPicPr>
             <a:picLocks noGrp="1" noChangeAspect="1"/>
           </p:cNvPicPr>
@@ -3729,7 +3757,7 @@
       </p:sp>
       <p:pic>
         <p:nvPicPr>
-          <p:cNvPr descr="PPT-Laporan_files/images/Korelasi1.PNG" id="0" name="Picture 1"/>
+          <p:cNvPr descr="images/Korelasi1.PNG" id="0" name="Picture 1"/>
           <p:cNvPicPr>
             <a:picLocks noGrp="1" noChangeAspect="1"/>
           </p:cNvPicPr>
@@ -3806,7 +3834,7 @@
       </p:sp>
       <p:pic>
         <p:nvPicPr>
-          <p:cNvPr descr="PPT-Laporan_files/images/Korelasi2.PNG" id="0" name="Picture 1"/>
+          <p:cNvPr descr="images/Korelasi2.PNG" id="0" name="Picture 1"/>
           <p:cNvPicPr>
             <a:picLocks noGrp="1" noChangeAspect="1"/>
           </p:cNvPicPr>
